--- a/2_STM32基本功能.pptx
+++ b/2_STM32基本功能.pptx
@@ -27,6 +27,25 @@
     <p:sldId id="269" r:id="rId21"/>
     <p:sldId id="272" r:id="rId22"/>
     <p:sldId id="277" r:id="rId23"/>
+    <p:sldId id="279" r:id="rId24"/>
+    <p:sldId id="281" r:id="rId25"/>
+    <p:sldId id="282" r:id="rId26"/>
+    <p:sldId id="283" r:id="rId27"/>
+    <p:sldId id="284" r:id="rId28"/>
+    <p:sldId id="286" r:id="rId29"/>
+    <p:sldId id="285" r:id="rId30"/>
+    <p:sldId id="287" r:id="rId31"/>
+    <p:sldId id="290" r:id="rId32"/>
+    <p:sldId id="289" r:id="rId33"/>
+    <p:sldId id="280" r:id="rId34"/>
+    <p:sldId id="288" r:id="rId35"/>
+    <p:sldId id="291" r:id="rId36"/>
+    <p:sldId id="292" r:id="rId37"/>
+    <p:sldId id="297" r:id="rId38"/>
+    <p:sldId id="296" r:id="rId39"/>
+    <p:sldId id="294" r:id="rId40"/>
+    <p:sldId id="293" r:id="rId41"/>
+    <p:sldId id="295" r:id="rId42"/>
   </p:sldIdLst>
   <p:sldSz cx="12192000" cy="6858000"/>
   <p:notesSz cx="6858000" cy="9144000"/>
@@ -280,7 +299,7 @@
           <a:p>
             <a:fld id="{044C0B81-5930-4B25-A903-A40C83326BB2}" type="datetimeFigureOut">
               <a:rPr lang="zh-CN" altLang="en-US" smtClean="0"/>
-              <a:t>2026/7/7</a:t>
+              <a:t>2026/7/8</a:t>
             </a:fld>
             <a:endParaRPr lang="zh-CN" altLang="en-US"/>
           </a:p>
@@ -478,7 +497,7 @@
           <a:p>
             <a:fld id="{044C0B81-5930-4B25-A903-A40C83326BB2}" type="datetimeFigureOut">
               <a:rPr lang="zh-CN" altLang="en-US" smtClean="0"/>
-              <a:t>2026/7/7</a:t>
+              <a:t>2026/7/8</a:t>
             </a:fld>
             <a:endParaRPr lang="zh-CN" altLang="en-US"/>
           </a:p>
@@ -686,7 +705,7 @@
           <a:p>
             <a:fld id="{044C0B81-5930-4B25-A903-A40C83326BB2}" type="datetimeFigureOut">
               <a:rPr lang="zh-CN" altLang="en-US" smtClean="0"/>
-              <a:t>2026/7/7</a:t>
+              <a:t>2026/7/8</a:t>
             </a:fld>
             <a:endParaRPr lang="zh-CN" altLang="en-US"/>
           </a:p>
@@ -884,7 +903,7 @@
           <a:p>
             <a:fld id="{044C0B81-5930-4B25-A903-A40C83326BB2}" type="datetimeFigureOut">
               <a:rPr lang="zh-CN" altLang="en-US" smtClean="0"/>
-              <a:t>2026/7/7</a:t>
+              <a:t>2026/7/8</a:t>
             </a:fld>
             <a:endParaRPr lang="zh-CN" altLang="en-US"/>
           </a:p>
@@ -1159,7 +1178,7 @@
           <a:p>
             <a:fld id="{044C0B81-5930-4B25-A903-A40C83326BB2}" type="datetimeFigureOut">
               <a:rPr lang="zh-CN" altLang="en-US" smtClean="0"/>
-              <a:t>2026/7/7</a:t>
+              <a:t>2026/7/8</a:t>
             </a:fld>
             <a:endParaRPr lang="zh-CN" altLang="en-US"/>
           </a:p>
@@ -1424,7 +1443,7 @@
           <a:p>
             <a:fld id="{044C0B81-5930-4B25-A903-A40C83326BB2}" type="datetimeFigureOut">
               <a:rPr lang="zh-CN" altLang="en-US" smtClean="0"/>
-              <a:t>2026/7/7</a:t>
+              <a:t>2026/7/8</a:t>
             </a:fld>
             <a:endParaRPr lang="zh-CN" altLang="en-US"/>
           </a:p>
@@ -1836,7 +1855,7 @@
           <a:p>
             <a:fld id="{044C0B81-5930-4B25-A903-A40C83326BB2}" type="datetimeFigureOut">
               <a:rPr lang="zh-CN" altLang="en-US" smtClean="0"/>
-              <a:t>2026/7/7</a:t>
+              <a:t>2026/7/8</a:t>
             </a:fld>
             <a:endParaRPr lang="zh-CN" altLang="en-US"/>
           </a:p>
@@ -1977,7 +1996,7 @@
           <a:p>
             <a:fld id="{044C0B81-5930-4B25-A903-A40C83326BB2}" type="datetimeFigureOut">
               <a:rPr lang="zh-CN" altLang="en-US" smtClean="0"/>
-              <a:t>2026/7/7</a:t>
+              <a:t>2026/7/8</a:t>
             </a:fld>
             <a:endParaRPr lang="zh-CN" altLang="en-US"/>
           </a:p>
@@ -2090,7 +2109,7 @@
           <a:p>
             <a:fld id="{044C0B81-5930-4B25-A903-A40C83326BB2}" type="datetimeFigureOut">
               <a:rPr lang="zh-CN" altLang="en-US" smtClean="0"/>
-              <a:t>2026/7/7</a:t>
+              <a:t>2026/7/8</a:t>
             </a:fld>
             <a:endParaRPr lang="zh-CN" altLang="en-US"/>
           </a:p>
@@ -2401,7 +2420,7 @@
           <a:p>
             <a:fld id="{044C0B81-5930-4B25-A903-A40C83326BB2}" type="datetimeFigureOut">
               <a:rPr lang="zh-CN" altLang="en-US" smtClean="0"/>
-              <a:t>2026/7/7</a:t>
+              <a:t>2026/7/8</a:t>
             </a:fld>
             <a:endParaRPr lang="zh-CN" altLang="en-US"/>
           </a:p>
@@ -2689,7 +2708,7 @@
           <a:p>
             <a:fld id="{044C0B81-5930-4B25-A903-A40C83326BB2}" type="datetimeFigureOut">
               <a:rPr lang="zh-CN" altLang="en-US" smtClean="0"/>
-              <a:t>2026/7/7</a:t>
+              <a:t>2026/7/8</a:t>
             </a:fld>
             <a:endParaRPr lang="zh-CN" altLang="en-US"/>
           </a:p>
@@ -2930,7 +2949,7 @@
           <a:p>
             <a:fld id="{044C0B81-5930-4B25-A903-A40C83326BB2}" type="datetimeFigureOut">
               <a:rPr lang="zh-CN" altLang="en-US" smtClean="0"/>
-              <a:t>2026/7/7</a:t>
+              <a:t>2026/7/8</a:t>
             </a:fld>
             <a:endParaRPr lang="zh-CN" altLang="en-US"/>
           </a:p>
@@ -5849,6 +5868,1390 @@
 </p:sld>
 </file>
 
+<file path=ppt/slides/slide23.xml><?xml version="1.0" encoding="utf-8"?>
+<p:sld xmlns:a="http://schemas.openxmlformats.org/drawingml/2006/main" xmlns:r="http://schemas.openxmlformats.org/officeDocument/2006/relationships" xmlns:p="http://schemas.openxmlformats.org/presentationml/2006/main">
+  <p:cSld>
+    <p:spTree>
+      <p:nvGrpSpPr>
+        <p:cNvPr id="1" name=""/>
+        <p:cNvGrpSpPr/>
+        <p:nvPr/>
+      </p:nvGrpSpPr>
+      <p:grpSpPr>
+        <a:xfrm>
+          <a:off x="0" y="0"/>
+          <a:ext cx="0" cy="0"/>
+          <a:chOff x="0" y="0"/>
+          <a:chExt cx="0" cy="0"/>
+        </a:xfrm>
+      </p:grpSpPr>
+      <p:sp>
+        <p:nvSpPr>
+          <p:cNvPr id="2" name="标题 1">
+            <a:extLst>
+              <a:ext uri="{FF2B5EF4-FFF2-40B4-BE49-F238E27FC236}">
+                <a16:creationId xmlns:a16="http://schemas.microsoft.com/office/drawing/2014/main" id="{A276AE59-FC0D-8896-151E-65966EAB331D}"/>
+              </a:ext>
+            </a:extLst>
+          </p:cNvPr>
+          <p:cNvSpPr>
+            <a:spLocks noGrp="1"/>
+          </p:cNvSpPr>
+          <p:nvPr>
+            <p:ph type="ctrTitle"/>
+          </p:nvPr>
+        </p:nvSpPr>
+        <p:spPr/>
+        <p:txBody>
+          <a:bodyPr anchor="ctr"/>
+          <a:lstStyle/>
+          <a:p>
+            <a:r>
+              <a:rPr lang="en-US" altLang="zh-SG" dirty="0"/>
+              <a:t>2.3 </a:t>
+            </a:r>
+            <a:r>
+              <a:rPr lang="en-US" altLang="zh-CN" dirty="0"/>
+              <a:t>UART</a:t>
+            </a:r>
+            <a:endParaRPr lang="zh-SG" altLang="en-US" dirty="0"/>
+          </a:p>
+        </p:txBody>
+      </p:sp>
+      <p:sp>
+        <p:nvSpPr>
+          <p:cNvPr id="3" name="副标题 2">
+            <a:extLst>
+              <a:ext uri="{FF2B5EF4-FFF2-40B4-BE49-F238E27FC236}">
+                <a16:creationId xmlns:a16="http://schemas.microsoft.com/office/drawing/2014/main" id="{139B7C7D-63FE-38B6-8F97-78E8F627D50A}"/>
+              </a:ext>
+            </a:extLst>
+          </p:cNvPr>
+          <p:cNvSpPr>
+            <a:spLocks noGrp="1"/>
+          </p:cNvSpPr>
+          <p:nvPr>
+            <p:ph type="subTitle" idx="1"/>
+          </p:nvPr>
+        </p:nvSpPr>
+        <p:spPr>
+          <a:xfrm>
+            <a:off x="1524000" y="3429000"/>
+            <a:ext cx="9144000" cy="3255962"/>
+          </a:xfrm>
+        </p:spPr>
+        <p:txBody>
+          <a:bodyPr>
+            <a:normAutofit/>
+          </a:bodyPr>
+          <a:lstStyle/>
+          <a:p>
+            <a:r>
+              <a:rPr lang="zh-CN" altLang="en-US" dirty="0"/>
+              <a:t>要求：</a:t>
+            </a:r>
+            <a:endParaRPr lang="en-US" altLang="zh-CN" dirty="0"/>
+          </a:p>
+          <a:p>
+            <a:pPr marL="342900" indent="-342900">
+              <a:buFont typeface="Arial" panose="020B0604020202020204" pitchFamily="34" charset="0"/>
+              <a:buChar char="•"/>
+            </a:pPr>
+            <a:r>
+              <a:rPr lang="zh-CN" altLang="en-US" dirty="0"/>
+              <a:t>根据需求配置波特率</a:t>
+            </a:r>
+            <a:endParaRPr lang="en-US" altLang="zh-CN" dirty="0"/>
+          </a:p>
+          <a:p>
+            <a:pPr marL="342900" indent="-342900">
+              <a:buFont typeface="Arial" panose="020B0604020202020204" pitchFamily="34" charset="0"/>
+              <a:buChar char="•"/>
+            </a:pPr>
+            <a:r>
+              <a:rPr lang="zh-CN" altLang="en-US" dirty="0"/>
+              <a:t>区分数据位、停止位、校验位</a:t>
+            </a:r>
+            <a:endParaRPr lang="en-US" altLang="zh-CN" dirty="0"/>
+          </a:p>
+          <a:p>
+            <a:pPr marL="342900" indent="-342900">
+              <a:buFont typeface="Arial" panose="020B0604020202020204" pitchFamily="34" charset="0"/>
+              <a:buChar char="•"/>
+            </a:pPr>
+            <a:r>
+              <a:rPr lang="zh-CN" altLang="en-US" dirty="0"/>
+              <a:t>处理</a:t>
+            </a:r>
+            <a:r>
+              <a:rPr lang="en-US" altLang="zh-CN" dirty="0"/>
+              <a:t>ORE</a:t>
+            </a:r>
+            <a:r>
+              <a:rPr lang="zh-CN" altLang="en-US" dirty="0"/>
+              <a:t>错误，避免接收中断</a:t>
+            </a:r>
+            <a:endParaRPr lang="en-US" altLang="zh-CN" dirty="0"/>
+          </a:p>
+          <a:p>
+            <a:pPr marL="342900" indent="-342900">
+              <a:buFont typeface="Arial" panose="020B0604020202020204" pitchFamily="34" charset="0"/>
+              <a:buChar char="•"/>
+            </a:pPr>
+            <a:r>
+              <a:rPr lang="zh-CN" altLang="en-US" dirty="0"/>
+              <a:t>正确配置和使用</a:t>
+            </a:r>
+            <a:r>
+              <a:rPr lang="en-US" altLang="zh-CN" dirty="0"/>
+              <a:t>DMA</a:t>
+            </a:r>
+          </a:p>
+          <a:p>
+            <a:pPr marL="342900" indent="-342900">
+              <a:buFont typeface="Arial" panose="020B0604020202020204" pitchFamily="34" charset="0"/>
+              <a:buChar char="•"/>
+            </a:pPr>
+            <a:r>
+              <a:rPr lang="zh-CN" altLang="en-US" dirty="0"/>
+              <a:t>选择接收模式与数据结构</a:t>
+            </a:r>
+            <a:endParaRPr lang="zh-SG" altLang="en-US" dirty="0"/>
+          </a:p>
+        </p:txBody>
+      </p:sp>
+    </p:spTree>
+    <p:extLst>
+      <p:ext uri="{BB962C8B-B14F-4D97-AF65-F5344CB8AC3E}">
+        <p14:creationId xmlns:p14="http://schemas.microsoft.com/office/powerpoint/2010/main" val="1129332805"/>
+      </p:ext>
+    </p:extLst>
+  </p:cSld>
+  <p:clrMapOvr>
+    <a:masterClrMapping/>
+  </p:clrMapOvr>
+</p:sld>
+</file>
+
+<file path=ppt/slides/slide24.xml><?xml version="1.0" encoding="utf-8"?>
+<p:sld xmlns:a="http://schemas.openxmlformats.org/drawingml/2006/main" xmlns:r="http://schemas.openxmlformats.org/officeDocument/2006/relationships" xmlns:p="http://schemas.openxmlformats.org/presentationml/2006/main">
+  <p:cSld>
+    <p:spTree>
+      <p:nvGrpSpPr>
+        <p:cNvPr id="1" name=""/>
+        <p:cNvGrpSpPr/>
+        <p:nvPr/>
+      </p:nvGrpSpPr>
+      <p:grpSpPr>
+        <a:xfrm>
+          <a:off x="0" y="0"/>
+          <a:ext cx="0" cy="0"/>
+          <a:chOff x="0" y="0"/>
+          <a:chExt cx="0" cy="0"/>
+        </a:xfrm>
+      </p:grpSpPr>
+      <p:sp>
+        <p:nvSpPr>
+          <p:cNvPr id="2" name="标题 1">
+            <a:extLst>
+              <a:ext uri="{FF2B5EF4-FFF2-40B4-BE49-F238E27FC236}">
+                <a16:creationId xmlns:a16="http://schemas.microsoft.com/office/drawing/2014/main" id="{C97D0232-D3A8-1A61-F3DF-54CA519D3628}"/>
+              </a:ext>
+            </a:extLst>
+          </p:cNvPr>
+          <p:cNvSpPr>
+            <a:spLocks noGrp="1"/>
+          </p:cNvSpPr>
+          <p:nvPr>
+            <p:ph type="title"/>
+          </p:nvPr>
+        </p:nvSpPr>
+        <p:spPr/>
+        <p:txBody>
+          <a:bodyPr/>
+          <a:lstStyle/>
+          <a:p>
+            <a:r>
+              <a:rPr lang="zh-CN" altLang="en-US" dirty="0"/>
+              <a:t>波特率</a:t>
+            </a:r>
+            <a:endParaRPr lang="zh-SG" altLang="en-US" dirty="0"/>
+          </a:p>
+        </p:txBody>
+      </p:sp>
+      <p:sp>
+        <p:nvSpPr>
+          <p:cNvPr id="3" name="内容占位符 2">
+            <a:extLst>
+              <a:ext uri="{FF2B5EF4-FFF2-40B4-BE49-F238E27FC236}">
+                <a16:creationId xmlns:a16="http://schemas.microsoft.com/office/drawing/2014/main" id="{559B2E4D-092B-5AB8-17AE-04F16804C2CA}"/>
+              </a:ext>
+            </a:extLst>
+          </p:cNvPr>
+          <p:cNvSpPr>
+            <a:spLocks noGrp="1"/>
+          </p:cNvSpPr>
+          <p:nvPr>
+            <p:ph idx="1"/>
+          </p:nvPr>
+        </p:nvSpPr>
+        <p:spPr/>
+        <p:txBody>
+          <a:bodyPr/>
+          <a:lstStyle/>
+          <a:p>
+            <a:r>
+              <a:rPr lang="en-US" altLang="zh-CN" dirty="0"/>
+              <a:t>UART</a:t>
+            </a:r>
+            <a:r>
+              <a:rPr lang="zh-CN" altLang="en-US" dirty="0"/>
+              <a:t>中无需在意比特率和波特率的差别（相等）</a:t>
+            </a:r>
+            <a:endParaRPr lang="en-US" altLang="zh-CN" dirty="0"/>
+          </a:p>
+          <a:p>
+            <a:r>
+              <a:rPr lang="zh-CN" altLang="en-US" dirty="0"/>
+              <a:t>双方波特率相近即可正常通信</a:t>
+            </a:r>
+            <a:endParaRPr lang="zh-SG" altLang="en-US" dirty="0"/>
+          </a:p>
+        </p:txBody>
+      </p:sp>
+    </p:spTree>
+    <p:extLst>
+      <p:ext uri="{BB962C8B-B14F-4D97-AF65-F5344CB8AC3E}">
+        <p14:creationId xmlns:p14="http://schemas.microsoft.com/office/powerpoint/2010/main" val="1645998263"/>
+      </p:ext>
+    </p:extLst>
+  </p:cSld>
+  <p:clrMapOvr>
+    <a:masterClrMapping/>
+  </p:clrMapOvr>
+</p:sld>
+</file>
+
+<file path=ppt/slides/slide25.xml><?xml version="1.0" encoding="utf-8"?>
+<p:sld xmlns:a="http://schemas.openxmlformats.org/drawingml/2006/main" xmlns:r="http://schemas.openxmlformats.org/officeDocument/2006/relationships" xmlns:p="http://schemas.openxmlformats.org/presentationml/2006/main">
+  <p:cSld>
+    <p:spTree>
+      <p:nvGrpSpPr>
+        <p:cNvPr id="1" name=""/>
+        <p:cNvGrpSpPr/>
+        <p:nvPr/>
+      </p:nvGrpSpPr>
+      <p:grpSpPr>
+        <a:xfrm>
+          <a:off x="0" y="0"/>
+          <a:ext cx="0" cy="0"/>
+          <a:chOff x="0" y="0"/>
+          <a:chExt cx="0" cy="0"/>
+        </a:xfrm>
+      </p:grpSpPr>
+      <p:sp>
+        <p:nvSpPr>
+          <p:cNvPr id="2" name="标题 1">
+            <a:extLst>
+              <a:ext uri="{FF2B5EF4-FFF2-40B4-BE49-F238E27FC236}">
+                <a16:creationId xmlns:a16="http://schemas.microsoft.com/office/drawing/2014/main" id="{4E3DDE69-E4DC-9A5A-C847-6C5EF29806C6}"/>
+              </a:ext>
+            </a:extLst>
+          </p:cNvPr>
+          <p:cNvSpPr>
+            <a:spLocks noGrp="1"/>
+          </p:cNvSpPr>
+          <p:nvPr>
+            <p:ph type="title"/>
+          </p:nvPr>
+        </p:nvSpPr>
+        <p:spPr/>
+        <p:txBody>
+          <a:bodyPr/>
+          <a:lstStyle/>
+          <a:p>
+            <a:r>
+              <a:rPr lang="zh-CN" altLang="en-US" dirty="0"/>
+              <a:t>数据位、校验位、停止位</a:t>
+            </a:r>
+            <a:endParaRPr lang="zh-SG" altLang="en-US" dirty="0"/>
+          </a:p>
+        </p:txBody>
+      </p:sp>
+      <p:sp>
+        <p:nvSpPr>
+          <p:cNvPr id="3" name="内容占位符 2">
+            <a:extLst>
+              <a:ext uri="{FF2B5EF4-FFF2-40B4-BE49-F238E27FC236}">
+                <a16:creationId xmlns:a16="http://schemas.microsoft.com/office/drawing/2014/main" id="{53EB134E-FDC5-005B-7A7D-C853668BA4E9}"/>
+              </a:ext>
+            </a:extLst>
+          </p:cNvPr>
+          <p:cNvSpPr>
+            <a:spLocks noGrp="1"/>
+          </p:cNvSpPr>
+          <p:nvPr>
+            <p:ph idx="1"/>
+          </p:nvPr>
+        </p:nvSpPr>
+        <p:spPr/>
+        <p:txBody>
+          <a:bodyPr/>
+          <a:lstStyle/>
+          <a:p>
+            <a:r>
+              <a:rPr lang="zh-SG" altLang="en-US" dirty="0"/>
+              <a:t>数据位</a:t>
+            </a:r>
+            <a:r>
+              <a:rPr lang="zh-SG" altLang="en-GB" dirty="0"/>
+              <a:t>：</a:t>
+            </a:r>
+            <a:r>
+              <a:rPr lang="zh-SG" altLang="en-US" dirty="0"/>
+              <a:t>有效数据</a:t>
+            </a:r>
+            <a:endParaRPr lang="en-US" altLang="zh-SG" dirty="0"/>
+          </a:p>
+          <a:p>
+            <a:r>
+              <a:rPr lang="zh-CN" altLang="en-US" dirty="0"/>
+              <a:t>校验位：可选，用于奇偶校验</a:t>
+            </a:r>
+            <a:endParaRPr lang="en-US" altLang="zh-CN" dirty="0"/>
+          </a:p>
+          <a:p>
+            <a:r>
+              <a:rPr lang="zh-CN" altLang="en-US" dirty="0"/>
+              <a:t>停止位：表示一帧结束，给接收端留出恢复时间</a:t>
+            </a:r>
+            <a:endParaRPr lang="en-US" altLang="zh-CN" dirty="0"/>
+          </a:p>
+          <a:p>
+            <a:r>
+              <a:rPr lang="zh-CN" altLang="en-US" dirty="0"/>
+              <a:t>注意：</a:t>
+            </a:r>
+            <a:r>
+              <a:rPr lang="en-US" altLang="zh-CN" dirty="0" err="1"/>
+              <a:t>CubeMX</a:t>
+            </a:r>
+            <a:r>
+              <a:rPr lang="zh-CN" altLang="en-US" dirty="0"/>
+              <a:t>的</a:t>
+            </a:r>
+            <a:r>
+              <a:rPr lang="en-US" altLang="zh-CN" dirty="0"/>
+              <a:t>Word Length</a:t>
+            </a:r>
+            <a:r>
+              <a:rPr lang="zh-CN" altLang="en-US" dirty="0"/>
+              <a:t>项包含数据位和校验位</a:t>
+            </a:r>
+            <a:endParaRPr lang="en-US" altLang="zh-CN" dirty="0"/>
+          </a:p>
+          <a:p>
+            <a:r>
+              <a:rPr lang="zh-CN" altLang="en-US" dirty="0"/>
+              <a:t>配置相同即可正常通信</a:t>
+            </a:r>
+            <a:endParaRPr lang="en-US" altLang="zh-CN" dirty="0"/>
+          </a:p>
+        </p:txBody>
+      </p:sp>
+      <p:pic>
+        <p:nvPicPr>
+          <p:cNvPr id="5" name="图片 4">
+            <a:extLst>
+              <a:ext uri="{FF2B5EF4-FFF2-40B4-BE49-F238E27FC236}">
+                <a16:creationId xmlns:a16="http://schemas.microsoft.com/office/drawing/2014/main" id="{B94BAF62-D2E9-4731-B368-449C90DA4F94}"/>
+              </a:ext>
+            </a:extLst>
+          </p:cNvPr>
+          <p:cNvPicPr>
+            <a:picLocks noChangeAspect="1"/>
+          </p:cNvPicPr>
+          <p:nvPr/>
+        </p:nvPicPr>
+        <p:blipFill>
+          <a:blip r:embed="rId2"/>
+          <a:stretch>
+            <a:fillRect/>
+          </a:stretch>
+        </p:blipFill>
+        <p:spPr>
+          <a:xfrm>
+            <a:off x="4828147" y="4309802"/>
+            <a:ext cx="7363853" cy="1867161"/>
+          </a:xfrm>
+          <a:prstGeom prst="rect">
+            <a:avLst/>
+          </a:prstGeom>
+        </p:spPr>
+      </p:pic>
+    </p:spTree>
+    <p:extLst>
+      <p:ext uri="{BB962C8B-B14F-4D97-AF65-F5344CB8AC3E}">
+        <p14:creationId xmlns:p14="http://schemas.microsoft.com/office/powerpoint/2010/main" val="1442357573"/>
+      </p:ext>
+    </p:extLst>
+  </p:cSld>
+  <p:clrMapOvr>
+    <a:masterClrMapping/>
+  </p:clrMapOvr>
+</p:sld>
+</file>
+
+<file path=ppt/slides/slide26.xml><?xml version="1.0" encoding="utf-8"?>
+<p:sld xmlns:a="http://schemas.openxmlformats.org/drawingml/2006/main" xmlns:r="http://schemas.openxmlformats.org/officeDocument/2006/relationships" xmlns:p="http://schemas.openxmlformats.org/presentationml/2006/main">
+  <p:cSld>
+    <p:spTree>
+      <p:nvGrpSpPr>
+        <p:cNvPr id="1" name=""/>
+        <p:cNvGrpSpPr/>
+        <p:nvPr/>
+      </p:nvGrpSpPr>
+      <p:grpSpPr>
+        <a:xfrm>
+          <a:off x="0" y="0"/>
+          <a:ext cx="0" cy="0"/>
+          <a:chOff x="0" y="0"/>
+          <a:chExt cx="0" cy="0"/>
+        </a:xfrm>
+      </p:grpSpPr>
+      <p:sp>
+        <p:nvSpPr>
+          <p:cNvPr id="2" name="标题 1">
+            <a:extLst>
+              <a:ext uri="{FF2B5EF4-FFF2-40B4-BE49-F238E27FC236}">
+                <a16:creationId xmlns:a16="http://schemas.microsoft.com/office/drawing/2014/main" id="{A9F88BA9-FDEE-D484-1F14-115960074AEA}"/>
+              </a:ext>
+            </a:extLst>
+          </p:cNvPr>
+          <p:cNvSpPr>
+            <a:spLocks noGrp="1"/>
+          </p:cNvSpPr>
+          <p:nvPr>
+            <p:ph type="title"/>
+          </p:nvPr>
+        </p:nvSpPr>
+        <p:spPr>
+          <a:xfrm>
+            <a:off x="838200" y="0"/>
+            <a:ext cx="10515600" cy="1325563"/>
+          </a:xfrm>
+        </p:spPr>
+        <p:txBody>
+          <a:bodyPr/>
+          <a:lstStyle/>
+          <a:p>
+            <a:r>
+              <a:rPr lang="zh-CN" altLang="en-US" dirty="0"/>
+              <a:t>高级参数</a:t>
+            </a:r>
+            <a:endParaRPr lang="zh-SG" altLang="en-US" dirty="0"/>
+          </a:p>
+        </p:txBody>
+      </p:sp>
+      <p:sp>
+        <p:nvSpPr>
+          <p:cNvPr id="3" name="内容占位符 2">
+            <a:extLst>
+              <a:ext uri="{FF2B5EF4-FFF2-40B4-BE49-F238E27FC236}">
+                <a16:creationId xmlns:a16="http://schemas.microsoft.com/office/drawing/2014/main" id="{8F6315EC-8155-BD16-1BC1-7DC774A90124}"/>
+              </a:ext>
+            </a:extLst>
+          </p:cNvPr>
+          <p:cNvSpPr>
+            <a:spLocks noGrp="1"/>
+          </p:cNvSpPr>
+          <p:nvPr>
+            <p:ph idx="1"/>
+          </p:nvPr>
+        </p:nvSpPr>
+        <p:spPr>
+          <a:xfrm>
+            <a:off x="838200" y="1325562"/>
+            <a:ext cx="10515600" cy="5532437"/>
+          </a:xfrm>
+        </p:spPr>
+        <p:txBody>
+          <a:bodyPr>
+            <a:normAutofit/>
+          </a:bodyPr>
+          <a:lstStyle/>
+          <a:p>
+            <a:r>
+              <a:rPr lang="en-GB" altLang="zh-SG" dirty="0"/>
+              <a:t>Over Sampling</a:t>
+            </a:r>
+            <a:r>
+              <a:rPr lang="zh-CN" altLang="en-US" dirty="0"/>
+              <a:t>：</a:t>
+            </a:r>
+            <a:r>
+              <a:rPr lang="zh-SG" altLang="en-US" dirty="0"/>
+              <a:t>过采样倍数</a:t>
+            </a:r>
+            <a:endParaRPr lang="en-US" altLang="zh-SG" dirty="0"/>
+          </a:p>
+          <a:p>
+            <a:pPr lvl="1"/>
+            <a:r>
+              <a:rPr lang="en-US" altLang="zh-SG" dirty="0"/>
+              <a:t>16 </a:t>
+            </a:r>
+            <a:r>
+              <a:rPr lang="en-GB" altLang="zh-SG" dirty="0"/>
+              <a:t>Samples</a:t>
+            </a:r>
+            <a:r>
+              <a:rPr lang="zh-CN" altLang="en-US" dirty="0"/>
+              <a:t>更</a:t>
+            </a:r>
+            <a:r>
+              <a:rPr lang="zh-SG" altLang="en-US" dirty="0"/>
+              <a:t>抗干扰</a:t>
+            </a:r>
+            <a:endParaRPr lang="en-US" altLang="zh-SG" dirty="0"/>
+          </a:p>
+          <a:p>
+            <a:r>
+              <a:rPr lang="en-GB" altLang="zh-SG" dirty="0"/>
+              <a:t>Single Sample</a:t>
+            </a:r>
+            <a:r>
+              <a:rPr lang="zh-CN" altLang="en-US" dirty="0"/>
+              <a:t>：</a:t>
+            </a:r>
+            <a:r>
+              <a:rPr lang="zh-SG" altLang="en-US" dirty="0"/>
+              <a:t>单采样模式</a:t>
+            </a:r>
+            <a:endParaRPr lang="en-US" altLang="zh-SG" dirty="0"/>
+          </a:p>
+          <a:p>
+            <a:pPr lvl="1"/>
+            <a:r>
+              <a:rPr lang="zh-CN" altLang="en-US" dirty="0"/>
+              <a:t>仅用</a:t>
+            </a:r>
+            <a:r>
+              <a:rPr lang="zh-SG" altLang="en-US" dirty="0"/>
+              <a:t>采样判断电平，一般保持 </a:t>
+            </a:r>
+            <a:r>
+              <a:rPr lang="en-GB" altLang="zh-SG" dirty="0"/>
+              <a:t>Disable</a:t>
+            </a:r>
+            <a:r>
+              <a:rPr lang="zh-CN" altLang="en-US" dirty="0"/>
+              <a:t>以抗</a:t>
+            </a:r>
+            <a:r>
+              <a:rPr lang="zh-SG" altLang="en-US" dirty="0"/>
+              <a:t>噪</a:t>
+            </a:r>
+            <a:endParaRPr lang="en-US" altLang="zh-SG" dirty="0"/>
+          </a:p>
+          <a:p>
+            <a:r>
+              <a:rPr lang="en-GB" altLang="zh-SG" dirty="0"/>
+              <a:t>Clock </a:t>
+            </a:r>
+            <a:r>
+              <a:rPr lang="en-GB" altLang="zh-SG" dirty="0" err="1"/>
+              <a:t>Prescaler</a:t>
+            </a:r>
+            <a:r>
+              <a:rPr lang="zh-CN" altLang="en-US" dirty="0"/>
+              <a:t>：</a:t>
+            </a:r>
+            <a:r>
+              <a:rPr lang="zh-SG" altLang="en-US" dirty="0"/>
+              <a:t>外设时钟预分频</a:t>
+            </a:r>
+            <a:endParaRPr lang="en-US" altLang="zh-SG" dirty="0"/>
+          </a:p>
+          <a:p>
+            <a:r>
+              <a:rPr lang="en-GB" altLang="zh-SG" dirty="0" err="1"/>
+              <a:t>Fifo</a:t>
+            </a:r>
+            <a:r>
+              <a:rPr lang="en-GB" altLang="zh-SG" dirty="0"/>
+              <a:t> Mode</a:t>
+            </a:r>
+            <a:r>
+              <a:rPr lang="zh-CN" altLang="en-US" dirty="0"/>
+              <a:t>：</a:t>
+            </a:r>
+            <a:r>
+              <a:rPr lang="en-GB" altLang="zh-SG" dirty="0"/>
+              <a:t>FIFO</a:t>
+            </a:r>
+            <a:r>
+              <a:rPr lang="zh-SG" altLang="en-US" dirty="0"/>
+              <a:t>缓冲模式</a:t>
+            </a:r>
+            <a:endParaRPr lang="en-US" altLang="zh-SG" dirty="0"/>
+          </a:p>
+          <a:p>
+            <a:pPr lvl="1"/>
+            <a:r>
+              <a:rPr lang="zh-SG" altLang="en-US" dirty="0"/>
+              <a:t>关闭时按传统单字节寄存器方式工作；开启后 </a:t>
+            </a:r>
+            <a:r>
+              <a:rPr lang="en-GB" altLang="zh-SG" dirty="0"/>
+              <a:t>TX/RX </a:t>
+            </a:r>
+            <a:r>
+              <a:rPr lang="zh-SG" altLang="en-US" dirty="0"/>
+              <a:t>有更深缓冲</a:t>
+            </a:r>
+            <a:endParaRPr lang="en-US" altLang="zh-SG" dirty="0"/>
+          </a:p>
+          <a:p>
+            <a:r>
+              <a:rPr lang="en-GB" altLang="zh-SG" dirty="0" err="1"/>
+              <a:t>Txfifo</a:t>
+            </a:r>
+            <a:r>
+              <a:rPr lang="en-GB" altLang="zh-SG" dirty="0"/>
+              <a:t> Threshold</a:t>
+            </a:r>
+            <a:r>
+              <a:rPr lang="zh-CN" altLang="en-US" dirty="0"/>
+              <a:t>：</a:t>
+            </a:r>
+            <a:r>
+              <a:rPr lang="zh-SG" altLang="en-US" dirty="0"/>
+              <a:t>发送 </a:t>
+            </a:r>
+            <a:r>
+              <a:rPr lang="en-GB" altLang="zh-SG" dirty="0"/>
+              <a:t>FIFO </a:t>
+            </a:r>
+            <a:r>
+              <a:rPr lang="zh-SG" altLang="en-US" dirty="0"/>
+              <a:t>触发阈值</a:t>
+            </a:r>
+            <a:endParaRPr lang="en-US" altLang="zh-SG" dirty="0"/>
+          </a:p>
+          <a:p>
+            <a:pPr lvl="1"/>
+            <a:r>
+              <a:rPr lang="zh-SG" altLang="en-US" dirty="0"/>
+              <a:t>达到多少空位触发中断</a:t>
+            </a:r>
+            <a:r>
+              <a:rPr lang="en-US" altLang="zh-SG" dirty="0"/>
+              <a:t>/</a:t>
+            </a:r>
+            <a:r>
+              <a:rPr lang="en-GB" altLang="zh-SG" dirty="0"/>
+              <a:t>DMA</a:t>
+            </a:r>
+            <a:endParaRPr lang="en-US" altLang="zh-SG" dirty="0"/>
+          </a:p>
+          <a:p>
+            <a:r>
+              <a:rPr lang="en-GB" altLang="zh-SG" dirty="0" err="1"/>
+              <a:t>Rxfifo</a:t>
+            </a:r>
+            <a:r>
+              <a:rPr lang="en-GB" altLang="zh-SG" dirty="0"/>
+              <a:t> Threshold</a:t>
+            </a:r>
+            <a:r>
+              <a:rPr lang="zh-CN" altLang="en-US" dirty="0"/>
+              <a:t>：</a:t>
+            </a:r>
+            <a:r>
+              <a:rPr lang="zh-SG" altLang="en-US" dirty="0"/>
+              <a:t>接收 </a:t>
+            </a:r>
+            <a:r>
+              <a:rPr lang="en-GB" altLang="zh-SG" dirty="0"/>
+              <a:t>FIFO </a:t>
+            </a:r>
+            <a:r>
+              <a:rPr lang="zh-SG" altLang="en-US" dirty="0"/>
+              <a:t>触发阈值</a:t>
+            </a:r>
+            <a:endParaRPr lang="en-US" altLang="zh-SG" dirty="0"/>
+          </a:p>
+          <a:p>
+            <a:pPr lvl="1"/>
+            <a:r>
+              <a:rPr lang="zh-SG" altLang="en-US" dirty="0"/>
+              <a:t>收到多少数据后触发中断</a:t>
+            </a:r>
+            <a:r>
+              <a:rPr lang="en-US" altLang="zh-SG" dirty="0"/>
+              <a:t>/</a:t>
+            </a:r>
+            <a:r>
+              <a:rPr lang="en-GB" altLang="zh-SG" dirty="0"/>
+              <a:t>DMA</a:t>
+            </a:r>
+            <a:endParaRPr lang="en-US" altLang="zh-SG" dirty="0"/>
+          </a:p>
+        </p:txBody>
+      </p:sp>
+    </p:spTree>
+    <p:extLst>
+      <p:ext uri="{BB962C8B-B14F-4D97-AF65-F5344CB8AC3E}">
+        <p14:creationId xmlns:p14="http://schemas.microsoft.com/office/powerpoint/2010/main" val="3141025039"/>
+      </p:ext>
+    </p:extLst>
+  </p:cSld>
+  <p:clrMapOvr>
+    <a:masterClrMapping/>
+  </p:clrMapOvr>
+</p:sld>
+</file>
+
+<file path=ppt/slides/slide27.xml><?xml version="1.0" encoding="utf-8"?>
+<p:sld xmlns:a="http://schemas.openxmlformats.org/drawingml/2006/main" xmlns:r="http://schemas.openxmlformats.org/officeDocument/2006/relationships" xmlns:p="http://schemas.openxmlformats.org/presentationml/2006/main">
+  <p:cSld>
+    <p:spTree>
+      <p:nvGrpSpPr>
+        <p:cNvPr id="1" name=""/>
+        <p:cNvGrpSpPr/>
+        <p:nvPr/>
+      </p:nvGrpSpPr>
+      <p:grpSpPr>
+        <a:xfrm>
+          <a:off x="0" y="0"/>
+          <a:ext cx="0" cy="0"/>
+          <a:chOff x="0" y="0"/>
+          <a:chExt cx="0" cy="0"/>
+        </a:xfrm>
+      </p:grpSpPr>
+      <p:sp>
+        <p:nvSpPr>
+          <p:cNvPr id="2" name="标题 1">
+            <a:extLst>
+              <a:ext uri="{FF2B5EF4-FFF2-40B4-BE49-F238E27FC236}">
+                <a16:creationId xmlns:a16="http://schemas.microsoft.com/office/drawing/2014/main" id="{A74C72AA-F7E5-42C4-408C-C9D2F347426A}"/>
+              </a:ext>
+            </a:extLst>
+          </p:cNvPr>
+          <p:cNvSpPr>
+            <a:spLocks noGrp="1"/>
+          </p:cNvSpPr>
+          <p:nvPr>
+            <p:ph type="title"/>
+          </p:nvPr>
+        </p:nvSpPr>
+        <p:spPr>
+          <a:xfrm>
+            <a:off x="838200" y="-10633"/>
+            <a:ext cx="10515600" cy="1325563"/>
+          </a:xfrm>
+        </p:spPr>
+        <p:txBody>
+          <a:bodyPr/>
+          <a:lstStyle/>
+          <a:p>
+            <a:r>
+              <a:rPr lang="zh-CN" altLang="en-US" dirty="0"/>
+              <a:t>高级功能</a:t>
+            </a:r>
+            <a:endParaRPr lang="zh-SG" altLang="en-US" dirty="0"/>
+          </a:p>
+        </p:txBody>
+      </p:sp>
+      <p:sp>
+        <p:nvSpPr>
+          <p:cNvPr id="3" name="内容占位符 2">
+            <a:extLst>
+              <a:ext uri="{FF2B5EF4-FFF2-40B4-BE49-F238E27FC236}">
+                <a16:creationId xmlns:a16="http://schemas.microsoft.com/office/drawing/2014/main" id="{55968EA3-00A8-2290-EE2F-8413B95BE395}"/>
+              </a:ext>
+            </a:extLst>
+          </p:cNvPr>
+          <p:cNvSpPr>
+            <a:spLocks noGrp="1"/>
+          </p:cNvSpPr>
+          <p:nvPr>
+            <p:ph idx="1"/>
+          </p:nvPr>
+        </p:nvSpPr>
+        <p:spPr>
+          <a:xfrm>
+            <a:off x="838200" y="1314930"/>
+            <a:ext cx="10515600" cy="5543070"/>
+          </a:xfrm>
+        </p:spPr>
+        <p:txBody>
+          <a:bodyPr>
+            <a:normAutofit/>
+          </a:bodyPr>
+          <a:lstStyle/>
+          <a:p>
+            <a:r>
+              <a:rPr lang="en-GB" altLang="zh-SG" dirty="0"/>
+              <a:t>Auto </a:t>
+            </a:r>
+            <a:r>
+              <a:rPr lang="en-GB" altLang="zh-SG" dirty="0" err="1"/>
+              <a:t>Baudrate</a:t>
+            </a:r>
+            <a:r>
+              <a:rPr lang="zh-CN" altLang="en-US" dirty="0"/>
+              <a:t>：</a:t>
+            </a:r>
+            <a:r>
+              <a:rPr lang="zh-SG" altLang="en-US" dirty="0"/>
+              <a:t>自动波特率检测</a:t>
+            </a:r>
+            <a:endParaRPr lang="en-US" altLang="zh-SG" dirty="0"/>
+          </a:p>
+          <a:p>
+            <a:r>
+              <a:rPr lang="en-GB" altLang="zh-SG" dirty="0"/>
+              <a:t>TX Pin Active Level Inversion</a:t>
+            </a:r>
+            <a:r>
+              <a:rPr lang="zh-CN" altLang="en-US" dirty="0"/>
+              <a:t>：</a:t>
+            </a:r>
+            <a:r>
+              <a:rPr lang="zh-SG" altLang="en-US" dirty="0"/>
+              <a:t>反转</a:t>
+            </a:r>
+            <a:r>
+              <a:rPr lang="en-GB" altLang="zh-SG" dirty="0"/>
+              <a:t>TX</a:t>
+            </a:r>
+            <a:r>
+              <a:rPr lang="zh-SG" altLang="en-US" dirty="0"/>
+              <a:t>引脚电平逻辑</a:t>
+            </a:r>
+            <a:endParaRPr lang="en-US" altLang="zh-SG" dirty="0"/>
+          </a:p>
+          <a:p>
+            <a:r>
+              <a:rPr lang="en-GB" altLang="zh-SG" dirty="0"/>
+              <a:t>RX Pin Active Level Inversion</a:t>
+            </a:r>
+            <a:r>
+              <a:rPr lang="zh-CN" altLang="en-US" dirty="0"/>
+              <a:t>：</a:t>
+            </a:r>
+            <a:r>
+              <a:rPr lang="zh-SG" altLang="en-US" dirty="0"/>
+              <a:t>反转 </a:t>
+            </a:r>
+            <a:r>
+              <a:rPr lang="en-GB" altLang="zh-SG" dirty="0"/>
+              <a:t>RX </a:t>
+            </a:r>
+            <a:r>
+              <a:rPr lang="zh-SG" altLang="en-US" dirty="0"/>
+              <a:t>引脚电平逻辑</a:t>
+            </a:r>
+            <a:endParaRPr lang="en-US" altLang="zh-SG" dirty="0"/>
+          </a:p>
+          <a:p>
+            <a:r>
+              <a:rPr lang="en-GB" altLang="zh-SG" dirty="0"/>
+              <a:t>Data Inversion</a:t>
+            </a:r>
+            <a:r>
+              <a:rPr lang="zh-CN" altLang="en-US" dirty="0"/>
+              <a:t>：</a:t>
+            </a:r>
+            <a:r>
+              <a:rPr lang="zh-SG" altLang="en-US" dirty="0"/>
+              <a:t>反转数据</a:t>
+            </a:r>
+            <a:r>
+              <a:rPr lang="en-GB" altLang="zh-SG" dirty="0"/>
+              <a:t>bit</a:t>
+            </a:r>
+            <a:endParaRPr lang="en-US" altLang="zh-SG" dirty="0"/>
+          </a:p>
+          <a:p>
+            <a:r>
+              <a:rPr lang="en-GB" altLang="zh-SG" dirty="0"/>
+              <a:t>TX and RX Pins Swapping</a:t>
+            </a:r>
+            <a:r>
+              <a:rPr lang="zh-CN" altLang="en-US" dirty="0"/>
+              <a:t>：</a:t>
+            </a:r>
+            <a:r>
+              <a:rPr lang="zh-SG" altLang="en-US" dirty="0"/>
+              <a:t>交换 </a:t>
+            </a:r>
+            <a:r>
+              <a:rPr lang="en-GB" altLang="zh-SG" dirty="0"/>
+              <a:t>TX/RX </a:t>
+            </a:r>
+            <a:r>
+              <a:rPr lang="zh-SG" altLang="en-US" dirty="0"/>
+              <a:t>引脚功能</a:t>
+            </a:r>
+            <a:endParaRPr lang="en-US" altLang="zh-SG" dirty="0"/>
+          </a:p>
+          <a:p>
+            <a:r>
+              <a:rPr lang="en-GB" altLang="zh-SG" dirty="0"/>
+              <a:t>Overrun</a:t>
+            </a:r>
+            <a:r>
+              <a:rPr lang="zh-CN" altLang="en-US" dirty="0"/>
+              <a:t>：</a:t>
+            </a:r>
+            <a:r>
+              <a:rPr lang="zh-SG" altLang="en-US" dirty="0"/>
+              <a:t>接收溢出检测</a:t>
+            </a:r>
+            <a:endParaRPr lang="en-US" altLang="zh-SG" dirty="0"/>
+          </a:p>
+          <a:p>
+            <a:pPr lvl="1"/>
+            <a:r>
+              <a:rPr lang="zh-SG" altLang="en-US" dirty="0"/>
+              <a:t>如果数据没及时读走会产生溢出错误</a:t>
+            </a:r>
+            <a:endParaRPr lang="en-US" altLang="zh-SG" dirty="0"/>
+          </a:p>
+          <a:p>
+            <a:r>
+              <a:rPr lang="en-GB" altLang="zh-SG" dirty="0"/>
+              <a:t>DMA on RX Error</a:t>
+            </a:r>
+            <a:r>
+              <a:rPr lang="zh-CN" altLang="en-US" dirty="0"/>
+              <a:t>：</a:t>
+            </a:r>
+            <a:r>
+              <a:rPr lang="zh-SG" altLang="en-US" dirty="0"/>
+              <a:t>接收错误时 </a:t>
+            </a:r>
+            <a:r>
+              <a:rPr lang="en-GB" altLang="zh-SG" dirty="0"/>
+              <a:t>DMA </a:t>
+            </a:r>
+            <a:r>
+              <a:rPr lang="zh-SG" altLang="en-US" dirty="0"/>
+              <a:t>行为控制</a:t>
+            </a:r>
+            <a:endParaRPr lang="en-US" altLang="zh-SG" dirty="0"/>
+          </a:p>
+          <a:p>
+            <a:pPr lvl="1"/>
+            <a:r>
+              <a:rPr lang="zh-SG" altLang="en-US" dirty="0"/>
+              <a:t>开启后 </a:t>
+            </a:r>
+            <a:r>
+              <a:rPr lang="en-GB" altLang="zh-SG" dirty="0"/>
+              <a:t>RX </a:t>
+            </a:r>
+            <a:r>
+              <a:rPr lang="zh-SG" altLang="en-US" dirty="0"/>
+              <a:t>错误相关处理会影响 </a:t>
+            </a:r>
+            <a:r>
+              <a:rPr lang="en-GB" altLang="zh-SG" dirty="0"/>
+              <a:t>DMA </a:t>
+            </a:r>
+            <a:r>
+              <a:rPr lang="zh-SG" altLang="en-US" dirty="0"/>
+              <a:t>接收流程</a:t>
+            </a:r>
+            <a:endParaRPr lang="en-US" altLang="zh-SG" dirty="0"/>
+          </a:p>
+          <a:p>
+            <a:r>
+              <a:rPr lang="en-GB" altLang="zh-SG" dirty="0"/>
+              <a:t>MSB First</a:t>
+            </a:r>
+            <a:r>
+              <a:rPr lang="zh-CN" altLang="en-US" dirty="0"/>
+              <a:t>：</a:t>
+            </a:r>
+            <a:r>
+              <a:rPr lang="zh-SG" altLang="en-US" dirty="0"/>
+              <a:t>是否最高位先发送</a:t>
+            </a:r>
+            <a:endParaRPr lang="en-US" altLang="zh-SG" dirty="0"/>
+          </a:p>
+          <a:p>
+            <a:pPr lvl="1"/>
+            <a:r>
+              <a:rPr lang="zh-SG" altLang="en-US" dirty="0"/>
+              <a:t>普通 </a:t>
+            </a:r>
+            <a:r>
+              <a:rPr lang="en-GB" altLang="zh-SG" dirty="0"/>
+              <a:t>UART </a:t>
+            </a:r>
+            <a:r>
+              <a:rPr lang="zh-SG" altLang="en-US" dirty="0"/>
+              <a:t>默认低位先发</a:t>
+            </a:r>
+          </a:p>
+          <a:p>
+            <a:endParaRPr lang="zh-SG" altLang="en-US" dirty="0"/>
+          </a:p>
+        </p:txBody>
+      </p:sp>
+    </p:spTree>
+    <p:extLst>
+      <p:ext uri="{BB962C8B-B14F-4D97-AF65-F5344CB8AC3E}">
+        <p14:creationId xmlns:p14="http://schemas.microsoft.com/office/powerpoint/2010/main" val="3746013807"/>
+      </p:ext>
+    </p:extLst>
+  </p:cSld>
+  <p:clrMapOvr>
+    <a:masterClrMapping/>
+  </p:clrMapOvr>
+</p:sld>
+</file>
+
+<file path=ppt/slides/slide28.xml><?xml version="1.0" encoding="utf-8"?>
+<p:sld xmlns:a="http://schemas.openxmlformats.org/drawingml/2006/main" xmlns:r="http://schemas.openxmlformats.org/officeDocument/2006/relationships" xmlns:p="http://schemas.openxmlformats.org/presentationml/2006/main">
+  <p:cSld>
+    <p:spTree>
+      <p:nvGrpSpPr>
+        <p:cNvPr id="1" name=""/>
+        <p:cNvGrpSpPr/>
+        <p:nvPr/>
+      </p:nvGrpSpPr>
+      <p:grpSpPr>
+        <a:xfrm>
+          <a:off x="0" y="0"/>
+          <a:ext cx="0" cy="0"/>
+          <a:chOff x="0" y="0"/>
+          <a:chExt cx="0" cy="0"/>
+        </a:xfrm>
+      </p:grpSpPr>
+      <p:sp>
+        <p:nvSpPr>
+          <p:cNvPr id="2" name="标题 1">
+            <a:extLst>
+              <a:ext uri="{FF2B5EF4-FFF2-40B4-BE49-F238E27FC236}">
+                <a16:creationId xmlns:a16="http://schemas.microsoft.com/office/drawing/2014/main" id="{5C2190A2-F953-B5EF-6295-05D43D109F1A}"/>
+              </a:ext>
+            </a:extLst>
+          </p:cNvPr>
+          <p:cNvSpPr>
+            <a:spLocks noGrp="1"/>
+          </p:cNvSpPr>
+          <p:nvPr>
+            <p:ph type="title"/>
+          </p:nvPr>
+        </p:nvSpPr>
+        <p:spPr/>
+        <p:txBody>
+          <a:bodyPr/>
+          <a:lstStyle/>
+          <a:p>
+            <a:r>
+              <a:rPr lang="en-US" altLang="zh-CN" dirty="0"/>
+              <a:t>DMA</a:t>
+            </a:r>
+            <a:r>
+              <a:rPr lang="zh-CN" altLang="en-US" dirty="0"/>
+              <a:t>接收缓冲区设计</a:t>
+            </a:r>
+            <a:endParaRPr lang="zh-SG" altLang="en-US" dirty="0"/>
+          </a:p>
+        </p:txBody>
+      </p:sp>
+      <p:sp>
+        <p:nvSpPr>
+          <p:cNvPr id="3" name="内容占位符 2">
+            <a:extLst>
+              <a:ext uri="{FF2B5EF4-FFF2-40B4-BE49-F238E27FC236}">
+                <a16:creationId xmlns:a16="http://schemas.microsoft.com/office/drawing/2014/main" id="{B2DD1AF3-F444-4518-9BA8-0E813D028D14}"/>
+              </a:ext>
+            </a:extLst>
+          </p:cNvPr>
+          <p:cNvSpPr>
+            <a:spLocks noGrp="1"/>
+          </p:cNvSpPr>
+          <p:nvPr>
+            <p:ph idx="1"/>
+          </p:nvPr>
+        </p:nvSpPr>
+        <p:spPr/>
+        <p:txBody>
+          <a:bodyPr/>
+          <a:lstStyle/>
+          <a:p>
+            <a:r>
+              <a:rPr lang="zh-CN" altLang="en-US" dirty="0"/>
+              <a:t>循环</a:t>
+            </a:r>
+            <a:r>
+              <a:rPr lang="en-US" altLang="zh-CN" dirty="0"/>
+              <a:t>DMA+</a:t>
+            </a:r>
+            <a:r>
+              <a:rPr lang="zh-CN" altLang="en-US" dirty="0"/>
+              <a:t>固定缓冲区</a:t>
+            </a:r>
+            <a:endParaRPr lang="en-US" altLang="zh-CN" dirty="0"/>
+          </a:p>
+          <a:p>
+            <a:r>
+              <a:rPr lang="zh-CN" altLang="en-US" dirty="0"/>
+              <a:t>单次使能</a:t>
+            </a:r>
+            <a:r>
+              <a:rPr lang="en-US" altLang="zh-CN" dirty="0"/>
+              <a:t>+</a:t>
+            </a:r>
+            <a:r>
+              <a:rPr lang="zh-CN" altLang="en-US" dirty="0"/>
+              <a:t>双缓冲区</a:t>
+            </a:r>
+            <a:endParaRPr lang="en-US" altLang="zh-CN" dirty="0"/>
+          </a:p>
+          <a:p>
+            <a:r>
+              <a:rPr lang="zh-CN" altLang="en-US" dirty="0"/>
+              <a:t>单次使能</a:t>
+            </a:r>
+            <a:r>
+              <a:rPr lang="en-US" altLang="zh-CN" dirty="0"/>
+              <a:t>+</a:t>
+            </a:r>
+            <a:r>
+              <a:rPr lang="zh-CN" altLang="en-US" dirty="0"/>
+              <a:t>环形缓冲区</a:t>
+            </a:r>
+            <a:endParaRPr lang="en-US" altLang="zh-CN" dirty="0"/>
+          </a:p>
+          <a:p>
+            <a:r>
+              <a:rPr lang="zh-CN" altLang="en-US" dirty="0"/>
+              <a:t>单次使能</a:t>
+            </a:r>
+            <a:r>
+              <a:rPr lang="en-US" altLang="zh-CN" dirty="0"/>
+              <a:t>+</a:t>
+            </a:r>
+            <a:r>
+              <a:rPr lang="en-US" altLang="zh-CN" dirty="0" err="1"/>
+              <a:t>Bip</a:t>
+            </a:r>
+            <a:r>
+              <a:rPr lang="en-US" altLang="zh-CN" dirty="0"/>
+              <a:t> Buffer</a:t>
+            </a:r>
+            <a:endParaRPr lang="zh-SG" altLang="en-US" dirty="0"/>
+          </a:p>
+        </p:txBody>
+      </p:sp>
+      <p:pic>
+        <p:nvPicPr>
+          <p:cNvPr id="5" name="图片 4">
+            <a:extLst>
+              <a:ext uri="{FF2B5EF4-FFF2-40B4-BE49-F238E27FC236}">
+                <a16:creationId xmlns:a16="http://schemas.microsoft.com/office/drawing/2014/main" id="{FFA874E4-0BD4-843E-3231-FE63AAB97B28}"/>
+              </a:ext>
+            </a:extLst>
+          </p:cNvPr>
+          <p:cNvPicPr>
+            <a:picLocks noChangeAspect="1"/>
+          </p:cNvPicPr>
+          <p:nvPr/>
+        </p:nvPicPr>
+        <p:blipFill>
+          <a:blip r:embed="rId2">
+            <a:extLst>
+              <a:ext uri="{28A0092B-C50C-407E-A947-70E740481C1C}">
+                <a14:useLocalDpi xmlns:a14="http://schemas.microsoft.com/office/drawing/2010/main" val="0"/>
+              </a:ext>
+            </a:extLst>
+          </a:blip>
+          <a:stretch>
+            <a:fillRect/>
+          </a:stretch>
+        </p:blipFill>
+        <p:spPr>
+          <a:xfrm>
+            <a:off x="6096000" y="3429000"/>
+            <a:ext cx="4157919" cy="3429000"/>
+          </a:xfrm>
+          <a:prstGeom prst="rect">
+            <a:avLst/>
+          </a:prstGeom>
+        </p:spPr>
+      </p:pic>
+      <p:pic>
+        <p:nvPicPr>
+          <p:cNvPr id="7" name="图片 6">
+            <a:extLst>
+              <a:ext uri="{FF2B5EF4-FFF2-40B4-BE49-F238E27FC236}">
+                <a16:creationId xmlns:a16="http://schemas.microsoft.com/office/drawing/2014/main" id="{4241571D-5F2C-A434-0FD3-000AB56C433B}"/>
+              </a:ext>
+            </a:extLst>
+          </p:cNvPr>
+          <p:cNvPicPr>
+            <a:picLocks noChangeAspect="1"/>
+          </p:cNvPicPr>
+          <p:nvPr/>
+        </p:nvPicPr>
+        <p:blipFill>
+          <a:blip r:embed="rId3">
+            <a:extLst>
+              <a:ext uri="{28A0092B-C50C-407E-A947-70E740481C1C}">
+                <a14:useLocalDpi xmlns:a14="http://schemas.microsoft.com/office/drawing/2010/main" val="0"/>
+              </a:ext>
+            </a:extLst>
+          </a:blip>
+          <a:stretch>
+            <a:fillRect/>
+          </a:stretch>
+        </p:blipFill>
+        <p:spPr>
+          <a:xfrm>
+            <a:off x="6460459" y="0"/>
+            <a:ext cx="3429000" cy="3429000"/>
+          </a:xfrm>
+          <a:prstGeom prst="rect">
+            <a:avLst/>
+          </a:prstGeom>
+        </p:spPr>
+      </p:pic>
+    </p:spTree>
+    <p:extLst>
+      <p:ext uri="{BB962C8B-B14F-4D97-AF65-F5344CB8AC3E}">
+        <p14:creationId xmlns:p14="http://schemas.microsoft.com/office/powerpoint/2010/main" val="1591607302"/>
+      </p:ext>
+    </p:extLst>
+  </p:cSld>
+  <p:clrMapOvr>
+    <a:masterClrMapping/>
+  </p:clrMapOvr>
+</p:sld>
+</file>
+
+<file path=ppt/slides/slide29.xml><?xml version="1.0" encoding="utf-8"?>
+<p:sld xmlns:a="http://schemas.openxmlformats.org/drawingml/2006/main" xmlns:r="http://schemas.openxmlformats.org/officeDocument/2006/relationships" xmlns:p="http://schemas.openxmlformats.org/presentationml/2006/main">
+  <p:cSld>
+    <p:spTree>
+      <p:nvGrpSpPr>
+        <p:cNvPr id="1" name=""/>
+        <p:cNvGrpSpPr/>
+        <p:nvPr/>
+      </p:nvGrpSpPr>
+      <p:grpSpPr>
+        <a:xfrm>
+          <a:off x="0" y="0"/>
+          <a:ext cx="0" cy="0"/>
+          <a:chOff x="0" y="0"/>
+          <a:chExt cx="0" cy="0"/>
+        </a:xfrm>
+      </p:grpSpPr>
+      <p:sp>
+        <p:nvSpPr>
+          <p:cNvPr id="2" name="标题 1">
+            <a:extLst>
+              <a:ext uri="{FF2B5EF4-FFF2-40B4-BE49-F238E27FC236}">
+                <a16:creationId xmlns:a16="http://schemas.microsoft.com/office/drawing/2014/main" id="{0EF2BFE9-34B2-5268-8E65-2F8D03029C22}"/>
+              </a:ext>
+            </a:extLst>
+          </p:cNvPr>
+          <p:cNvSpPr>
+            <a:spLocks noGrp="1"/>
+          </p:cNvSpPr>
+          <p:nvPr>
+            <p:ph type="title"/>
+          </p:nvPr>
+        </p:nvSpPr>
+        <p:spPr/>
+        <p:txBody>
+          <a:bodyPr/>
+          <a:lstStyle/>
+          <a:p>
+            <a:r>
+              <a:rPr lang="zh-CN" altLang="en-US" dirty="0"/>
+              <a:t>关闭</a:t>
+            </a:r>
+            <a:r>
+              <a:rPr lang="en-US" altLang="zh-CN" dirty="0"/>
+              <a:t>DMA</a:t>
+            </a:r>
+            <a:r>
+              <a:rPr lang="zh-CN" altLang="en-US" dirty="0"/>
+              <a:t>半满中断</a:t>
+            </a:r>
+            <a:endParaRPr lang="zh-SG" altLang="en-US" dirty="0"/>
+          </a:p>
+        </p:txBody>
+      </p:sp>
+      <p:sp>
+        <p:nvSpPr>
+          <p:cNvPr id="3" name="内容占位符 2">
+            <a:extLst>
+              <a:ext uri="{FF2B5EF4-FFF2-40B4-BE49-F238E27FC236}">
+                <a16:creationId xmlns:a16="http://schemas.microsoft.com/office/drawing/2014/main" id="{CD761F7F-F8B1-D305-6F69-CF9ED68CEA36}"/>
+              </a:ext>
+            </a:extLst>
+          </p:cNvPr>
+          <p:cNvSpPr>
+            <a:spLocks noGrp="1"/>
+          </p:cNvSpPr>
+          <p:nvPr>
+            <p:ph idx="1"/>
+          </p:nvPr>
+        </p:nvSpPr>
+        <p:spPr/>
+        <p:txBody>
+          <a:bodyPr/>
+          <a:lstStyle/>
+          <a:p>
+            <a:r>
+              <a:rPr lang="en-US" altLang="zh-CN" dirty="0"/>
+              <a:t>H7</a:t>
+            </a:r>
+            <a:r>
+              <a:rPr lang="zh-CN" altLang="en-US" dirty="0"/>
+              <a:t>开启</a:t>
+            </a:r>
+            <a:r>
+              <a:rPr lang="en-US" altLang="zh-CN" dirty="0"/>
+              <a:t>DMA</a:t>
+            </a:r>
+            <a:r>
+              <a:rPr lang="zh-CN" altLang="en-US" dirty="0"/>
+              <a:t>空闲接收时会自动打开接收半满中断，接收到指定长度的一半时就会返回</a:t>
+            </a:r>
+            <a:endParaRPr lang="en-US" altLang="zh-CN" dirty="0"/>
+          </a:p>
+          <a:p>
+            <a:r>
+              <a:rPr lang="zh-CN" altLang="en-US" dirty="0"/>
+              <a:t>可以在启动接收时手动关闭半满中断</a:t>
+            </a:r>
+            <a:endParaRPr lang="zh-SG" altLang="en-US" dirty="0"/>
+          </a:p>
+        </p:txBody>
+      </p:sp>
+    </p:spTree>
+    <p:extLst>
+      <p:ext uri="{BB962C8B-B14F-4D97-AF65-F5344CB8AC3E}">
+        <p14:creationId xmlns:p14="http://schemas.microsoft.com/office/powerpoint/2010/main" val="3002574230"/>
+      </p:ext>
+    </p:extLst>
+  </p:cSld>
+  <p:clrMapOvr>
+    <a:masterClrMapping/>
+  </p:clrMapOvr>
+</p:sld>
+</file>
+
 <file path=ppt/slides/slide3.xml><?xml version="1.0" encoding="utf-8"?>
 <p:sld xmlns:a="http://schemas.openxmlformats.org/drawingml/2006/main" xmlns:r="http://schemas.openxmlformats.org/officeDocument/2006/relationships" xmlns:p="http://schemas.openxmlformats.org/presentationml/2006/main">
   <p:cSld>
@@ -6061,6 +7464,1955 @@
     <p:extLst>
       <p:ext uri="{BB962C8B-B14F-4D97-AF65-F5344CB8AC3E}">
         <p14:creationId xmlns:p14="http://schemas.microsoft.com/office/powerpoint/2010/main" val="1129924035"/>
+      </p:ext>
+    </p:extLst>
+  </p:cSld>
+  <p:clrMapOvr>
+    <a:masterClrMapping/>
+  </p:clrMapOvr>
+</p:sld>
+</file>
+
+<file path=ppt/slides/slide30.xml><?xml version="1.0" encoding="utf-8"?>
+<p:sld xmlns:a="http://schemas.openxmlformats.org/drawingml/2006/main" xmlns:r="http://schemas.openxmlformats.org/officeDocument/2006/relationships" xmlns:p="http://schemas.openxmlformats.org/presentationml/2006/main">
+  <p:cSld>
+    <p:spTree>
+      <p:nvGrpSpPr>
+        <p:cNvPr id="1" name=""/>
+        <p:cNvGrpSpPr/>
+        <p:nvPr/>
+      </p:nvGrpSpPr>
+      <p:grpSpPr>
+        <a:xfrm>
+          <a:off x="0" y="0"/>
+          <a:ext cx="0" cy="0"/>
+          <a:chOff x="0" y="0"/>
+          <a:chExt cx="0" cy="0"/>
+        </a:xfrm>
+      </p:grpSpPr>
+      <p:sp>
+        <p:nvSpPr>
+          <p:cNvPr id="2" name="标题 1">
+            <a:extLst>
+              <a:ext uri="{FF2B5EF4-FFF2-40B4-BE49-F238E27FC236}">
+                <a16:creationId xmlns:a16="http://schemas.microsoft.com/office/drawing/2014/main" id="{81C897C0-FA3A-821B-9940-0DE88BEF6322}"/>
+              </a:ext>
+            </a:extLst>
+          </p:cNvPr>
+          <p:cNvSpPr>
+            <a:spLocks noGrp="1"/>
+          </p:cNvSpPr>
+          <p:nvPr>
+            <p:ph type="title"/>
+          </p:nvPr>
+        </p:nvSpPr>
+        <p:spPr/>
+        <p:txBody>
+          <a:bodyPr/>
+          <a:lstStyle/>
+          <a:p>
+            <a:r>
+              <a:rPr lang="zh-CN" altLang="en-US" dirty="0"/>
+              <a:t>处理</a:t>
+            </a:r>
+            <a:r>
+              <a:rPr lang="en-US" altLang="zh-CN" dirty="0"/>
+              <a:t>ORE</a:t>
+            </a:r>
+            <a:r>
+              <a:rPr lang="zh-CN" altLang="en-US" dirty="0"/>
+              <a:t>（</a:t>
+            </a:r>
+            <a:r>
+              <a:rPr lang="en-US" altLang="zh-CN" dirty="0"/>
+              <a:t>Overrun Error</a:t>
+            </a:r>
+            <a:r>
+              <a:rPr lang="zh-CN" altLang="en-US" dirty="0"/>
+              <a:t>溢出错误）</a:t>
+            </a:r>
+            <a:endParaRPr lang="zh-SG" altLang="en-US" dirty="0"/>
+          </a:p>
+        </p:txBody>
+      </p:sp>
+      <p:sp>
+        <p:nvSpPr>
+          <p:cNvPr id="3" name="内容占位符 2">
+            <a:extLst>
+              <a:ext uri="{FF2B5EF4-FFF2-40B4-BE49-F238E27FC236}">
+                <a16:creationId xmlns:a16="http://schemas.microsoft.com/office/drawing/2014/main" id="{520F87DA-6FA8-3966-5893-8B0688B3AEBE}"/>
+              </a:ext>
+            </a:extLst>
+          </p:cNvPr>
+          <p:cNvSpPr>
+            <a:spLocks noGrp="1"/>
+          </p:cNvSpPr>
+          <p:nvPr>
+            <p:ph idx="1"/>
+          </p:nvPr>
+        </p:nvSpPr>
+        <p:spPr/>
+        <p:txBody>
+          <a:bodyPr/>
+          <a:lstStyle/>
+          <a:p>
+            <a:r>
+              <a:rPr lang="zh-CN" altLang="en-US" dirty="0"/>
+              <a:t>队长：上电之前先开遥控器，拨到急停档！</a:t>
+            </a:r>
+            <a:endParaRPr lang="en-US" altLang="zh-CN" dirty="0"/>
+          </a:p>
+          <a:p>
+            <a:r>
+              <a:rPr lang="en-US" altLang="zh-CN" dirty="0"/>
+              <a:t>MCU</a:t>
+            </a:r>
+            <a:r>
+              <a:rPr lang="zh-CN" altLang="en-US" dirty="0"/>
+              <a:t>：我才刚上电，怎么就来了这么多数据？</a:t>
+            </a:r>
+            <a:endParaRPr lang="en-US" altLang="zh-CN" dirty="0"/>
+          </a:p>
+          <a:p>
+            <a:r>
+              <a:rPr lang="zh-CN" altLang="en-US" dirty="0"/>
+              <a:t>当数据来不及被读取时又来了新数据，就会产生</a:t>
+            </a:r>
+            <a:r>
+              <a:rPr lang="en-US" altLang="zh-CN" dirty="0"/>
+              <a:t>ORE</a:t>
+            </a:r>
+          </a:p>
+          <a:p>
+            <a:r>
+              <a:rPr lang="zh-CN" altLang="en-US" dirty="0"/>
+              <a:t>此时会调用</a:t>
+            </a:r>
+            <a:endParaRPr lang="zh-SG" altLang="en-US" dirty="0"/>
+          </a:p>
+        </p:txBody>
+      </p:sp>
+      <p:pic>
+        <p:nvPicPr>
+          <p:cNvPr id="5" name="图片 4">
+            <a:extLst>
+              <a:ext uri="{FF2B5EF4-FFF2-40B4-BE49-F238E27FC236}">
+                <a16:creationId xmlns:a16="http://schemas.microsoft.com/office/drawing/2014/main" id="{071B3A05-D8C9-7871-C807-B5DC447A3E22}"/>
+              </a:ext>
+            </a:extLst>
+          </p:cNvPr>
+          <p:cNvPicPr>
+            <a:picLocks noChangeAspect="1"/>
+          </p:cNvPicPr>
+          <p:nvPr/>
+        </p:nvPicPr>
+        <p:blipFill>
+          <a:blip r:embed="rId2">
+            <a:extLst>
+              <a:ext uri="{28A0092B-C50C-407E-A947-70E740481C1C}">
+                <a14:useLocalDpi xmlns:a14="http://schemas.microsoft.com/office/drawing/2010/main" val="0"/>
+              </a:ext>
+            </a:extLst>
+          </a:blip>
+          <a:stretch>
+            <a:fillRect/>
+          </a:stretch>
+        </p:blipFill>
+        <p:spPr>
+          <a:xfrm>
+            <a:off x="0" y="4125876"/>
+            <a:ext cx="6096000" cy="1219200"/>
+          </a:xfrm>
+          <a:prstGeom prst="rect">
+            <a:avLst/>
+          </a:prstGeom>
+        </p:spPr>
+      </p:pic>
+      <p:pic>
+        <p:nvPicPr>
+          <p:cNvPr id="7" name="图片 6">
+            <a:extLst>
+              <a:ext uri="{FF2B5EF4-FFF2-40B4-BE49-F238E27FC236}">
+                <a16:creationId xmlns:a16="http://schemas.microsoft.com/office/drawing/2014/main" id="{86B7A30F-79D5-CCAA-0C81-E7CE6B3ABD51}"/>
+              </a:ext>
+            </a:extLst>
+          </p:cNvPr>
+          <p:cNvPicPr>
+            <a:picLocks noChangeAspect="1"/>
+          </p:cNvPicPr>
+          <p:nvPr/>
+        </p:nvPicPr>
+        <p:blipFill>
+          <a:blip r:embed="rId3">
+            <a:extLst>
+              <a:ext uri="{28A0092B-C50C-407E-A947-70E740481C1C}">
+                <a14:useLocalDpi xmlns:a14="http://schemas.microsoft.com/office/drawing/2010/main" val="0"/>
+              </a:ext>
+            </a:extLst>
+          </a:blip>
+          <a:stretch>
+            <a:fillRect/>
+          </a:stretch>
+        </p:blipFill>
+        <p:spPr>
+          <a:xfrm>
+            <a:off x="6096000" y="4125876"/>
+            <a:ext cx="6096000" cy="2032000"/>
+          </a:xfrm>
+          <a:prstGeom prst="rect">
+            <a:avLst/>
+          </a:prstGeom>
+        </p:spPr>
+      </p:pic>
+    </p:spTree>
+    <p:extLst>
+      <p:ext uri="{BB962C8B-B14F-4D97-AF65-F5344CB8AC3E}">
+        <p14:creationId xmlns:p14="http://schemas.microsoft.com/office/powerpoint/2010/main" val="1052658836"/>
+      </p:ext>
+    </p:extLst>
+  </p:cSld>
+  <p:clrMapOvr>
+    <a:masterClrMapping/>
+  </p:clrMapOvr>
+</p:sld>
+</file>
+
+<file path=ppt/slides/slide31.xml><?xml version="1.0" encoding="utf-8"?>
+<p:sld xmlns:a="http://schemas.openxmlformats.org/drawingml/2006/main" xmlns:r="http://schemas.openxmlformats.org/officeDocument/2006/relationships" xmlns:p="http://schemas.openxmlformats.org/presentationml/2006/main">
+  <p:cSld>
+    <p:spTree>
+      <p:nvGrpSpPr>
+        <p:cNvPr id="1" name=""/>
+        <p:cNvGrpSpPr/>
+        <p:nvPr/>
+      </p:nvGrpSpPr>
+      <p:grpSpPr>
+        <a:xfrm>
+          <a:off x="0" y="0"/>
+          <a:ext cx="0" cy="0"/>
+          <a:chOff x="0" y="0"/>
+          <a:chExt cx="0" cy="0"/>
+        </a:xfrm>
+      </p:grpSpPr>
+      <p:sp>
+        <p:nvSpPr>
+          <p:cNvPr id="2" name="标题 1">
+            <a:extLst>
+              <a:ext uri="{FF2B5EF4-FFF2-40B4-BE49-F238E27FC236}">
+                <a16:creationId xmlns:a16="http://schemas.microsoft.com/office/drawing/2014/main" id="{137C07E5-B809-9856-FF16-87376EBAEAE4}"/>
+              </a:ext>
+            </a:extLst>
+          </p:cNvPr>
+          <p:cNvSpPr>
+            <a:spLocks noGrp="1"/>
+          </p:cNvSpPr>
+          <p:nvPr>
+            <p:ph type="title"/>
+          </p:nvPr>
+        </p:nvSpPr>
+        <p:spPr/>
+        <p:txBody>
+          <a:bodyPr/>
+          <a:lstStyle/>
+          <a:p>
+            <a:r>
+              <a:rPr lang="zh-CN" altLang="en-US" dirty="0"/>
+              <a:t>参考培训视频</a:t>
+            </a:r>
+            <a:endParaRPr lang="zh-SG" altLang="en-US" dirty="0"/>
+          </a:p>
+        </p:txBody>
+      </p:sp>
+      <p:sp>
+        <p:nvSpPr>
+          <p:cNvPr id="3" name="内容占位符 2">
+            <a:extLst>
+              <a:ext uri="{FF2B5EF4-FFF2-40B4-BE49-F238E27FC236}">
+                <a16:creationId xmlns:a16="http://schemas.microsoft.com/office/drawing/2014/main" id="{8C215D91-A734-9A1B-2C32-DBE194C878EB}"/>
+              </a:ext>
+            </a:extLst>
+          </p:cNvPr>
+          <p:cNvSpPr>
+            <a:spLocks noGrp="1"/>
+          </p:cNvSpPr>
+          <p:nvPr>
+            <p:ph idx="1"/>
+          </p:nvPr>
+        </p:nvSpPr>
+        <p:spPr/>
+        <p:txBody>
+          <a:bodyPr/>
+          <a:lstStyle/>
+          <a:p>
+            <a:r>
+              <a:rPr lang="en-US" altLang="zh-CN" dirty="0"/>
+              <a:t>【</a:t>
+            </a:r>
+            <a:r>
+              <a:rPr lang="en-GB" altLang="zh-SG" dirty="0"/>
+              <a:t>STM32CubeMX-UART</a:t>
+            </a:r>
+            <a:r>
+              <a:rPr lang="zh-SG" altLang="en-US" dirty="0"/>
+              <a:t>通信</a:t>
+            </a:r>
+            <a:r>
+              <a:rPr lang="en-US" altLang="zh-CN" dirty="0"/>
+              <a:t>】</a:t>
+            </a:r>
+            <a:endParaRPr lang="en-GB" altLang="zh-SG" dirty="0"/>
+          </a:p>
+          <a:p>
+            <a:pPr marL="0" indent="0">
+              <a:buNone/>
+            </a:pPr>
+            <a:r>
+              <a:rPr lang="en-GB" altLang="zh-SG" dirty="0"/>
+              <a:t>https://www.bilibili.com/video/BV1db4y1a7Xe</a:t>
+            </a:r>
+            <a:endParaRPr lang="zh-SG" altLang="en-US" dirty="0"/>
+          </a:p>
+        </p:txBody>
+      </p:sp>
+    </p:spTree>
+    <p:extLst>
+      <p:ext uri="{BB962C8B-B14F-4D97-AF65-F5344CB8AC3E}">
+        <p14:creationId xmlns:p14="http://schemas.microsoft.com/office/powerpoint/2010/main" val="1224169107"/>
+      </p:ext>
+    </p:extLst>
+  </p:cSld>
+  <p:clrMapOvr>
+    <a:masterClrMapping/>
+  </p:clrMapOvr>
+</p:sld>
+</file>
+
+<file path=ppt/slides/slide32.xml><?xml version="1.0" encoding="utf-8"?>
+<p:sld xmlns:a="http://schemas.openxmlformats.org/drawingml/2006/main" xmlns:r="http://schemas.openxmlformats.org/officeDocument/2006/relationships" xmlns:p="http://schemas.openxmlformats.org/presentationml/2006/main">
+  <p:cSld>
+    <p:spTree>
+      <p:nvGrpSpPr>
+        <p:cNvPr id="1" name=""/>
+        <p:cNvGrpSpPr/>
+        <p:nvPr/>
+      </p:nvGrpSpPr>
+      <p:grpSpPr>
+        <a:xfrm>
+          <a:off x="0" y="0"/>
+          <a:ext cx="0" cy="0"/>
+          <a:chOff x="0" y="0"/>
+          <a:chExt cx="0" cy="0"/>
+        </a:xfrm>
+      </p:grpSpPr>
+      <p:sp>
+        <p:nvSpPr>
+          <p:cNvPr id="2" name="标题 1">
+            <a:extLst>
+              <a:ext uri="{FF2B5EF4-FFF2-40B4-BE49-F238E27FC236}">
+                <a16:creationId xmlns:a16="http://schemas.microsoft.com/office/drawing/2014/main" id="{BC84A5B1-1184-3761-C717-A9E9B3FA4352}"/>
+              </a:ext>
+            </a:extLst>
+          </p:cNvPr>
+          <p:cNvSpPr>
+            <a:spLocks noGrp="1"/>
+          </p:cNvSpPr>
+          <p:nvPr>
+            <p:ph type="title"/>
+          </p:nvPr>
+        </p:nvSpPr>
+        <p:spPr/>
+        <p:txBody>
+          <a:bodyPr/>
+          <a:lstStyle/>
+          <a:p>
+            <a:r>
+              <a:rPr lang="zh-CN" altLang="en-US" dirty="0"/>
+              <a:t>作业</a:t>
+            </a:r>
+            <a:r>
+              <a:rPr lang="en-US" altLang="zh-CN" dirty="0"/>
+              <a:t>2-3</a:t>
+            </a:r>
+            <a:endParaRPr lang="zh-SG" altLang="en-US" dirty="0"/>
+          </a:p>
+        </p:txBody>
+      </p:sp>
+      <p:sp>
+        <p:nvSpPr>
+          <p:cNvPr id="3" name="内容占位符 2">
+            <a:extLst>
+              <a:ext uri="{FF2B5EF4-FFF2-40B4-BE49-F238E27FC236}">
+                <a16:creationId xmlns:a16="http://schemas.microsoft.com/office/drawing/2014/main" id="{0E2D1A34-FCAB-9D32-8B8E-94E0DD5D98B1}"/>
+              </a:ext>
+            </a:extLst>
+          </p:cNvPr>
+          <p:cNvSpPr>
+            <a:spLocks noGrp="1"/>
+          </p:cNvSpPr>
+          <p:nvPr>
+            <p:ph idx="1"/>
+          </p:nvPr>
+        </p:nvSpPr>
+        <p:spPr/>
+        <p:txBody>
+          <a:bodyPr/>
+          <a:lstStyle/>
+          <a:p>
+            <a:r>
+              <a:rPr lang="zh-CN" altLang="en-US" dirty="0"/>
+              <a:t>接收</a:t>
+            </a:r>
+            <a:r>
+              <a:rPr lang="en-US" altLang="zh-CN" dirty="0"/>
+              <a:t>DT7</a:t>
+            </a:r>
+            <a:r>
+              <a:rPr lang="zh-CN" altLang="en-US" dirty="0"/>
+              <a:t>数据</a:t>
+            </a:r>
+            <a:endParaRPr lang="en-US" altLang="zh-CN" dirty="0"/>
+          </a:p>
+          <a:p>
+            <a:r>
+              <a:rPr lang="en-US" altLang="zh-CN" dirty="0"/>
+              <a:t>C</a:t>
+            </a:r>
+            <a:r>
+              <a:rPr lang="zh-CN" altLang="en-US" dirty="0"/>
+              <a:t>板和</a:t>
+            </a:r>
+            <a:r>
+              <a:rPr lang="en-US" altLang="zh-CN" dirty="0"/>
+              <a:t>H7</a:t>
+            </a:r>
+            <a:r>
+              <a:rPr lang="zh-CN" altLang="en-US" dirty="0"/>
+              <a:t>板提供带反相器的接口（见手册）</a:t>
+            </a:r>
+            <a:endParaRPr lang="en-US" altLang="zh-CN" dirty="0"/>
+          </a:p>
+          <a:p>
+            <a:r>
+              <a:rPr lang="zh-CN" altLang="en-US" dirty="0"/>
+              <a:t>要求上电时和打断点恢复后都能继续接收数据</a:t>
+            </a:r>
+            <a:endParaRPr lang="zh-SG" altLang="en-US" dirty="0"/>
+          </a:p>
+        </p:txBody>
+      </p:sp>
+    </p:spTree>
+    <p:extLst>
+      <p:ext uri="{BB962C8B-B14F-4D97-AF65-F5344CB8AC3E}">
+        <p14:creationId xmlns:p14="http://schemas.microsoft.com/office/powerpoint/2010/main" val="4218983205"/>
+      </p:ext>
+    </p:extLst>
+  </p:cSld>
+  <p:clrMapOvr>
+    <a:masterClrMapping/>
+  </p:clrMapOvr>
+</p:sld>
+</file>
+
+<file path=ppt/slides/slide33.xml><?xml version="1.0" encoding="utf-8"?>
+<p:sld xmlns:a="http://schemas.openxmlformats.org/drawingml/2006/main" xmlns:r="http://schemas.openxmlformats.org/officeDocument/2006/relationships" xmlns:p="http://schemas.openxmlformats.org/presentationml/2006/main">
+  <p:cSld>
+    <p:spTree>
+      <p:nvGrpSpPr>
+        <p:cNvPr id="1" name=""/>
+        <p:cNvGrpSpPr/>
+        <p:nvPr/>
+      </p:nvGrpSpPr>
+      <p:grpSpPr>
+        <a:xfrm>
+          <a:off x="0" y="0"/>
+          <a:ext cx="0" cy="0"/>
+          <a:chOff x="0" y="0"/>
+          <a:chExt cx="0" cy="0"/>
+        </a:xfrm>
+      </p:grpSpPr>
+      <p:sp>
+        <p:nvSpPr>
+          <p:cNvPr id="2" name="标题 1">
+            <a:extLst>
+              <a:ext uri="{FF2B5EF4-FFF2-40B4-BE49-F238E27FC236}">
+                <a16:creationId xmlns:a16="http://schemas.microsoft.com/office/drawing/2014/main" id="{DB797EA0-A54D-A38C-DC4A-987A53CEB1EF}"/>
+              </a:ext>
+            </a:extLst>
+          </p:cNvPr>
+          <p:cNvSpPr>
+            <a:spLocks noGrp="1"/>
+          </p:cNvSpPr>
+          <p:nvPr>
+            <p:ph type="ctrTitle"/>
+          </p:nvPr>
+        </p:nvSpPr>
+        <p:spPr/>
+        <p:txBody>
+          <a:bodyPr anchor="ctr"/>
+          <a:lstStyle/>
+          <a:p>
+            <a:r>
+              <a:rPr lang="en-US" altLang="zh-SG" dirty="0"/>
+              <a:t>2.4 </a:t>
+            </a:r>
+            <a:r>
+              <a:rPr lang="en-US" altLang="zh-CN" dirty="0"/>
+              <a:t>CAN</a:t>
+            </a:r>
+            <a:endParaRPr lang="zh-SG" altLang="en-US" dirty="0"/>
+          </a:p>
+        </p:txBody>
+      </p:sp>
+      <p:sp>
+        <p:nvSpPr>
+          <p:cNvPr id="3" name="副标题 2">
+            <a:extLst>
+              <a:ext uri="{FF2B5EF4-FFF2-40B4-BE49-F238E27FC236}">
+                <a16:creationId xmlns:a16="http://schemas.microsoft.com/office/drawing/2014/main" id="{D5411CD0-1B89-8CDE-192B-6A6D5C8F79D2}"/>
+              </a:ext>
+            </a:extLst>
+          </p:cNvPr>
+          <p:cNvSpPr>
+            <a:spLocks noGrp="1"/>
+          </p:cNvSpPr>
+          <p:nvPr>
+            <p:ph type="subTitle" idx="1"/>
+          </p:nvPr>
+        </p:nvSpPr>
+        <p:spPr>
+          <a:xfrm>
+            <a:off x="1524000" y="3602038"/>
+            <a:ext cx="9144000" cy="3255962"/>
+          </a:xfrm>
+        </p:spPr>
+        <p:txBody>
+          <a:bodyPr/>
+          <a:lstStyle/>
+          <a:p>
+            <a:r>
+              <a:rPr lang="zh-CN" altLang="en-US" dirty="0"/>
+              <a:t>要求：</a:t>
+            </a:r>
+            <a:endParaRPr lang="en-US" altLang="zh-CN" dirty="0"/>
+          </a:p>
+          <a:p>
+            <a:pPr marL="342900" indent="-342900">
+              <a:buFont typeface="Arial" panose="020B0604020202020204" pitchFamily="34" charset="0"/>
+              <a:buChar char="•"/>
+            </a:pPr>
+            <a:r>
+              <a:rPr lang="zh-CN" altLang="en-US" dirty="0"/>
+              <a:t>配置波特率和采样点</a:t>
+            </a:r>
+            <a:endParaRPr lang="en-US" altLang="zh-CN" dirty="0"/>
+          </a:p>
+          <a:p>
+            <a:pPr marL="342900" indent="-342900">
+              <a:buFont typeface="Arial" panose="020B0604020202020204" pitchFamily="34" charset="0"/>
+              <a:buChar char="•"/>
+            </a:pPr>
+            <a:r>
+              <a:rPr lang="zh-CN" altLang="en-US" dirty="0"/>
+              <a:t>了解仲裁机制，合理设置</a:t>
+            </a:r>
+            <a:r>
+              <a:rPr lang="en-US" altLang="zh-CN" dirty="0"/>
+              <a:t>ID</a:t>
+            </a:r>
+          </a:p>
+          <a:p>
+            <a:pPr marL="342900" indent="-342900">
+              <a:buFont typeface="Arial" panose="020B0604020202020204" pitchFamily="34" charset="0"/>
+              <a:buChar char="•"/>
+            </a:pPr>
+            <a:r>
+              <a:rPr lang="zh-CN" altLang="en-US" dirty="0"/>
+              <a:t>配置</a:t>
+            </a:r>
+            <a:r>
+              <a:rPr lang="en-US" altLang="zh-SG" dirty="0"/>
+              <a:t>FDCAN</a:t>
+            </a:r>
+            <a:r>
+              <a:rPr lang="zh-CN" altLang="en-US" dirty="0"/>
+              <a:t>内存和</a:t>
+            </a:r>
+            <a:r>
+              <a:rPr lang="en-US" altLang="zh-CN"/>
+              <a:t>TDC</a:t>
+            </a:r>
+            <a:endParaRPr lang="zh-SG" altLang="en-US" dirty="0"/>
+          </a:p>
+        </p:txBody>
+      </p:sp>
+    </p:spTree>
+    <p:extLst>
+      <p:ext uri="{BB962C8B-B14F-4D97-AF65-F5344CB8AC3E}">
+        <p14:creationId xmlns:p14="http://schemas.microsoft.com/office/powerpoint/2010/main" val="3762299055"/>
+      </p:ext>
+    </p:extLst>
+  </p:cSld>
+  <p:clrMapOvr>
+    <a:masterClrMapping/>
+  </p:clrMapOvr>
+</p:sld>
+</file>
+
+<file path=ppt/slides/slide34.xml><?xml version="1.0" encoding="utf-8"?>
+<p:sld xmlns:a="http://schemas.openxmlformats.org/drawingml/2006/main" xmlns:r="http://schemas.openxmlformats.org/officeDocument/2006/relationships" xmlns:p="http://schemas.openxmlformats.org/presentationml/2006/main">
+  <p:cSld>
+    <p:spTree>
+      <p:nvGrpSpPr>
+        <p:cNvPr id="1" name=""/>
+        <p:cNvGrpSpPr/>
+        <p:nvPr/>
+      </p:nvGrpSpPr>
+      <p:grpSpPr>
+        <a:xfrm>
+          <a:off x="0" y="0"/>
+          <a:ext cx="0" cy="0"/>
+          <a:chOff x="0" y="0"/>
+          <a:chExt cx="0" cy="0"/>
+        </a:xfrm>
+      </p:grpSpPr>
+      <p:sp>
+        <p:nvSpPr>
+          <p:cNvPr id="2" name="标题 1">
+            <a:extLst>
+              <a:ext uri="{FF2B5EF4-FFF2-40B4-BE49-F238E27FC236}">
+                <a16:creationId xmlns:a16="http://schemas.microsoft.com/office/drawing/2014/main" id="{1D94B794-A755-DD5B-60DA-92382798200D}"/>
+              </a:ext>
+            </a:extLst>
+          </p:cNvPr>
+          <p:cNvSpPr>
+            <a:spLocks noGrp="1"/>
+          </p:cNvSpPr>
+          <p:nvPr>
+            <p:ph type="title"/>
+          </p:nvPr>
+        </p:nvSpPr>
+        <p:spPr>
+          <a:xfrm>
+            <a:off x="838200" y="0"/>
+            <a:ext cx="10515600" cy="1325563"/>
+          </a:xfrm>
+        </p:spPr>
+        <p:txBody>
+          <a:bodyPr/>
+          <a:lstStyle/>
+          <a:p>
+            <a:r>
+              <a:rPr lang="zh-CN" altLang="en-US" dirty="0"/>
+              <a:t>基本参数</a:t>
+            </a:r>
+            <a:endParaRPr lang="zh-SG" altLang="en-US" dirty="0"/>
+          </a:p>
+        </p:txBody>
+      </p:sp>
+      <p:sp>
+        <p:nvSpPr>
+          <p:cNvPr id="3" name="内容占位符 2">
+            <a:extLst>
+              <a:ext uri="{FF2B5EF4-FFF2-40B4-BE49-F238E27FC236}">
+                <a16:creationId xmlns:a16="http://schemas.microsoft.com/office/drawing/2014/main" id="{4B8C1324-D98E-9024-C370-0DB982F4F326}"/>
+              </a:ext>
+            </a:extLst>
+          </p:cNvPr>
+          <p:cNvSpPr>
+            <a:spLocks noGrp="1"/>
+          </p:cNvSpPr>
+          <p:nvPr>
+            <p:ph idx="1"/>
+          </p:nvPr>
+        </p:nvSpPr>
+        <p:spPr>
+          <a:xfrm>
+            <a:off x="838200" y="1325564"/>
+            <a:ext cx="10515600" cy="5532436"/>
+          </a:xfrm>
+        </p:spPr>
+        <p:txBody>
+          <a:bodyPr>
+            <a:normAutofit/>
+          </a:bodyPr>
+          <a:lstStyle/>
+          <a:p>
+            <a:r>
+              <a:rPr lang="en-US" altLang="zh-CN" dirty="0"/>
+              <a:t>Frame Format</a:t>
+            </a:r>
+            <a:r>
+              <a:rPr lang="zh-CN" altLang="en-US" dirty="0"/>
+              <a:t>：帧格式</a:t>
+            </a:r>
+            <a:endParaRPr lang="en-US" altLang="zh-CN" dirty="0"/>
+          </a:p>
+          <a:p>
+            <a:pPr lvl="1"/>
+            <a:r>
+              <a:rPr lang="en-US" altLang="zh-CN" dirty="0"/>
+              <a:t>CAN 2.0B</a:t>
+            </a:r>
+            <a:r>
+              <a:rPr lang="zh-CN" altLang="en-US" dirty="0"/>
+              <a:t>或</a:t>
+            </a:r>
+            <a:r>
+              <a:rPr lang="en-US" altLang="zh-CN" dirty="0"/>
+              <a:t>FDCAN</a:t>
+            </a:r>
+            <a:r>
+              <a:rPr lang="zh-CN" altLang="en-US" dirty="0"/>
+              <a:t>（是否可变波特率）</a:t>
+            </a:r>
+            <a:endParaRPr lang="en-US" altLang="zh-CN" dirty="0"/>
+          </a:p>
+          <a:p>
+            <a:r>
+              <a:rPr lang="en-US" altLang="zh-CN" dirty="0"/>
+              <a:t>Mode</a:t>
+            </a:r>
+            <a:r>
+              <a:rPr lang="zh-CN" altLang="en-US" dirty="0"/>
+              <a:t>：</a:t>
+            </a:r>
+            <a:r>
+              <a:rPr lang="en-US" altLang="zh-CN" dirty="0"/>
+              <a:t>CAN</a:t>
+            </a:r>
+            <a:r>
+              <a:rPr lang="zh-CN" altLang="en-US" dirty="0"/>
+              <a:t>模式</a:t>
+            </a:r>
+            <a:endParaRPr lang="en-US" altLang="zh-CN" dirty="0"/>
+          </a:p>
+          <a:p>
+            <a:pPr lvl="1"/>
+            <a:r>
+              <a:rPr lang="zh-CN" altLang="en-US" dirty="0"/>
+              <a:t>总线监听模式可以分析总线</a:t>
+            </a:r>
+            <a:endParaRPr lang="en-US" altLang="zh-CN" dirty="0"/>
+          </a:p>
+          <a:p>
+            <a:pPr lvl="1"/>
+            <a:r>
+              <a:rPr lang="zh-CN" altLang="en-US" dirty="0"/>
+              <a:t>内部回环模式可以测试收发逻辑</a:t>
+            </a:r>
+            <a:endParaRPr lang="en-US" altLang="zh-CN" dirty="0"/>
+          </a:p>
+          <a:p>
+            <a:pPr lvl="1"/>
+            <a:r>
+              <a:rPr lang="zh-CN" altLang="en-US" dirty="0"/>
+              <a:t>外部回环模式可以测试收发器和线路</a:t>
+            </a:r>
+            <a:endParaRPr lang="en-US" altLang="zh-CN" dirty="0"/>
+          </a:p>
+          <a:p>
+            <a:r>
+              <a:rPr lang="en-US" altLang="zh-CN" dirty="0"/>
+              <a:t>Auto Retransmission</a:t>
+            </a:r>
+            <a:r>
+              <a:rPr lang="zh-CN" altLang="en-US" dirty="0"/>
+              <a:t>自动重传</a:t>
+            </a:r>
+            <a:endParaRPr lang="en-US" altLang="zh-CN" dirty="0"/>
+          </a:p>
+          <a:p>
+            <a:pPr lvl="1"/>
+            <a:r>
+              <a:rPr lang="zh-CN" altLang="en-US" dirty="0"/>
+              <a:t>自动重发，避免仲裁失败、</a:t>
+            </a:r>
+            <a:r>
+              <a:rPr lang="en-US" altLang="zh-CN" dirty="0"/>
+              <a:t>ACK </a:t>
+            </a:r>
+            <a:r>
+              <a:rPr lang="zh-CN" altLang="en-US" dirty="0"/>
+              <a:t>错误、总线错误等导致发送失败</a:t>
+            </a:r>
+            <a:endParaRPr lang="en-US" altLang="zh-CN" dirty="0"/>
+          </a:p>
+          <a:p>
+            <a:r>
+              <a:rPr lang="en-US" altLang="zh-CN" dirty="0"/>
+              <a:t>Transmit Pause</a:t>
+            </a:r>
+            <a:r>
+              <a:rPr lang="zh-CN" altLang="en-US" dirty="0"/>
+              <a:t>：传输暂停</a:t>
+            </a:r>
+            <a:endParaRPr lang="en-US" altLang="zh-CN" dirty="0"/>
+          </a:p>
+          <a:p>
+            <a:pPr lvl="1"/>
+            <a:r>
+              <a:rPr lang="zh-CN" altLang="en-US" dirty="0"/>
+              <a:t>两次发送之间插入暂停，避免一个节点长时间霸占总线</a:t>
+            </a:r>
+            <a:endParaRPr lang="en-US" altLang="zh-CN" dirty="0"/>
+          </a:p>
+          <a:p>
+            <a:r>
+              <a:rPr lang="en-US" altLang="zh-CN" dirty="0"/>
+              <a:t>Protocol Exception</a:t>
+            </a:r>
+            <a:r>
+              <a:rPr lang="zh-CN" altLang="en-US" dirty="0"/>
+              <a:t>：协议异常处理</a:t>
+            </a:r>
+            <a:endParaRPr lang="en-US" altLang="zh-CN" dirty="0"/>
+          </a:p>
+          <a:p>
+            <a:pPr lvl="1"/>
+            <a:r>
+              <a:rPr lang="zh-CN" altLang="en-US" dirty="0"/>
+              <a:t>能够兼容更新的协议如</a:t>
+            </a:r>
+            <a:r>
+              <a:rPr lang="en-US" altLang="zh-CN" dirty="0"/>
+              <a:t>CANFD</a:t>
+            </a:r>
+            <a:endParaRPr lang="zh-SG" altLang="en-US" dirty="0"/>
+          </a:p>
+        </p:txBody>
+      </p:sp>
+      <p:pic>
+        <p:nvPicPr>
+          <p:cNvPr id="5" name="图片 4">
+            <a:extLst>
+              <a:ext uri="{FF2B5EF4-FFF2-40B4-BE49-F238E27FC236}">
+                <a16:creationId xmlns:a16="http://schemas.microsoft.com/office/drawing/2014/main" id="{99F43725-1EA9-A2CE-6481-54852DE77E65}"/>
+              </a:ext>
+            </a:extLst>
+          </p:cNvPr>
+          <p:cNvPicPr>
+            <a:picLocks noChangeAspect="1"/>
+          </p:cNvPicPr>
+          <p:nvPr/>
+        </p:nvPicPr>
+        <p:blipFill>
+          <a:blip r:embed="rId2"/>
+          <a:stretch>
+            <a:fillRect/>
+          </a:stretch>
+        </p:blipFill>
+        <p:spPr>
+          <a:xfrm>
+            <a:off x="6971571" y="1690688"/>
+            <a:ext cx="5220429" cy="1943371"/>
+          </a:xfrm>
+          <a:prstGeom prst="rect">
+            <a:avLst/>
+          </a:prstGeom>
+        </p:spPr>
+      </p:pic>
+    </p:spTree>
+    <p:extLst>
+      <p:ext uri="{BB962C8B-B14F-4D97-AF65-F5344CB8AC3E}">
+        <p14:creationId xmlns:p14="http://schemas.microsoft.com/office/powerpoint/2010/main" val="529158937"/>
+      </p:ext>
+    </p:extLst>
+  </p:cSld>
+  <p:clrMapOvr>
+    <a:masterClrMapping/>
+  </p:clrMapOvr>
+</p:sld>
+</file>
+
+<file path=ppt/slides/slide35.xml><?xml version="1.0" encoding="utf-8"?>
+<p:sld xmlns:a="http://schemas.openxmlformats.org/drawingml/2006/main" xmlns:r="http://schemas.openxmlformats.org/officeDocument/2006/relationships" xmlns:p="http://schemas.openxmlformats.org/presentationml/2006/main">
+  <p:cSld>
+    <p:spTree>
+      <p:nvGrpSpPr>
+        <p:cNvPr id="1" name=""/>
+        <p:cNvGrpSpPr/>
+        <p:nvPr/>
+      </p:nvGrpSpPr>
+      <p:grpSpPr>
+        <a:xfrm>
+          <a:off x="0" y="0"/>
+          <a:ext cx="0" cy="0"/>
+          <a:chOff x="0" y="0"/>
+          <a:chExt cx="0" cy="0"/>
+        </a:xfrm>
+      </p:grpSpPr>
+      <p:sp>
+        <p:nvSpPr>
+          <p:cNvPr id="2" name="标题 1">
+            <a:extLst>
+              <a:ext uri="{FF2B5EF4-FFF2-40B4-BE49-F238E27FC236}">
+                <a16:creationId xmlns:a16="http://schemas.microsoft.com/office/drawing/2014/main" id="{F34BD051-D46F-55FF-FD48-9BFD6316254E}"/>
+              </a:ext>
+            </a:extLst>
+          </p:cNvPr>
+          <p:cNvSpPr>
+            <a:spLocks noGrp="1"/>
+          </p:cNvSpPr>
+          <p:nvPr>
+            <p:ph type="title"/>
+          </p:nvPr>
+        </p:nvSpPr>
+        <p:spPr>
+          <a:xfrm>
+            <a:off x="838200" y="0"/>
+            <a:ext cx="10515600" cy="1325563"/>
+          </a:xfrm>
+        </p:spPr>
+        <p:txBody>
+          <a:bodyPr/>
+          <a:lstStyle/>
+          <a:p>
+            <a:r>
+              <a:rPr lang="zh-CN" altLang="en-US" dirty="0"/>
+              <a:t>基本参数</a:t>
+            </a:r>
+            <a:endParaRPr lang="zh-SG" altLang="en-US" dirty="0"/>
+          </a:p>
+        </p:txBody>
+      </p:sp>
+      <p:sp>
+        <p:nvSpPr>
+          <p:cNvPr id="3" name="内容占位符 2">
+            <a:extLst>
+              <a:ext uri="{FF2B5EF4-FFF2-40B4-BE49-F238E27FC236}">
+                <a16:creationId xmlns:a16="http://schemas.microsoft.com/office/drawing/2014/main" id="{629FD529-D7D8-148A-A1AD-F8C8D4DCB134}"/>
+              </a:ext>
+            </a:extLst>
+          </p:cNvPr>
+          <p:cNvSpPr>
+            <a:spLocks noGrp="1"/>
+          </p:cNvSpPr>
+          <p:nvPr>
+            <p:ph idx="1"/>
+          </p:nvPr>
+        </p:nvSpPr>
+        <p:spPr>
+          <a:xfrm>
+            <a:off x="0" y="1325563"/>
+            <a:ext cx="10515600" cy="5532437"/>
+          </a:xfrm>
+        </p:spPr>
+        <p:txBody>
+          <a:bodyPr/>
+          <a:lstStyle/>
+          <a:p>
+            <a:r>
+              <a:rPr lang="en-US" altLang="zh-CN" dirty="0"/>
+              <a:t>Message Ram Offset</a:t>
+            </a:r>
+            <a:r>
+              <a:rPr lang="zh-CN" altLang="en-US" dirty="0"/>
+              <a:t>：</a:t>
+            </a:r>
+            <a:endParaRPr lang="en-US" altLang="zh-CN" dirty="0"/>
+          </a:p>
+          <a:p>
+            <a:pPr lvl="1"/>
+            <a:r>
+              <a:rPr lang="en-US" altLang="zh-CN" dirty="0"/>
+              <a:t>STM32 FDCAN </a:t>
+            </a:r>
+            <a:r>
+              <a:rPr lang="zh-SG" altLang="en-US" dirty="0"/>
+              <a:t>使用一块专门的 </a:t>
+            </a:r>
+            <a:r>
+              <a:rPr lang="en-US" altLang="zh-CN" dirty="0"/>
+              <a:t>Message RAM </a:t>
+            </a:r>
+            <a:r>
+              <a:rPr lang="zh-SG" altLang="en-US" dirty="0"/>
+              <a:t>存放过滤器、接收 </a:t>
+            </a:r>
+            <a:r>
+              <a:rPr lang="en-US" altLang="zh-CN" dirty="0"/>
+              <a:t>FIFO</a:t>
+            </a:r>
+            <a:r>
+              <a:rPr lang="zh-CN" altLang="en-US" dirty="0"/>
+              <a:t>、</a:t>
+            </a:r>
+            <a:r>
+              <a:rPr lang="zh-SG" altLang="en-US" dirty="0"/>
+              <a:t>发送 </a:t>
+            </a:r>
+            <a:r>
+              <a:rPr lang="en-US" altLang="zh-CN" dirty="0"/>
+              <a:t>FIFO </a:t>
+            </a:r>
+            <a:r>
+              <a:rPr lang="zh-SG" altLang="en-US" dirty="0"/>
+              <a:t>等结构</a:t>
+            </a:r>
+            <a:endParaRPr lang="en-US" altLang="zh-SG" dirty="0"/>
+          </a:p>
+          <a:p>
+            <a:pPr lvl="1"/>
+            <a:r>
+              <a:rPr lang="en-US" altLang="zh-CN" dirty="0"/>
+              <a:t>Std Filters </a:t>
+            </a:r>
+            <a:r>
+              <a:rPr lang="en-US" altLang="zh-CN" dirty="0" err="1"/>
+              <a:t>Nbr</a:t>
+            </a:r>
+            <a:r>
+              <a:rPr lang="zh-CN" altLang="en-US" dirty="0"/>
+              <a:t>：</a:t>
+            </a:r>
+            <a:r>
+              <a:rPr lang="zh-SG" altLang="en-US" dirty="0"/>
+              <a:t>标准帧</a:t>
+            </a:r>
+            <a:r>
+              <a:rPr lang="en-US" altLang="zh-SG" dirty="0"/>
+              <a:t>11-</a:t>
+            </a:r>
+            <a:r>
+              <a:rPr lang="en-US" altLang="zh-CN" dirty="0"/>
+              <a:t>bit ID</a:t>
+            </a:r>
+            <a:r>
+              <a:rPr lang="zh-SG" altLang="en-US" dirty="0"/>
+              <a:t>过滤器数量</a:t>
+            </a:r>
+            <a:endParaRPr lang="en-US" altLang="zh-SG" dirty="0"/>
+          </a:p>
+          <a:p>
+            <a:pPr lvl="1"/>
+            <a:r>
+              <a:rPr lang="en-US" altLang="zh-CN" dirty="0"/>
+              <a:t>Ext Filters </a:t>
+            </a:r>
+            <a:r>
+              <a:rPr lang="en-US" altLang="zh-CN" dirty="0" err="1"/>
+              <a:t>Nbr</a:t>
+            </a:r>
+            <a:r>
+              <a:rPr lang="zh-CN" altLang="en-US" dirty="0"/>
+              <a:t>：</a:t>
+            </a:r>
+            <a:r>
+              <a:rPr lang="zh-SG" altLang="en-US" dirty="0"/>
+              <a:t>扩展帧</a:t>
+            </a:r>
+            <a:r>
+              <a:rPr lang="en-US" altLang="zh-SG" dirty="0"/>
+              <a:t>29-</a:t>
+            </a:r>
+            <a:r>
+              <a:rPr lang="en-US" altLang="zh-CN" dirty="0"/>
+              <a:t>bit ID</a:t>
+            </a:r>
+            <a:r>
+              <a:rPr lang="zh-SG" altLang="en-US" dirty="0"/>
+              <a:t>过滤器数量</a:t>
+            </a:r>
+            <a:endParaRPr lang="en-US" altLang="zh-SG" dirty="0"/>
+          </a:p>
+          <a:p>
+            <a:pPr lvl="1"/>
+            <a:r>
+              <a:rPr lang="en-US" altLang="zh-CN" dirty="0"/>
+              <a:t>Rx Fifo0 </a:t>
+            </a:r>
+            <a:r>
+              <a:rPr lang="en-US" altLang="zh-CN" dirty="0" err="1"/>
+              <a:t>Elmts</a:t>
+            </a:r>
+            <a:r>
+              <a:rPr lang="en-US" altLang="zh-CN" dirty="0"/>
+              <a:t> </a:t>
+            </a:r>
+            <a:r>
+              <a:rPr lang="zh-CN" altLang="en-US" dirty="0"/>
+              <a:t>：</a:t>
+            </a:r>
+            <a:r>
+              <a:rPr lang="en-US" altLang="zh-CN" dirty="0"/>
+              <a:t>Rx FIFO0</a:t>
+            </a:r>
+            <a:r>
+              <a:rPr lang="zh-SG" altLang="en-US" dirty="0"/>
+              <a:t>接收元素</a:t>
+            </a:r>
+            <a:r>
+              <a:rPr lang="zh-CN" altLang="en-US" dirty="0"/>
+              <a:t>数量</a:t>
+            </a:r>
+            <a:endParaRPr lang="en-US" altLang="zh-CN" dirty="0"/>
+          </a:p>
+          <a:p>
+            <a:pPr lvl="1"/>
+            <a:r>
+              <a:rPr lang="en-US" altLang="zh-CN" dirty="0"/>
+              <a:t>Rx Fifo0 </a:t>
+            </a:r>
+            <a:r>
+              <a:rPr lang="en-US" altLang="zh-CN" dirty="0" err="1"/>
+              <a:t>Elmt</a:t>
+            </a:r>
+            <a:r>
+              <a:rPr lang="en-US" altLang="zh-CN" dirty="0"/>
+              <a:t> Size</a:t>
+            </a:r>
+            <a:r>
+              <a:rPr lang="zh-CN" altLang="en-US" dirty="0"/>
+              <a:t>：</a:t>
+            </a:r>
+            <a:r>
+              <a:rPr lang="en-US" altLang="zh-CN" dirty="0"/>
+              <a:t>Rx FIFO0</a:t>
+            </a:r>
+            <a:r>
+              <a:rPr lang="zh-SG" altLang="en-US" dirty="0"/>
+              <a:t>每个元素</a:t>
+            </a:r>
+            <a:r>
+              <a:rPr lang="zh-CN" altLang="en-US" dirty="0"/>
+              <a:t>最大长度</a:t>
+            </a:r>
+            <a:endParaRPr lang="en-US" altLang="zh-CN" dirty="0"/>
+          </a:p>
+          <a:p>
+            <a:pPr lvl="1"/>
+            <a:r>
+              <a:rPr lang="en-US" altLang="zh-CN" dirty="0"/>
+              <a:t>Tx Events </a:t>
+            </a:r>
+            <a:r>
+              <a:rPr lang="en-US" altLang="zh-CN" dirty="0" err="1"/>
+              <a:t>Nbr</a:t>
+            </a:r>
+            <a:r>
+              <a:rPr lang="zh-CN" altLang="en-US" dirty="0"/>
+              <a:t>：</a:t>
+            </a:r>
+            <a:r>
+              <a:rPr lang="zh-SG" altLang="en-US" dirty="0"/>
+              <a:t>发送事件</a:t>
+            </a:r>
+            <a:r>
+              <a:rPr lang="en-US" altLang="zh-CN" dirty="0"/>
+              <a:t>FIFO</a:t>
+            </a:r>
+            <a:r>
+              <a:rPr lang="zh-SG" altLang="en-US" dirty="0"/>
+              <a:t>深度</a:t>
+            </a:r>
+            <a:endParaRPr lang="en-US" altLang="zh-SG" dirty="0"/>
+          </a:p>
+          <a:p>
+            <a:pPr lvl="2"/>
+            <a:r>
+              <a:rPr lang="zh-SG" altLang="en-US" dirty="0"/>
+              <a:t>用于记录发送完成事件</a:t>
+            </a:r>
+            <a:endParaRPr lang="en-US" altLang="zh-SG" dirty="0"/>
+          </a:p>
+          <a:p>
+            <a:pPr lvl="1"/>
+            <a:r>
+              <a:rPr lang="en-US" altLang="zh-CN" dirty="0"/>
+              <a:t>Tx </a:t>
+            </a:r>
+            <a:r>
+              <a:rPr lang="en-US" altLang="zh-CN" dirty="0" err="1"/>
+              <a:t>Fifo</a:t>
+            </a:r>
+            <a:r>
+              <a:rPr lang="en-US" altLang="zh-CN" dirty="0"/>
+              <a:t> Queue </a:t>
+            </a:r>
+            <a:r>
+              <a:rPr lang="en-US" altLang="zh-CN" dirty="0" err="1"/>
+              <a:t>Elmts</a:t>
+            </a:r>
+            <a:r>
+              <a:rPr lang="en-US" altLang="zh-CN" dirty="0"/>
+              <a:t> </a:t>
+            </a:r>
+            <a:r>
+              <a:rPr lang="en-US" altLang="zh-CN" dirty="0" err="1"/>
+              <a:t>Nbr</a:t>
+            </a:r>
+            <a:r>
+              <a:rPr lang="zh-CN" altLang="en-US" dirty="0"/>
+              <a:t>：</a:t>
+            </a:r>
+            <a:r>
+              <a:rPr lang="en-US" altLang="zh-CN" dirty="0"/>
+              <a:t>Tx FIFO/Queue</a:t>
+            </a:r>
+            <a:r>
+              <a:rPr lang="zh-SG" altLang="en-US" dirty="0"/>
+              <a:t>元素</a:t>
+            </a:r>
+            <a:r>
+              <a:rPr lang="zh-CN" altLang="en-US" dirty="0"/>
+              <a:t>数</a:t>
+            </a:r>
+            <a:endParaRPr lang="en-US" altLang="zh-CN" dirty="0"/>
+          </a:p>
+          <a:p>
+            <a:pPr lvl="1"/>
+            <a:r>
+              <a:rPr lang="en-US" altLang="zh-CN" dirty="0"/>
+              <a:t>Tx </a:t>
+            </a:r>
+            <a:r>
+              <a:rPr lang="en-US" altLang="zh-CN" dirty="0" err="1"/>
+              <a:t>Fifo</a:t>
+            </a:r>
+            <a:r>
+              <a:rPr lang="en-US" altLang="zh-CN" dirty="0"/>
+              <a:t> Queue Mode</a:t>
+            </a:r>
+            <a:r>
+              <a:rPr lang="zh-CN" altLang="en-US" dirty="0"/>
+              <a:t>：</a:t>
+            </a:r>
+            <a:r>
+              <a:rPr lang="zh-SG" altLang="en-US" dirty="0"/>
+              <a:t>发送</a:t>
+            </a:r>
+            <a:r>
+              <a:rPr lang="zh-CN" altLang="en-US" dirty="0"/>
+              <a:t>模式</a:t>
+            </a:r>
+            <a:endParaRPr lang="en-US" altLang="zh-CN" dirty="0"/>
+          </a:p>
+          <a:p>
+            <a:pPr lvl="2"/>
+            <a:r>
+              <a:rPr lang="zh-SG" altLang="en-US" dirty="0"/>
+              <a:t>按</a:t>
+            </a:r>
+            <a:r>
+              <a:rPr lang="zh-CN" altLang="en-US" dirty="0"/>
+              <a:t>先进先出还是优先级队列</a:t>
+            </a:r>
+            <a:r>
+              <a:rPr lang="zh-SG" altLang="en-US" dirty="0"/>
+              <a:t>处理</a:t>
+            </a:r>
+            <a:endParaRPr lang="en-US" altLang="zh-SG" dirty="0"/>
+          </a:p>
+          <a:p>
+            <a:pPr lvl="1"/>
+            <a:r>
+              <a:rPr lang="en-US" altLang="zh-CN" dirty="0"/>
+              <a:t>Tx </a:t>
+            </a:r>
+            <a:r>
+              <a:rPr lang="en-US" altLang="zh-CN" dirty="0" err="1"/>
+              <a:t>Elmt</a:t>
+            </a:r>
+            <a:r>
+              <a:rPr lang="en-US" altLang="zh-CN" dirty="0"/>
+              <a:t> Size</a:t>
+            </a:r>
+            <a:r>
+              <a:rPr lang="zh-CN" altLang="en-US" dirty="0"/>
+              <a:t>：发送元素最大长度</a:t>
+            </a:r>
+            <a:endParaRPr lang="en-US" altLang="zh-CN" dirty="0"/>
+          </a:p>
+          <a:p>
+            <a:pPr marL="228600" marR="0" lvl="0" indent="-228600" algn="l" defTabSz="914400" rtl="0" eaLnBrk="1" fontAlgn="auto" latinLnBrk="0" hangingPunct="1">
+              <a:lnSpc>
+                <a:spcPct val="90000"/>
+              </a:lnSpc>
+              <a:spcBef>
+                <a:spcPts val="1000"/>
+              </a:spcBef>
+              <a:spcAft>
+                <a:spcPts val="0"/>
+              </a:spcAft>
+              <a:buClrTx/>
+              <a:buSzTx/>
+              <a:buFont typeface="Arial" panose="020B0604020202020204" pitchFamily="34" charset="0"/>
+              <a:buChar char="•"/>
+              <a:tabLst/>
+              <a:defRPr/>
+            </a:pPr>
+            <a:r>
+              <a:rPr kumimoji="0" lang="zh-CN" altLang="en-US" sz="2800" b="0" i="0" u="none" strike="noStrike" kern="1200" cap="none" spc="0" normalizeH="0" baseline="0" noProof="0" dirty="0">
+                <a:ln>
+                  <a:noFill/>
+                </a:ln>
+                <a:solidFill>
+                  <a:prstClr val="black"/>
+                </a:solidFill>
+                <a:effectLst/>
+                <a:uLnTx/>
+                <a:uFillTx/>
+                <a:latin typeface="等线" panose="02110004020202020204"/>
+                <a:ea typeface="等线" panose="02010600030101010101" pitchFamily="2" charset="-122"/>
+                <a:cs typeface="+mn-cs"/>
+              </a:rPr>
+              <a:t>注意：</a:t>
+            </a:r>
+            <a:r>
+              <a:rPr kumimoji="0" lang="en-US" altLang="zh-CN" sz="2800" b="0" i="0" u="none" strike="noStrike" kern="1200" cap="none" spc="0" normalizeH="0" baseline="0" noProof="0" dirty="0" err="1">
+                <a:ln>
+                  <a:noFill/>
+                </a:ln>
+                <a:solidFill>
+                  <a:prstClr val="black"/>
+                </a:solidFill>
+                <a:effectLst/>
+                <a:uLnTx/>
+                <a:uFillTx/>
+                <a:latin typeface="等线" panose="02110004020202020204"/>
+                <a:ea typeface="等线" panose="02010600030101010101" pitchFamily="2" charset="-122"/>
+                <a:cs typeface="+mn-cs"/>
+              </a:rPr>
+              <a:t>CubeMX</a:t>
+            </a:r>
+            <a:r>
+              <a:rPr kumimoji="0" lang="zh-CN" altLang="en-US" sz="2800" b="0" i="0" u="none" strike="noStrike" kern="1200" cap="none" spc="0" normalizeH="0" baseline="0" noProof="0" dirty="0">
+                <a:ln>
+                  <a:noFill/>
+                </a:ln>
+                <a:solidFill>
+                  <a:prstClr val="black"/>
+                </a:solidFill>
+                <a:effectLst/>
+                <a:uLnTx/>
+                <a:uFillTx/>
+                <a:latin typeface="等线" panose="02110004020202020204"/>
+                <a:ea typeface="等线" panose="02010600030101010101" pitchFamily="2" charset="-122"/>
+                <a:cs typeface="+mn-cs"/>
+              </a:rPr>
+              <a:t>不会检查</a:t>
+            </a:r>
+            <a:r>
+              <a:rPr lang="zh-CN" altLang="en-US" dirty="0">
+                <a:solidFill>
+                  <a:prstClr val="black"/>
+                </a:solidFill>
+                <a:latin typeface="等线" panose="02110004020202020204"/>
+                <a:ea typeface="等线" panose="02010600030101010101" pitchFamily="2" charset="-122"/>
+              </a:rPr>
+              <a:t>是否超容量</a:t>
+            </a:r>
+            <a:endParaRPr kumimoji="0" lang="en-US" altLang="zh-CN" sz="2800" b="0" i="0" u="none" strike="noStrike" kern="1200" cap="none" spc="0" normalizeH="0" baseline="0" noProof="0" dirty="0">
+              <a:ln>
+                <a:noFill/>
+              </a:ln>
+              <a:solidFill>
+                <a:prstClr val="black"/>
+              </a:solidFill>
+              <a:effectLst/>
+              <a:uLnTx/>
+              <a:uFillTx/>
+              <a:latin typeface="等线" panose="02110004020202020204"/>
+              <a:ea typeface="等线" panose="02010600030101010101" pitchFamily="2" charset="-122"/>
+              <a:cs typeface="+mn-cs"/>
+            </a:endParaRPr>
+          </a:p>
+        </p:txBody>
+      </p:sp>
+      <p:pic>
+        <p:nvPicPr>
+          <p:cNvPr id="10" name="图片 9">
+            <a:extLst>
+              <a:ext uri="{FF2B5EF4-FFF2-40B4-BE49-F238E27FC236}">
+                <a16:creationId xmlns:a16="http://schemas.microsoft.com/office/drawing/2014/main" id="{9E6B87C8-8021-C431-EA16-478A98BE984D}"/>
+              </a:ext>
+            </a:extLst>
+          </p:cNvPr>
+          <p:cNvPicPr>
+            <a:picLocks noChangeAspect="1"/>
+          </p:cNvPicPr>
+          <p:nvPr/>
+        </p:nvPicPr>
+        <p:blipFill>
+          <a:blip r:embed="rId2">
+            <a:extLst>
+              <a:ext uri="{28A0092B-C50C-407E-A947-70E740481C1C}">
+                <a14:useLocalDpi xmlns:a14="http://schemas.microsoft.com/office/drawing/2010/main" val="0"/>
+              </a:ext>
+            </a:extLst>
+          </a:blip>
+          <a:stretch>
+            <a:fillRect/>
+          </a:stretch>
+        </p:blipFill>
+        <p:spPr>
+          <a:xfrm>
+            <a:off x="7169729" y="3429001"/>
+            <a:ext cx="5022271" cy="3428999"/>
+          </a:xfrm>
+          <a:prstGeom prst="rect">
+            <a:avLst/>
+          </a:prstGeom>
+        </p:spPr>
+      </p:pic>
+    </p:spTree>
+    <p:extLst>
+      <p:ext uri="{BB962C8B-B14F-4D97-AF65-F5344CB8AC3E}">
+        <p14:creationId xmlns:p14="http://schemas.microsoft.com/office/powerpoint/2010/main" val="2568784094"/>
+      </p:ext>
+    </p:extLst>
+  </p:cSld>
+  <p:clrMapOvr>
+    <a:masterClrMapping/>
+  </p:clrMapOvr>
+</p:sld>
+</file>
+
+<file path=ppt/slides/slide36.xml><?xml version="1.0" encoding="utf-8"?>
+<p:sld xmlns:a="http://schemas.openxmlformats.org/drawingml/2006/main" xmlns:r="http://schemas.openxmlformats.org/officeDocument/2006/relationships" xmlns:p="http://schemas.openxmlformats.org/presentationml/2006/main">
+  <p:cSld>
+    <p:spTree>
+      <p:nvGrpSpPr>
+        <p:cNvPr id="1" name=""/>
+        <p:cNvGrpSpPr/>
+        <p:nvPr/>
+      </p:nvGrpSpPr>
+      <p:grpSpPr>
+        <a:xfrm>
+          <a:off x="0" y="0"/>
+          <a:ext cx="0" cy="0"/>
+          <a:chOff x="0" y="0"/>
+          <a:chExt cx="0" cy="0"/>
+        </a:xfrm>
+      </p:grpSpPr>
+      <p:sp>
+        <p:nvSpPr>
+          <p:cNvPr id="2" name="标题 1">
+            <a:extLst>
+              <a:ext uri="{FF2B5EF4-FFF2-40B4-BE49-F238E27FC236}">
+                <a16:creationId xmlns:a16="http://schemas.microsoft.com/office/drawing/2014/main" id="{D8DF22C5-984B-CAFD-EAE0-59473AF533AB}"/>
+              </a:ext>
+            </a:extLst>
+          </p:cNvPr>
+          <p:cNvSpPr>
+            <a:spLocks noGrp="1"/>
+          </p:cNvSpPr>
+          <p:nvPr>
+            <p:ph type="title"/>
+          </p:nvPr>
+        </p:nvSpPr>
+        <p:spPr/>
+        <p:txBody>
+          <a:bodyPr/>
+          <a:lstStyle/>
+          <a:p>
+            <a:r>
+              <a:rPr lang="zh-CN" altLang="en-US" dirty="0"/>
+              <a:t>基本参数</a:t>
+            </a:r>
+            <a:endParaRPr lang="zh-SG" altLang="en-US" dirty="0"/>
+          </a:p>
+        </p:txBody>
+      </p:sp>
+      <p:sp>
+        <p:nvSpPr>
+          <p:cNvPr id="3" name="内容占位符 2">
+            <a:extLst>
+              <a:ext uri="{FF2B5EF4-FFF2-40B4-BE49-F238E27FC236}">
+                <a16:creationId xmlns:a16="http://schemas.microsoft.com/office/drawing/2014/main" id="{E1EA267A-27A8-6F0B-4C63-965FA5C7A266}"/>
+              </a:ext>
+            </a:extLst>
+          </p:cNvPr>
+          <p:cNvSpPr>
+            <a:spLocks noGrp="1"/>
+          </p:cNvSpPr>
+          <p:nvPr>
+            <p:ph idx="1"/>
+          </p:nvPr>
+        </p:nvSpPr>
+        <p:spPr/>
+        <p:txBody>
+          <a:bodyPr/>
+          <a:lstStyle/>
+          <a:p>
+            <a:r>
+              <a:rPr lang="en-US" altLang="zh-CN" dirty="0"/>
+              <a:t>Message Ram Offset</a:t>
+            </a:r>
+            <a:r>
+              <a:rPr lang="zh-CN" altLang="en-US" dirty="0"/>
+              <a:t>：</a:t>
+            </a:r>
+            <a:endParaRPr lang="en-US" altLang="zh-CN" dirty="0"/>
+          </a:p>
+          <a:p>
+            <a:pPr lvl="1"/>
+            <a:r>
+              <a:rPr lang="en-US" altLang="zh-CN" dirty="0"/>
+              <a:t>STM32 FDCAN </a:t>
+            </a:r>
+            <a:r>
+              <a:rPr lang="zh-SG" altLang="en-US" dirty="0"/>
+              <a:t>使用一块专门的 </a:t>
+            </a:r>
+            <a:r>
+              <a:rPr lang="en-US" altLang="zh-CN" dirty="0"/>
+              <a:t>Message RAM </a:t>
+            </a:r>
+            <a:r>
+              <a:rPr lang="zh-SG" altLang="en-US" dirty="0"/>
+              <a:t>存放过滤器、接收 </a:t>
+            </a:r>
+            <a:r>
+              <a:rPr lang="en-US" altLang="zh-CN" dirty="0"/>
+              <a:t>FIFO</a:t>
+            </a:r>
+            <a:r>
+              <a:rPr lang="zh-CN" altLang="en-US" dirty="0"/>
+              <a:t>、</a:t>
+            </a:r>
+            <a:r>
+              <a:rPr lang="zh-SG" altLang="en-US" dirty="0"/>
+              <a:t>发送 </a:t>
+            </a:r>
+            <a:r>
+              <a:rPr lang="en-US" altLang="zh-CN" dirty="0"/>
+              <a:t>FIFO </a:t>
+            </a:r>
+            <a:r>
+              <a:rPr lang="zh-SG" altLang="en-US" dirty="0"/>
+              <a:t>等结构</a:t>
+            </a:r>
+            <a:endParaRPr lang="en-US" altLang="zh-CN" dirty="0"/>
+          </a:p>
+          <a:p>
+            <a:r>
+              <a:rPr lang="en-GB" altLang="zh-SG" dirty="0"/>
+              <a:t>Nominal Bit Timing</a:t>
+            </a:r>
+            <a:r>
+              <a:rPr lang="zh-CN" altLang="en-US" dirty="0"/>
+              <a:t>：仲裁位时序</a:t>
+            </a:r>
+            <a:endParaRPr lang="en-US" altLang="zh-CN" dirty="0"/>
+          </a:p>
+          <a:p>
+            <a:pPr lvl="1"/>
+            <a:r>
+              <a:rPr lang="zh-CN" altLang="en-US" dirty="0"/>
+              <a:t>经典</a:t>
+            </a:r>
+            <a:r>
+              <a:rPr lang="en-US" altLang="zh-CN" dirty="0"/>
+              <a:t>CAN</a:t>
+            </a:r>
+            <a:r>
+              <a:rPr lang="zh-CN" altLang="en-US" dirty="0"/>
+              <a:t>或非可变波特率的</a:t>
+            </a:r>
+            <a:r>
+              <a:rPr lang="en-US" altLang="zh-CN" dirty="0"/>
+              <a:t>FDCAN</a:t>
+            </a:r>
+            <a:r>
+              <a:rPr lang="zh-CN" altLang="en-US" dirty="0"/>
+              <a:t>只使用该配置</a:t>
+            </a:r>
+            <a:endParaRPr lang="en-GB" altLang="zh-SG" dirty="0"/>
+          </a:p>
+          <a:p>
+            <a:r>
+              <a:rPr lang="en-GB" altLang="zh-SG" dirty="0"/>
+              <a:t>Data Bit Timing</a:t>
+            </a:r>
+            <a:r>
+              <a:rPr lang="zh-CN" altLang="en-US" dirty="0"/>
+              <a:t>：数据位时序</a:t>
+            </a:r>
+            <a:endParaRPr lang="en-US" altLang="zh-CN" dirty="0"/>
+          </a:p>
+          <a:p>
+            <a:pPr lvl="1"/>
+            <a:r>
+              <a:rPr lang="zh-CN" altLang="en-US" dirty="0"/>
+              <a:t>带</a:t>
+            </a:r>
+            <a:r>
+              <a:rPr lang="en-US" altLang="zh-CN" dirty="0"/>
+              <a:t>BRS</a:t>
+            </a:r>
+            <a:r>
+              <a:rPr lang="zh-CN" altLang="en-US" dirty="0"/>
+              <a:t>（</a:t>
+            </a:r>
+            <a:r>
+              <a:rPr lang="en-US" altLang="zh-CN" dirty="0" err="1"/>
+              <a:t>BitRate</a:t>
+            </a:r>
+            <a:r>
+              <a:rPr lang="en-US" altLang="zh-CN" dirty="0"/>
+              <a:t> Switching</a:t>
+            </a:r>
+            <a:r>
+              <a:rPr lang="zh-CN" altLang="en-US" dirty="0"/>
+              <a:t>，比特率切换）的</a:t>
+            </a:r>
+            <a:r>
+              <a:rPr lang="en-US" altLang="zh-CN" dirty="0"/>
+              <a:t>FDCAN</a:t>
+            </a:r>
+            <a:r>
+              <a:rPr lang="zh-CN" altLang="en-US" dirty="0"/>
+              <a:t>在数据域使用该配置</a:t>
+            </a:r>
+            <a:endParaRPr lang="zh-SG" altLang="en-US" dirty="0"/>
+          </a:p>
+          <a:p>
+            <a:r>
+              <a:rPr lang="en-US" altLang="zh-CN" dirty="0"/>
+              <a:t>Clock Calibration Unit</a:t>
+            </a:r>
+            <a:r>
+              <a:rPr lang="zh-CN" altLang="en-US" dirty="0"/>
+              <a:t>：时钟校准单元</a:t>
+            </a:r>
+            <a:endParaRPr lang="en-US" altLang="zh-CN" dirty="0"/>
+          </a:p>
+          <a:p>
+            <a:pPr lvl="1"/>
+            <a:r>
+              <a:rPr lang="zh-CN" altLang="en-US" dirty="0"/>
+              <a:t>有晶振，无需在意</a:t>
+            </a:r>
+            <a:endParaRPr lang="zh-SG" altLang="en-US" dirty="0"/>
+          </a:p>
+        </p:txBody>
+      </p:sp>
+    </p:spTree>
+    <p:extLst>
+      <p:ext uri="{BB962C8B-B14F-4D97-AF65-F5344CB8AC3E}">
+        <p14:creationId xmlns:p14="http://schemas.microsoft.com/office/powerpoint/2010/main" val="939618687"/>
+      </p:ext>
+    </p:extLst>
+  </p:cSld>
+  <p:clrMapOvr>
+    <a:masterClrMapping/>
+  </p:clrMapOvr>
+</p:sld>
+</file>
+
+<file path=ppt/slides/slide37.xml><?xml version="1.0" encoding="utf-8"?>
+<p:sld xmlns:a="http://schemas.openxmlformats.org/drawingml/2006/main" xmlns:r="http://schemas.openxmlformats.org/officeDocument/2006/relationships" xmlns:p="http://schemas.openxmlformats.org/presentationml/2006/main">
+  <p:cSld>
+    <p:spTree>
+      <p:nvGrpSpPr>
+        <p:cNvPr id="1" name=""/>
+        <p:cNvGrpSpPr/>
+        <p:nvPr/>
+      </p:nvGrpSpPr>
+      <p:grpSpPr>
+        <a:xfrm>
+          <a:off x="0" y="0"/>
+          <a:ext cx="0" cy="0"/>
+          <a:chOff x="0" y="0"/>
+          <a:chExt cx="0" cy="0"/>
+        </a:xfrm>
+      </p:grpSpPr>
+      <p:sp>
+        <p:nvSpPr>
+          <p:cNvPr id="2" name="标题 1">
+            <a:extLst>
+              <a:ext uri="{FF2B5EF4-FFF2-40B4-BE49-F238E27FC236}">
+                <a16:creationId xmlns:a16="http://schemas.microsoft.com/office/drawing/2014/main" id="{B510E91C-9D92-26F3-8AEB-659DCCD14ED3}"/>
+              </a:ext>
+            </a:extLst>
+          </p:cNvPr>
+          <p:cNvSpPr>
+            <a:spLocks noGrp="1"/>
+          </p:cNvSpPr>
+          <p:nvPr>
+            <p:ph type="title"/>
+          </p:nvPr>
+        </p:nvSpPr>
+        <p:spPr/>
+        <p:txBody>
+          <a:bodyPr/>
+          <a:lstStyle/>
+          <a:p>
+            <a:r>
+              <a:rPr lang="zh-CN" altLang="en-US" dirty="0"/>
+              <a:t>物理层要求</a:t>
+            </a:r>
+            <a:endParaRPr lang="zh-SG" altLang="en-US" dirty="0"/>
+          </a:p>
+        </p:txBody>
+      </p:sp>
+      <p:sp>
+        <p:nvSpPr>
+          <p:cNvPr id="3" name="内容占位符 2">
+            <a:extLst>
+              <a:ext uri="{FF2B5EF4-FFF2-40B4-BE49-F238E27FC236}">
+                <a16:creationId xmlns:a16="http://schemas.microsoft.com/office/drawing/2014/main" id="{15A9B46B-2B1F-75D5-FA2B-181B1CD8EA13}"/>
+              </a:ext>
+            </a:extLst>
+          </p:cNvPr>
+          <p:cNvSpPr>
+            <a:spLocks noGrp="1"/>
+          </p:cNvSpPr>
+          <p:nvPr>
+            <p:ph idx="1"/>
+          </p:nvPr>
+        </p:nvSpPr>
+        <p:spPr/>
+        <p:txBody>
+          <a:bodyPr/>
+          <a:lstStyle/>
+          <a:p>
+            <a:r>
+              <a:rPr lang="zh-CN" altLang="en-US" dirty="0"/>
+              <a:t>见课件</a:t>
+            </a:r>
+            <a:r>
+              <a:rPr lang="en-US" altLang="zh-CN" dirty="0"/>
+              <a:t>1_</a:t>
+            </a:r>
+            <a:r>
+              <a:rPr lang="zh-CN" altLang="en-US" dirty="0"/>
+              <a:t>布线</a:t>
+            </a:r>
+            <a:endParaRPr lang="zh-SG" altLang="en-US" dirty="0"/>
+          </a:p>
+        </p:txBody>
+      </p:sp>
+    </p:spTree>
+    <p:extLst>
+      <p:ext uri="{BB962C8B-B14F-4D97-AF65-F5344CB8AC3E}">
+        <p14:creationId xmlns:p14="http://schemas.microsoft.com/office/powerpoint/2010/main" val="1903284897"/>
+      </p:ext>
+    </p:extLst>
+  </p:cSld>
+  <p:clrMapOvr>
+    <a:masterClrMapping/>
+  </p:clrMapOvr>
+</p:sld>
+</file>
+
+<file path=ppt/slides/slide38.xml><?xml version="1.0" encoding="utf-8"?>
+<p:sld xmlns:a="http://schemas.openxmlformats.org/drawingml/2006/main" xmlns:r="http://schemas.openxmlformats.org/officeDocument/2006/relationships" xmlns:p="http://schemas.openxmlformats.org/presentationml/2006/main">
+  <p:cSld>
+    <p:spTree>
+      <p:nvGrpSpPr>
+        <p:cNvPr id="1" name=""/>
+        <p:cNvGrpSpPr/>
+        <p:nvPr/>
+      </p:nvGrpSpPr>
+      <p:grpSpPr>
+        <a:xfrm>
+          <a:off x="0" y="0"/>
+          <a:ext cx="0" cy="0"/>
+          <a:chOff x="0" y="0"/>
+          <a:chExt cx="0" cy="0"/>
+        </a:xfrm>
+      </p:grpSpPr>
+      <p:sp>
+        <p:nvSpPr>
+          <p:cNvPr id="2" name="标题 1">
+            <a:extLst>
+              <a:ext uri="{FF2B5EF4-FFF2-40B4-BE49-F238E27FC236}">
+                <a16:creationId xmlns:a16="http://schemas.microsoft.com/office/drawing/2014/main" id="{CE8E9E4A-1FBA-77B5-FA0F-FB390252849F}"/>
+              </a:ext>
+            </a:extLst>
+          </p:cNvPr>
+          <p:cNvSpPr>
+            <a:spLocks noGrp="1"/>
+          </p:cNvSpPr>
+          <p:nvPr>
+            <p:ph type="title"/>
+          </p:nvPr>
+        </p:nvSpPr>
+        <p:spPr/>
+        <p:txBody>
+          <a:bodyPr/>
+          <a:lstStyle/>
+          <a:p>
+            <a:r>
+              <a:rPr lang="zh-CN" altLang="en-US" dirty="0"/>
+              <a:t>总线负载的计算</a:t>
+            </a:r>
+            <a:endParaRPr lang="zh-SG" altLang="en-US" dirty="0"/>
+          </a:p>
+        </p:txBody>
+      </p:sp>
+      <p:sp>
+        <p:nvSpPr>
+          <p:cNvPr id="3" name="内容占位符 2">
+            <a:extLst>
+              <a:ext uri="{FF2B5EF4-FFF2-40B4-BE49-F238E27FC236}">
+                <a16:creationId xmlns:a16="http://schemas.microsoft.com/office/drawing/2014/main" id="{9AE00339-EC94-0ED0-230E-8BFBA9978D26}"/>
+              </a:ext>
+            </a:extLst>
+          </p:cNvPr>
+          <p:cNvSpPr>
+            <a:spLocks noGrp="1"/>
+          </p:cNvSpPr>
+          <p:nvPr>
+            <p:ph idx="1"/>
+          </p:nvPr>
+        </p:nvSpPr>
+        <p:spPr/>
+        <p:txBody>
+          <a:bodyPr/>
+          <a:lstStyle/>
+          <a:p>
+            <a:endParaRPr lang="zh-SG" altLang="en-US"/>
+          </a:p>
+        </p:txBody>
+      </p:sp>
+    </p:spTree>
+    <p:extLst>
+      <p:ext uri="{BB962C8B-B14F-4D97-AF65-F5344CB8AC3E}">
+        <p14:creationId xmlns:p14="http://schemas.microsoft.com/office/powerpoint/2010/main" val="1017767223"/>
+      </p:ext>
+    </p:extLst>
+  </p:cSld>
+  <p:clrMapOvr>
+    <a:masterClrMapping/>
+  </p:clrMapOvr>
+</p:sld>
+</file>
+
+<file path=ppt/slides/slide39.xml><?xml version="1.0" encoding="utf-8"?>
+<p:sld xmlns:a="http://schemas.openxmlformats.org/drawingml/2006/main" xmlns:r="http://schemas.openxmlformats.org/officeDocument/2006/relationships" xmlns:p="http://schemas.openxmlformats.org/presentationml/2006/main">
+  <p:cSld>
+    <p:spTree>
+      <p:nvGrpSpPr>
+        <p:cNvPr id="1" name=""/>
+        <p:cNvGrpSpPr/>
+        <p:nvPr/>
+      </p:nvGrpSpPr>
+      <p:grpSpPr>
+        <a:xfrm>
+          <a:off x="0" y="0"/>
+          <a:ext cx="0" cy="0"/>
+          <a:chOff x="0" y="0"/>
+          <a:chExt cx="0" cy="0"/>
+        </a:xfrm>
+      </p:grpSpPr>
+      <p:sp>
+        <p:nvSpPr>
+          <p:cNvPr id="2" name="标题 1">
+            <a:extLst>
+              <a:ext uri="{FF2B5EF4-FFF2-40B4-BE49-F238E27FC236}">
+                <a16:creationId xmlns:a16="http://schemas.microsoft.com/office/drawing/2014/main" id="{309F9F92-F0DC-A537-7A50-A94B9CB24F7F}"/>
+              </a:ext>
+            </a:extLst>
+          </p:cNvPr>
+          <p:cNvSpPr>
+            <a:spLocks noGrp="1"/>
+          </p:cNvSpPr>
+          <p:nvPr>
+            <p:ph type="title"/>
+          </p:nvPr>
+        </p:nvSpPr>
+        <p:spPr/>
+        <p:txBody>
+          <a:bodyPr/>
+          <a:lstStyle/>
+          <a:p>
+            <a:r>
+              <a:rPr lang="en-US" altLang="zh-CN" dirty="0"/>
+              <a:t>ID</a:t>
+            </a:r>
+            <a:r>
+              <a:rPr lang="zh-CN" altLang="en-US" dirty="0"/>
+              <a:t>与仲裁</a:t>
+            </a:r>
+            <a:endParaRPr lang="zh-SG" altLang="en-US" dirty="0"/>
+          </a:p>
+        </p:txBody>
+      </p:sp>
+      <p:sp>
+        <p:nvSpPr>
+          <p:cNvPr id="3" name="内容占位符 2">
+            <a:extLst>
+              <a:ext uri="{FF2B5EF4-FFF2-40B4-BE49-F238E27FC236}">
+                <a16:creationId xmlns:a16="http://schemas.microsoft.com/office/drawing/2014/main" id="{7B18DCA7-9580-4E0B-D29F-4FC582D0A694}"/>
+              </a:ext>
+            </a:extLst>
+          </p:cNvPr>
+          <p:cNvSpPr>
+            <a:spLocks noGrp="1"/>
+          </p:cNvSpPr>
+          <p:nvPr>
+            <p:ph idx="1"/>
+          </p:nvPr>
+        </p:nvSpPr>
+        <p:spPr/>
+        <p:txBody>
+          <a:bodyPr/>
+          <a:lstStyle/>
+          <a:p>
+            <a:r>
+              <a:rPr lang="en-US" altLang="zh-CN" dirty="0"/>
+              <a:t>ID</a:t>
+            </a:r>
+            <a:r>
+              <a:rPr lang="zh-CN" altLang="en-US" dirty="0"/>
+              <a:t>越小越优先</a:t>
+            </a:r>
+            <a:endParaRPr lang="en-US" altLang="zh-CN" dirty="0"/>
+          </a:p>
+          <a:p>
+            <a:r>
+              <a:rPr lang="zh-CN" altLang="en-US" dirty="0"/>
+              <a:t>合理设置</a:t>
+            </a:r>
+            <a:r>
+              <a:rPr lang="en-US" altLang="zh-CN" dirty="0"/>
+              <a:t>ID</a:t>
+            </a:r>
+            <a:r>
+              <a:rPr lang="zh-CN" altLang="en-US" dirty="0"/>
+              <a:t>以提高实时性与稳定性</a:t>
+            </a:r>
+            <a:endParaRPr lang="zh-SG" altLang="en-US" dirty="0"/>
+          </a:p>
+        </p:txBody>
+      </p:sp>
+      <p:pic>
+        <p:nvPicPr>
+          <p:cNvPr id="7" name="图片 6">
+            <a:extLst>
+              <a:ext uri="{FF2B5EF4-FFF2-40B4-BE49-F238E27FC236}">
+                <a16:creationId xmlns:a16="http://schemas.microsoft.com/office/drawing/2014/main" id="{F7D5D0B0-3FB3-3E62-4772-21286CC3ABB1}"/>
+              </a:ext>
+            </a:extLst>
+          </p:cNvPr>
+          <p:cNvPicPr>
+            <a:picLocks noChangeAspect="1"/>
+          </p:cNvPicPr>
+          <p:nvPr/>
+        </p:nvPicPr>
+        <p:blipFill>
+          <a:blip r:embed="rId2"/>
+          <a:stretch>
+            <a:fillRect/>
+          </a:stretch>
+        </p:blipFill>
+        <p:spPr>
+          <a:xfrm>
+            <a:off x="6096000" y="2780294"/>
+            <a:ext cx="6096000" cy="3145318"/>
+          </a:xfrm>
+          <a:prstGeom prst="rect">
+            <a:avLst/>
+          </a:prstGeom>
+        </p:spPr>
+      </p:pic>
+    </p:spTree>
+    <p:extLst>
+      <p:ext uri="{BB962C8B-B14F-4D97-AF65-F5344CB8AC3E}">
+        <p14:creationId xmlns:p14="http://schemas.microsoft.com/office/powerpoint/2010/main" val="919574203"/>
       </p:ext>
     </p:extLst>
   </p:cSld>
@@ -6351,6 +9703,290 @@
     <p:extLst>
       <p:ext uri="{BB962C8B-B14F-4D97-AF65-F5344CB8AC3E}">
         <p14:creationId xmlns:p14="http://schemas.microsoft.com/office/powerpoint/2010/main" val="549164725"/>
+      </p:ext>
+    </p:extLst>
+  </p:cSld>
+  <p:clrMapOvr>
+    <a:masterClrMapping/>
+  </p:clrMapOvr>
+</p:sld>
+</file>
+
+<file path=ppt/slides/slide40.xml><?xml version="1.0" encoding="utf-8"?>
+<p:sld xmlns:a="http://schemas.openxmlformats.org/drawingml/2006/main" xmlns:r="http://schemas.openxmlformats.org/officeDocument/2006/relationships" xmlns:p="http://schemas.openxmlformats.org/presentationml/2006/main">
+  <p:cSld>
+    <p:spTree>
+      <p:nvGrpSpPr>
+        <p:cNvPr id="1" name=""/>
+        <p:cNvGrpSpPr/>
+        <p:nvPr/>
+      </p:nvGrpSpPr>
+      <p:grpSpPr>
+        <a:xfrm>
+          <a:off x="0" y="0"/>
+          <a:ext cx="0" cy="0"/>
+          <a:chOff x="0" y="0"/>
+          <a:chExt cx="0" cy="0"/>
+        </a:xfrm>
+      </p:grpSpPr>
+      <p:sp>
+        <p:nvSpPr>
+          <p:cNvPr id="2" name="标题 1">
+            <a:extLst>
+              <a:ext uri="{FF2B5EF4-FFF2-40B4-BE49-F238E27FC236}">
+                <a16:creationId xmlns:a16="http://schemas.microsoft.com/office/drawing/2014/main" id="{E055472D-184F-FE1F-08EF-D4F31AB08319}"/>
+              </a:ext>
+            </a:extLst>
+          </p:cNvPr>
+          <p:cNvSpPr>
+            <a:spLocks noGrp="1"/>
+          </p:cNvSpPr>
+          <p:nvPr>
+            <p:ph type="title"/>
+          </p:nvPr>
+        </p:nvSpPr>
+        <p:spPr/>
+        <p:txBody>
+          <a:bodyPr/>
+          <a:lstStyle/>
+          <a:p>
+            <a:r>
+              <a:rPr lang="en-US" altLang="zh-CN" dirty="0"/>
+              <a:t>TDC</a:t>
+            </a:r>
+            <a:r>
+              <a:rPr lang="zh-CN" altLang="en-US" dirty="0"/>
+              <a:t>：传输延迟补偿</a:t>
+            </a:r>
+            <a:endParaRPr lang="zh-SG" altLang="en-US" dirty="0"/>
+          </a:p>
+        </p:txBody>
+      </p:sp>
+      <p:sp>
+        <p:nvSpPr>
+          <p:cNvPr id="3" name="内容占位符 2">
+            <a:extLst>
+              <a:ext uri="{FF2B5EF4-FFF2-40B4-BE49-F238E27FC236}">
+                <a16:creationId xmlns:a16="http://schemas.microsoft.com/office/drawing/2014/main" id="{871E948F-2BCC-28DE-6328-0A4DE6AEF2F2}"/>
+              </a:ext>
+            </a:extLst>
+          </p:cNvPr>
+          <p:cNvSpPr>
+            <a:spLocks noGrp="1"/>
+          </p:cNvSpPr>
+          <p:nvPr>
+            <p:ph idx="1"/>
+          </p:nvPr>
+        </p:nvSpPr>
+        <p:spPr/>
+        <p:txBody>
+          <a:bodyPr/>
+          <a:lstStyle/>
+          <a:p>
+            <a:endParaRPr lang="zh-SG" altLang="en-US"/>
+          </a:p>
+        </p:txBody>
+      </p:sp>
+    </p:spTree>
+    <p:extLst>
+      <p:ext uri="{BB962C8B-B14F-4D97-AF65-F5344CB8AC3E}">
+        <p14:creationId xmlns:p14="http://schemas.microsoft.com/office/powerpoint/2010/main" val="3110391825"/>
+      </p:ext>
+    </p:extLst>
+  </p:cSld>
+  <p:clrMapOvr>
+    <a:masterClrMapping/>
+  </p:clrMapOvr>
+</p:sld>
+</file>
+
+<file path=ppt/slides/slide41.xml><?xml version="1.0" encoding="utf-8"?>
+<p:sld xmlns:a="http://schemas.openxmlformats.org/drawingml/2006/main" xmlns:r="http://schemas.openxmlformats.org/officeDocument/2006/relationships" xmlns:p="http://schemas.openxmlformats.org/presentationml/2006/main">
+  <p:cSld>
+    <p:spTree>
+      <p:nvGrpSpPr>
+        <p:cNvPr id="1" name=""/>
+        <p:cNvGrpSpPr/>
+        <p:nvPr/>
+      </p:nvGrpSpPr>
+      <p:grpSpPr>
+        <a:xfrm>
+          <a:off x="0" y="0"/>
+          <a:ext cx="0" cy="0"/>
+          <a:chOff x="0" y="0"/>
+          <a:chExt cx="0" cy="0"/>
+        </a:xfrm>
+      </p:grpSpPr>
+      <p:sp>
+        <p:nvSpPr>
+          <p:cNvPr id="2" name="标题 1">
+            <a:extLst>
+              <a:ext uri="{FF2B5EF4-FFF2-40B4-BE49-F238E27FC236}">
+                <a16:creationId xmlns:a16="http://schemas.microsoft.com/office/drawing/2014/main" id="{059D3551-A2ED-3AAE-1557-3A8B6E9CC456}"/>
+              </a:ext>
+            </a:extLst>
+          </p:cNvPr>
+          <p:cNvSpPr>
+            <a:spLocks noGrp="1"/>
+          </p:cNvSpPr>
+          <p:nvPr>
+            <p:ph type="title"/>
+          </p:nvPr>
+        </p:nvSpPr>
+        <p:spPr/>
+        <p:txBody>
+          <a:bodyPr/>
+          <a:lstStyle/>
+          <a:p>
+            <a:r>
+              <a:rPr lang="zh-CN" altLang="en-US" dirty="0"/>
+              <a:t>参考学习资源</a:t>
+            </a:r>
+            <a:endParaRPr lang="zh-SG" altLang="en-US" dirty="0"/>
+          </a:p>
+        </p:txBody>
+      </p:sp>
+      <p:sp>
+        <p:nvSpPr>
+          <p:cNvPr id="3" name="内容占位符 2">
+            <a:extLst>
+              <a:ext uri="{FF2B5EF4-FFF2-40B4-BE49-F238E27FC236}">
+                <a16:creationId xmlns:a16="http://schemas.microsoft.com/office/drawing/2014/main" id="{B8A3FB9A-56CA-B15E-F2DA-4585DD7F4A29}"/>
+              </a:ext>
+            </a:extLst>
+          </p:cNvPr>
+          <p:cNvSpPr>
+            <a:spLocks noGrp="1"/>
+          </p:cNvSpPr>
+          <p:nvPr>
+            <p:ph idx="1"/>
+          </p:nvPr>
+        </p:nvSpPr>
+        <p:spPr/>
+        <p:txBody>
+          <a:bodyPr/>
+          <a:lstStyle/>
+          <a:p>
+            <a:r>
+              <a:rPr lang="en-US" altLang="zh-CN" dirty="0"/>
+              <a:t>【</a:t>
+            </a:r>
+            <a:r>
+              <a:rPr lang="zh-SG" altLang="en-US" dirty="0"/>
+              <a:t>小白也能看懂的</a:t>
+            </a:r>
+            <a:r>
+              <a:rPr lang="en-US" altLang="zh-CN" dirty="0"/>
+              <a:t>CAN</a:t>
+            </a:r>
+            <a:r>
+              <a:rPr lang="zh-SG" altLang="en-US" dirty="0"/>
+              <a:t>通信</a:t>
+            </a:r>
+            <a:r>
+              <a:rPr lang="en-US" altLang="zh-SG" dirty="0"/>
+              <a:t>+</a:t>
+            </a:r>
+            <a:r>
+              <a:rPr lang="en-US" altLang="zh-CN" dirty="0"/>
+              <a:t>STM32CubeMX</a:t>
+            </a:r>
+            <a:r>
+              <a:rPr lang="zh-SG" altLang="en-US" dirty="0"/>
+              <a:t>编程</a:t>
+            </a:r>
+            <a:r>
+              <a:rPr lang="en-US" altLang="zh-CN" dirty="0"/>
+              <a:t>】</a:t>
+            </a:r>
+          </a:p>
+          <a:p>
+            <a:pPr lvl="1"/>
+            <a:r>
+              <a:rPr lang="zh-CN" altLang="en-US" dirty="0"/>
+              <a:t>看不懂也没关系，了解波特率、采样点、</a:t>
+            </a:r>
+            <a:r>
+              <a:rPr lang="en-US" altLang="zh-CN" dirty="0"/>
+              <a:t>ID</a:t>
+            </a:r>
+            <a:r>
+              <a:rPr lang="zh-CN" altLang="en-US" dirty="0"/>
+              <a:t>和仲裁即可</a:t>
+            </a:r>
+            <a:endParaRPr lang="en-US" altLang="zh-CN" dirty="0"/>
+          </a:p>
+          <a:p>
+            <a:pPr marL="0" indent="0">
+              <a:buNone/>
+            </a:pPr>
+            <a:r>
+              <a:rPr lang="en-US" altLang="zh-CN" dirty="0"/>
+              <a:t>https://www.bilibili.com/video/BV1HY411D7Ar</a:t>
+            </a:r>
+          </a:p>
+          <a:p>
+            <a:r>
+              <a:rPr lang="en-US" altLang="zh-CN" dirty="0"/>
+              <a:t>【</a:t>
+            </a:r>
+            <a:r>
+              <a:rPr lang="zh-SG" altLang="en-US" dirty="0"/>
+              <a:t>实战</a:t>
+            </a:r>
+            <a:r>
+              <a:rPr lang="en-US" altLang="zh-CN" dirty="0"/>
+              <a:t>CAN FD -</a:t>
+            </a:r>
+            <a:r>
+              <a:rPr lang="zh-SG" altLang="en-US" dirty="0"/>
+              <a:t>基于</a:t>
+            </a:r>
+            <a:r>
+              <a:rPr lang="en-US" altLang="zh-CN" dirty="0"/>
+              <a:t>STM32H7】</a:t>
+            </a:r>
+          </a:p>
+          <a:p>
+            <a:pPr marL="0" indent="0">
+              <a:buNone/>
+            </a:pPr>
+            <a:r>
+              <a:rPr lang="en-US" altLang="zh-CN" dirty="0"/>
+              <a:t>https://shequ.stmicroelectronics.cn/thread-635014-1-1.html</a:t>
+            </a:r>
+          </a:p>
+          <a:p>
+            <a:r>
+              <a:rPr lang="en-US" altLang="zh-CN" dirty="0"/>
+              <a:t>【CAN</a:t>
+            </a:r>
+            <a:r>
+              <a:rPr lang="zh-CN" altLang="en-US" dirty="0"/>
+              <a:t>总线负载计算器</a:t>
+            </a:r>
+            <a:r>
+              <a:rPr lang="en-US" altLang="zh-CN" dirty="0"/>
+              <a:t>】</a:t>
+            </a:r>
+            <a:endParaRPr lang="en-US" altLang="zh-SG" dirty="0"/>
+          </a:p>
+          <a:p>
+            <a:pPr marL="0" indent="0">
+              <a:buNone/>
+            </a:pPr>
+            <a:r>
+              <a:rPr lang="en-GB" altLang="zh-SG" dirty="0"/>
+              <a:t>https://github.com/lc6464/CANbus-Load-Calculator</a:t>
+            </a:r>
+            <a:endParaRPr lang="zh-SG" altLang="en-US" dirty="0"/>
+          </a:p>
+        </p:txBody>
+      </p:sp>
+    </p:spTree>
+    <p:extLst>
+      <p:ext uri="{BB962C8B-B14F-4D97-AF65-F5344CB8AC3E}">
+        <p14:creationId xmlns:p14="http://schemas.microsoft.com/office/powerpoint/2010/main" val="1533031375"/>
       </p:ext>
     </p:extLst>
   </p:cSld>

--- a/2_STM32基本功能.pptx
+++ b/2_STM32基本功能.pptx
@@ -41,11 +41,19 @@
     <p:sldId id="288" r:id="rId35"/>
     <p:sldId id="291" r:id="rId36"/>
     <p:sldId id="292" r:id="rId37"/>
-    <p:sldId id="297" r:id="rId38"/>
-    <p:sldId id="296" r:id="rId39"/>
-    <p:sldId id="294" r:id="rId40"/>
-    <p:sldId id="293" r:id="rId41"/>
-    <p:sldId id="295" r:id="rId42"/>
+    <p:sldId id="303" r:id="rId38"/>
+    <p:sldId id="297" r:id="rId39"/>
+    <p:sldId id="298" r:id="rId40"/>
+    <p:sldId id="299" r:id="rId41"/>
+    <p:sldId id="296" r:id="rId42"/>
+    <p:sldId id="294" r:id="rId43"/>
+    <p:sldId id="293" r:id="rId44"/>
+    <p:sldId id="300" r:id="rId45"/>
+    <p:sldId id="301" r:id="rId46"/>
+    <p:sldId id="295" r:id="rId47"/>
+    <p:sldId id="302" r:id="rId48"/>
+    <p:sldId id="306" r:id="rId49"/>
+    <p:sldId id="305" r:id="rId50"/>
   </p:sldIdLst>
   <p:sldSz cx="12192000" cy="6858000"/>
   <p:notesSz cx="6858000" cy="9144000"/>
@@ -299,7 +307,7 @@
           <a:p>
             <a:fld id="{044C0B81-5930-4B25-A903-A40C83326BB2}" type="datetimeFigureOut">
               <a:rPr lang="zh-CN" altLang="en-US" smtClean="0"/>
-              <a:t>2026/7/8</a:t>
+              <a:t>2026/7/9</a:t>
             </a:fld>
             <a:endParaRPr lang="zh-CN" altLang="en-US"/>
           </a:p>
@@ -497,7 +505,7 @@
           <a:p>
             <a:fld id="{044C0B81-5930-4B25-A903-A40C83326BB2}" type="datetimeFigureOut">
               <a:rPr lang="zh-CN" altLang="en-US" smtClean="0"/>
-              <a:t>2026/7/8</a:t>
+              <a:t>2026/7/9</a:t>
             </a:fld>
             <a:endParaRPr lang="zh-CN" altLang="en-US"/>
           </a:p>
@@ -705,7 +713,7 @@
           <a:p>
             <a:fld id="{044C0B81-5930-4B25-A903-A40C83326BB2}" type="datetimeFigureOut">
               <a:rPr lang="zh-CN" altLang="en-US" smtClean="0"/>
-              <a:t>2026/7/8</a:t>
+              <a:t>2026/7/9</a:t>
             </a:fld>
             <a:endParaRPr lang="zh-CN" altLang="en-US"/>
           </a:p>
@@ -903,7 +911,7 @@
           <a:p>
             <a:fld id="{044C0B81-5930-4B25-A903-A40C83326BB2}" type="datetimeFigureOut">
               <a:rPr lang="zh-CN" altLang="en-US" smtClean="0"/>
-              <a:t>2026/7/8</a:t>
+              <a:t>2026/7/9</a:t>
             </a:fld>
             <a:endParaRPr lang="zh-CN" altLang="en-US"/>
           </a:p>
@@ -1178,7 +1186,7 @@
           <a:p>
             <a:fld id="{044C0B81-5930-4B25-A903-A40C83326BB2}" type="datetimeFigureOut">
               <a:rPr lang="zh-CN" altLang="en-US" smtClean="0"/>
-              <a:t>2026/7/8</a:t>
+              <a:t>2026/7/9</a:t>
             </a:fld>
             <a:endParaRPr lang="zh-CN" altLang="en-US"/>
           </a:p>
@@ -1443,7 +1451,7 @@
           <a:p>
             <a:fld id="{044C0B81-5930-4B25-A903-A40C83326BB2}" type="datetimeFigureOut">
               <a:rPr lang="zh-CN" altLang="en-US" smtClean="0"/>
-              <a:t>2026/7/8</a:t>
+              <a:t>2026/7/9</a:t>
             </a:fld>
             <a:endParaRPr lang="zh-CN" altLang="en-US"/>
           </a:p>
@@ -1855,7 +1863,7 @@
           <a:p>
             <a:fld id="{044C0B81-5930-4B25-A903-A40C83326BB2}" type="datetimeFigureOut">
               <a:rPr lang="zh-CN" altLang="en-US" smtClean="0"/>
-              <a:t>2026/7/8</a:t>
+              <a:t>2026/7/9</a:t>
             </a:fld>
             <a:endParaRPr lang="zh-CN" altLang="en-US"/>
           </a:p>
@@ -1996,7 +2004,7 @@
           <a:p>
             <a:fld id="{044C0B81-5930-4B25-A903-A40C83326BB2}" type="datetimeFigureOut">
               <a:rPr lang="zh-CN" altLang="en-US" smtClean="0"/>
-              <a:t>2026/7/8</a:t>
+              <a:t>2026/7/9</a:t>
             </a:fld>
             <a:endParaRPr lang="zh-CN" altLang="en-US"/>
           </a:p>
@@ -2109,7 +2117,7 @@
           <a:p>
             <a:fld id="{044C0B81-5930-4B25-A903-A40C83326BB2}" type="datetimeFigureOut">
               <a:rPr lang="zh-CN" altLang="en-US" smtClean="0"/>
-              <a:t>2026/7/8</a:t>
+              <a:t>2026/7/9</a:t>
             </a:fld>
             <a:endParaRPr lang="zh-CN" altLang="en-US"/>
           </a:p>
@@ -2420,7 +2428,7 @@
           <a:p>
             <a:fld id="{044C0B81-5930-4B25-A903-A40C83326BB2}" type="datetimeFigureOut">
               <a:rPr lang="zh-CN" altLang="en-US" smtClean="0"/>
-              <a:t>2026/7/8</a:t>
+              <a:t>2026/7/9</a:t>
             </a:fld>
             <a:endParaRPr lang="zh-CN" altLang="en-US"/>
           </a:p>
@@ -2708,7 +2716,7 @@
           <a:p>
             <a:fld id="{044C0B81-5930-4B25-A903-A40C83326BB2}" type="datetimeFigureOut">
               <a:rPr lang="zh-CN" altLang="en-US" smtClean="0"/>
-              <a:t>2026/7/8</a:t>
+              <a:t>2026/7/9</a:t>
             </a:fld>
             <a:endParaRPr lang="zh-CN" altLang="en-US"/>
           </a:p>
@@ -2949,7 +2957,7 @@
           <a:p>
             <a:fld id="{044C0B81-5930-4B25-A903-A40C83326BB2}" type="datetimeFigureOut">
               <a:rPr lang="zh-CN" altLang="en-US" smtClean="0"/>
-              <a:t>2026/7/8</a:t>
+              <a:t>2026/7/9</a:t>
             </a:fld>
             <a:endParaRPr lang="zh-CN" altLang="en-US"/>
           </a:p>
@@ -5908,7 +5916,7 @@
           <a:p>
             <a:r>
               <a:rPr lang="en-US" altLang="zh-SG" dirty="0"/>
-              <a:t>2.3 </a:t>
+              <a:t>2.4 </a:t>
             </a:r>
             <a:r>
               <a:rPr lang="en-US" altLang="zh-CN" dirty="0"/>
@@ -7953,7 +7961,7 @@
           <a:p>
             <a:r>
               <a:rPr lang="en-US" altLang="zh-SG" dirty="0"/>
-              <a:t>2.4 </a:t>
+              <a:t>2.5 </a:t>
             </a:r>
             <a:r>
               <a:rPr lang="en-US" altLang="zh-CN" dirty="0"/>
@@ -8936,57 +8944,6 @@
           <a:lstStyle/>
           <a:p>
             <a:r>
-              <a:rPr lang="en-US" altLang="zh-CN" dirty="0"/>
-              <a:t>Message Ram Offset</a:t>
-            </a:r>
-            <a:r>
-              <a:rPr lang="zh-CN" altLang="en-US" dirty="0"/>
-              <a:t>：</a:t>
-            </a:r>
-            <a:endParaRPr lang="en-US" altLang="zh-CN" dirty="0"/>
-          </a:p>
-          <a:p>
-            <a:pPr lvl="1"/>
-            <a:r>
-              <a:rPr lang="en-US" altLang="zh-CN" dirty="0"/>
-              <a:t>STM32 FDCAN </a:t>
-            </a:r>
-            <a:r>
-              <a:rPr lang="zh-SG" altLang="en-US" dirty="0"/>
-              <a:t>使用一块专门的 </a:t>
-            </a:r>
-            <a:r>
-              <a:rPr lang="en-US" altLang="zh-CN" dirty="0"/>
-              <a:t>Message RAM </a:t>
-            </a:r>
-            <a:r>
-              <a:rPr lang="zh-SG" altLang="en-US" dirty="0"/>
-              <a:t>存放过滤器、接收 </a:t>
-            </a:r>
-            <a:r>
-              <a:rPr lang="en-US" altLang="zh-CN" dirty="0"/>
-              <a:t>FIFO</a:t>
-            </a:r>
-            <a:r>
-              <a:rPr lang="zh-CN" altLang="en-US" dirty="0"/>
-              <a:t>、</a:t>
-            </a:r>
-            <a:r>
-              <a:rPr lang="zh-SG" altLang="en-US" dirty="0"/>
-              <a:t>发送 </a:t>
-            </a:r>
-            <a:r>
-              <a:rPr lang="en-US" altLang="zh-CN" dirty="0"/>
-              <a:t>FIFO </a:t>
-            </a:r>
-            <a:r>
-              <a:rPr lang="zh-SG" altLang="en-US" dirty="0"/>
-              <a:t>等结构</a:t>
-            </a:r>
-            <a:endParaRPr lang="en-US" altLang="zh-CN" dirty="0"/>
-          </a:p>
-          <a:p>
-            <a:r>
               <a:rPr lang="en-GB" altLang="zh-SG" dirty="0"/>
               <a:t>Nominal Bit Timing</a:t>
             </a:r>
@@ -9082,7 +9039,7 @@
             <a:pPr lvl="1"/>
             <a:r>
               <a:rPr lang="zh-CN" altLang="en-US" dirty="0"/>
-              <a:t>有晶振，无需在意</a:t>
+              <a:t>板子有晶振，波特率也高，无需在意</a:t>
             </a:r>
             <a:endParaRPr lang="zh-SG" altLang="en-US" dirty="0"/>
           </a:p>
@@ -9123,7 +9080,7 @@
           <p:cNvPr id="2" name="标题 1">
             <a:extLst>
               <a:ext uri="{FF2B5EF4-FFF2-40B4-BE49-F238E27FC236}">
-                <a16:creationId xmlns:a16="http://schemas.microsoft.com/office/drawing/2014/main" id="{B510E91C-9D92-26F3-8AEB-659DCCD14ED3}"/>
+                <a16:creationId xmlns:a16="http://schemas.microsoft.com/office/drawing/2014/main" id="{CB826D2B-37EA-836D-2FB6-82584496A1BB}"/>
               </a:ext>
             </a:extLst>
           </p:cNvPr>
@@ -9141,7 +9098,7 @@
           <a:p>
             <a:r>
               <a:rPr lang="zh-CN" altLang="en-US" dirty="0"/>
-              <a:t>物理层要求</a:t>
+              <a:t>标准帧与拓展帧</a:t>
             </a:r>
             <a:endParaRPr lang="zh-SG" altLang="en-US" dirty="0"/>
           </a:p>
@@ -9152,7 +9109,7 @@
           <p:cNvPr id="3" name="内容占位符 2">
             <a:extLst>
               <a:ext uri="{FF2B5EF4-FFF2-40B4-BE49-F238E27FC236}">
-                <a16:creationId xmlns:a16="http://schemas.microsoft.com/office/drawing/2014/main" id="{15A9B46B-2B1F-75D5-FA2B-181B1CD8EA13}"/>
+                <a16:creationId xmlns:a16="http://schemas.microsoft.com/office/drawing/2014/main" id="{B8283093-7D6C-272F-62B4-8980E675BCCA}"/>
               </a:ext>
             </a:extLst>
           </p:cNvPr>
@@ -9169,16 +9126,27 @@
           <a:lstStyle/>
           <a:p>
             <a:r>
-              <a:rPr lang="zh-CN" altLang="en-US" dirty="0"/>
-              <a:t>见课件</a:t>
-            </a:r>
-            <a:r>
-              <a:rPr lang="en-US" altLang="zh-CN" dirty="0"/>
-              <a:t>1_</a:t>
-            </a:r>
-            <a:r>
-              <a:rPr lang="zh-CN" altLang="en-US" dirty="0"/>
-              <a:t>布线</a:t>
+              <a:rPr lang="zh-CN" altLang="en-US"/>
+              <a:t>根据手册正确选择即</a:t>
+            </a:r>
+            <a:r>
+              <a:rPr lang="zh-CN" altLang="en-US" dirty="0"/>
+              <a:t>可</a:t>
+            </a:r>
+            <a:endParaRPr lang="en-US" altLang="zh-CN" dirty="0"/>
+          </a:p>
+          <a:p>
+            <a:r>
+              <a:rPr lang="zh-CN" altLang="en-US" dirty="0"/>
+              <a:t>注意：不属于</a:t>
+            </a:r>
+            <a:r>
+              <a:rPr lang="en-US" altLang="zh-CN" dirty="0" err="1"/>
+              <a:t>CubeMX</a:t>
+            </a:r>
+            <a:r>
+              <a:rPr lang="zh-CN" altLang="en-US" dirty="0"/>
+              <a:t>设置</a:t>
             </a:r>
             <a:endParaRPr lang="zh-SG" altLang="en-US" dirty="0"/>
           </a:p>
@@ -9187,7 +9155,7 @@
     </p:spTree>
     <p:extLst>
       <p:ext uri="{BB962C8B-B14F-4D97-AF65-F5344CB8AC3E}">
-        <p14:creationId xmlns:p14="http://schemas.microsoft.com/office/powerpoint/2010/main" val="1903284897"/>
+        <p14:creationId xmlns:p14="http://schemas.microsoft.com/office/powerpoint/2010/main" val="1806061137"/>
       </p:ext>
     </p:extLst>
   </p:cSld>
@@ -9219,7 +9187,7 @@
           <p:cNvPr id="2" name="标题 1">
             <a:extLst>
               <a:ext uri="{FF2B5EF4-FFF2-40B4-BE49-F238E27FC236}">
-                <a16:creationId xmlns:a16="http://schemas.microsoft.com/office/drawing/2014/main" id="{CE8E9E4A-1FBA-77B5-FA0F-FB390252849F}"/>
+                <a16:creationId xmlns:a16="http://schemas.microsoft.com/office/drawing/2014/main" id="{B510E91C-9D92-26F3-8AEB-659DCCD14ED3}"/>
               </a:ext>
             </a:extLst>
           </p:cNvPr>
@@ -9237,7 +9205,7 @@
           <a:p>
             <a:r>
               <a:rPr lang="zh-CN" altLang="en-US" dirty="0"/>
-              <a:t>总线负载的计算</a:t>
+              <a:t>物理层要求</a:t>
             </a:r>
             <a:endParaRPr lang="zh-SG" altLang="en-US" dirty="0"/>
           </a:p>
@@ -9248,7 +9216,7 @@
           <p:cNvPr id="3" name="内容占位符 2">
             <a:extLst>
               <a:ext uri="{FF2B5EF4-FFF2-40B4-BE49-F238E27FC236}">
-                <a16:creationId xmlns:a16="http://schemas.microsoft.com/office/drawing/2014/main" id="{9AE00339-EC94-0ED0-230E-8BFBA9978D26}"/>
+                <a16:creationId xmlns:a16="http://schemas.microsoft.com/office/drawing/2014/main" id="{15A9B46B-2B1F-75D5-FA2B-181B1CD8EA13}"/>
               </a:ext>
             </a:extLst>
           </p:cNvPr>
@@ -9264,14 +9232,57 @@
           <a:bodyPr/>
           <a:lstStyle/>
           <a:p>
-            <a:endParaRPr lang="zh-SG" altLang="en-US"/>
-          </a:p>
-        </p:txBody>
-      </p:sp>
+            <a:r>
+              <a:rPr lang="zh-CN" altLang="en-US" dirty="0"/>
+              <a:t>终端电阻：头一个尾一个，各</a:t>
+            </a:r>
+            <a:r>
+              <a:rPr lang="en-US" altLang="zh-CN" dirty="0"/>
+              <a:t>120R</a:t>
+            </a:r>
+          </a:p>
+        </p:txBody>
+      </p:sp>
+      <p:pic>
+        <p:nvPicPr>
+          <p:cNvPr id="7" name="图片 6">
+            <a:extLst>
+              <a:ext uri="{FF2B5EF4-FFF2-40B4-BE49-F238E27FC236}">
+                <a16:creationId xmlns:a16="http://schemas.microsoft.com/office/drawing/2014/main" id="{39D1DD55-C08F-4181-E11D-33311D1A7044}"/>
+              </a:ext>
+            </a:extLst>
+          </p:cNvPr>
+          <p:cNvPicPr>
+            <a:picLocks noChangeAspect="1"/>
+          </p:cNvPicPr>
+          <p:nvPr/>
+        </p:nvPicPr>
+        <p:blipFill>
+          <a:blip r:embed="rId2">
+            <a:extLst>
+              <a:ext uri="{28A0092B-C50C-407E-A947-70E740481C1C}">
+                <a14:useLocalDpi xmlns:a14="http://schemas.microsoft.com/office/drawing/2010/main" val="0"/>
+              </a:ext>
+            </a:extLst>
+          </a:blip>
+          <a:stretch>
+            <a:fillRect/>
+          </a:stretch>
+        </p:blipFill>
+        <p:spPr>
+          <a:xfrm>
+            <a:off x="952500" y="2571750"/>
+            <a:ext cx="10287000" cy="1714500"/>
+          </a:xfrm>
+          <a:prstGeom prst="rect">
+            <a:avLst/>
+          </a:prstGeom>
+        </p:spPr>
+      </p:pic>
     </p:spTree>
     <p:extLst>
       <p:ext uri="{BB962C8B-B14F-4D97-AF65-F5344CB8AC3E}">
-        <p14:creationId xmlns:p14="http://schemas.microsoft.com/office/powerpoint/2010/main" val="1017767223"/>
+        <p14:creationId xmlns:p14="http://schemas.microsoft.com/office/powerpoint/2010/main" val="1903284897"/>
       </p:ext>
     </p:extLst>
   </p:cSld>
@@ -9303,7 +9314,7 @@
           <p:cNvPr id="2" name="标题 1">
             <a:extLst>
               <a:ext uri="{FF2B5EF4-FFF2-40B4-BE49-F238E27FC236}">
-                <a16:creationId xmlns:a16="http://schemas.microsoft.com/office/drawing/2014/main" id="{309F9F92-F0DC-A537-7A50-A94B9CB24F7F}"/>
+                <a16:creationId xmlns:a16="http://schemas.microsoft.com/office/drawing/2014/main" id="{670DD677-DFFD-8315-E7EF-81F2839A0B64}"/>
               </a:ext>
             </a:extLst>
           </p:cNvPr>
@@ -9320,12 +9331,8 @@
           <a:lstStyle/>
           <a:p>
             <a:r>
-              <a:rPr lang="en-US" altLang="zh-CN" dirty="0"/>
-              <a:t>ID</a:t>
-            </a:r>
-            <a:r>
-              <a:rPr lang="zh-CN" altLang="en-US" dirty="0"/>
-              <a:t>与仲裁</a:t>
+              <a:rPr lang="zh-CN" altLang="en-US" dirty="0"/>
+              <a:t>物理层要求</a:t>
             </a:r>
             <a:endParaRPr lang="zh-SG" altLang="en-US" dirty="0"/>
           </a:p>
@@ -9336,7 +9343,7 @@
           <p:cNvPr id="3" name="内容占位符 2">
             <a:extLst>
               <a:ext uri="{FF2B5EF4-FFF2-40B4-BE49-F238E27FC236}">
-                <a16:creationId xmlns:a16="http://schemas.microsoft.com/office/drawing/2014/main" id="{7B18DCA7-9580-4E0B-D29F-4FC582D0A694}"/>
+                <a16:creationId xmlns:a16="http://schemas.microsoft.com/office/drawing/2014/main" id="{4103CD8F-62DB-FB4D-EFAF-B6B97CD6C5C8}"/>
               </a:ext>
             </a:extLst>
           </p:cNvPr>
@@ -9353,27 +9360,8 @@
           <a:lstStyle/>
           <a:p>
             <a:r>
-              <a:rPr lang="en-US" altLang="zh-CN" dirty="0"/>
-              <a:t>ID</a:t>
-            </a:r>
-            <a:r>
-              <a:rPr lang="zh-CN" altLang="en-US" dirty="0"/>
-              <a:t>越小越优先</a:t>
-            </a:r>
-            <a:endParaRPr lang="en-US" altLang="zh-CN" dirty="0"/>
-          </a:p>
-          <a:p>
-            <a:r>
-              <a:rPr lang="zh-CN" altLang="en-US" dirty="0"/>
-              <a:t>合理设置</a:t>
-            </a:r>
-            <a:r>
-              <a:rPr lang="en-US" altLang="zh-CN" dirty="0"/>
-              <a:t>ID</a:t>
-            </a:r>
-            <a:r>
-              <a:rPr lang="zh-CN" altLang="en-US" dirty="0"/>
-              <a:t>以提高实时性与稳定性</a:t>
+              <a:rPr lang="zh-CN" altLang="en-US" dirty="0"/>
+              <a:t>根据比特率限制长度</a:t>
             </a:r>
             <a:endParaRPr lang="zh-SG" altLang="en-US" dirty="0"/>
           </a:p>
@@ -9381,10 +9369,10 @@
       </p:sp>
       <p:pic>
         <p:nvPicPr>
-          <p:cNvPr id="7" name="图片 6">
-            <a:extLst>
-              <a:ext uri="{FF2B5EF4-FFF2-40B4-BE49-F238E27FC236}">
-                <a16:creationId xmlns:a16="http://schemas.microsoft.com/office/drawing/2014/main" id="{F7D5D0B0-3FB3-3E62-4772-21286CC3ABB1}"/>
+          <p:cNvPr id="5" name="图片 4">
+            <a:extLst>
+              <a:ext uri="{FF2B5EF4-FFF2-40B4-BE49-F238E27FC236}">
+                <a16:creationId xmlns:a16="http://schemas.microsoft.com/office/drawing/2014/main" id="{EC548235-5FC1-6C39-D3CE-C98E03E8D9F2}"/>
               </a:ext>
             </a:extLst>
           </p:cNvPr>
@@ -9394,15 +9382,57 @@
           <p:nvPr/>
         </p:nvPicPr>
         <p:blipFill>
-          <a:blip r:embed="rId2"/>
+          <a:blip r:embed="rId2">
+            <a:extLst>
+              <a:ext uri="{28A0092B-C50C-407E-A947-70E740481C1C}">
+                <a14:useLocalDpi xmlns:a14="http://schemas.microsoft.com/office/drawing/2010/main" val="0"/>
+              </a:ext>
+            </a:extLst>
+          </a:blip>
           <a:stretch>
             <a:fillRect/>
           </a:stretch>
         </p:blipFill>
         <p:spPr>
           <a:xfrm>
-            <a:off x="6096000" y="2780294"/>
-            <a:ext cx="6096000" cy="3145318"/>
+            <a:off x="952500" y="2572148"/>
+            <a:ext cx="10287000" cy="1714500"/>
+          </a:xfrm>
+          <a:prstGeom prst="rect">
+            <a:avLst/>
+          </a:prstGeom>
+        </p:spPr>
+      </p:pic>
+      <p:pic>
+        <p:nvPicPr>
+          <p:cNvPr id="7" name="图片 6">
+            <a:extLst>
+              <a:ext uri="{FF2B5EF4-FFF2-40B4-BE49-F238E27FC236}">
+                <a16:creationId xmlns:a16="http://schemas.microsoft.com/office/drawing/2014/main" id="{BA4854B6-4EF4-8E53-42F5-36923D1BCE35}"/>
+              </a:ext>
+            </a:extLst>
+          </p:cNvPr>
+          <p:cNvPicPr>
+            <a:picLocks noChangeAspect="1"/>
+          </p:cNvPicPr>
+          <p:nvPr/>
+        </p:nvPicPr>
+        <p:blipFill>
+          <a:blip r:embed="rId3">
+            <a:extLst>
+              <a:ext uri="{28A0092B-C50C-407E-A947-70E740481C1C}">
+                <a14:useLocalDpi xmlns:a14="http://schemas.microsoft.com/office/drawing/2010/main" val="0"/>
+              </a:ext>
+            </a:extLst>
+          </a:blip>
+          <a:stretch>
+            <a:fillRect/>
+          </a:stretch>
+        </p:blipFill>
+        <p:spPr>
+          <a:xfrm>
+            <a:off x="838200" y="4762500"/>
+            <a:ext cx="10287000" cy="2095500"/>
           </a:xfrm>
           <a:prstGeom prst="rect">
             <a:avLst/>
@@ -9412,7 +9442,7 @@
     </p:spTree>
     <p:extLst>
       <p:ext uri="{BB962C8B-B14F-4D97-AF65-F5344CB8AC3E}">
-        <p14:creationId xmlns:p14="http://schemas.microsoft.com/office/powerpoint/2010/main" val="919574203"/>
+        <p14:creationId xmlns:p14="http://schemas.microsoft.com/office/powerpoint/2010/main" val="181936112"/>
       </p:ext>
     </p:extLst>
   </p:cSld>
@@ -9734,7 +9764,7 @@
           <p:cNvPr id="2" name="标题 1">
             <a:extLst>
               <a:ext uri="{FF2B5EF4-FFF2-40B4-BE49-F238E27FC236}">
-                <a16:creationId xmlns:a16="http://schemas.microsoft.com/office/drawing/2014/main" id="{E055472D-184F-FE1F-08EF-D4F31AB08319}"/>
+                <a16:creationId xmlns:a16="http://schemas.microsoft.com/office/drawing/2014/main" id="{5935BF38-5AD9-EAAE-2D1D-D8A8180D6E6F}"/>
               </a:ext>
             </a:extLst>
           </p:cNvPr>
@@ -9751,12 +9781,8 @@
           <a:lstStyle/>
           <a:p>
             <a:r>
-              <a:rPr lang="en-US" altLang="zh-CN" dirty="0"/>
-              <a:t>TDC</a:t>
-            </a:r>
-            <a:r>
-              <a:rPr lang="zh-CN" altLang="en-US" dirty="0"/>
-              <a:t>：传输延迟补偿</a:t>
+              <a:rPr lang="zh-CN" altLang="en-US" dirty="0"/>
+              <a:t>物理层要求</a:t>
             </a:r>
             <a:endParaRPr lang="zh-SG" altLang="en-US" dirty="0"/>
           </a:p>
@@ -9767,7 +9793,7 @@
           <p:cNvPr id="3" name="内容占位符 2">
             <a:extLst>
               <a:ext uri="{FF2B5EF4-FFF2-40B4-BE49-F238E27FC236}">
-                <a16:creationId xmlns:a16="http://schemas.microsoft.com/office/drawing/2014/main" id="{871E948F-2BCC-28DE-6328-0A4DE6AEF2F2}"/>
+                <a16:creationId xmlns:a16="http://schemas.microsoft.com/office/drawing/2014/main" id="{C602DBDB-4D7A-3086-7D91-2534B7B3CB44}"/>
               </a:ext>
             </a:extLst>
           </p:cNvPr>
@@ -9783,14 +9809,54 @@
           <a:bodyPr/>
           <a:lstStyle/>
           <a:p>
-            <a:endParaRPr lang="zh-SG" altLang="en-US"/>
-          </a:p>
-        </p:txBody>
-      </p:sp>
+            <a:r>
+              <a:rPr lang="zh-CN" altLang="en-US" dirty="0"/>
+              <a:t>减小残桩长度</a:t>
+            </a:r>
+            <a:endParaRPr lang="zh-SG" altLang="en-US" dirty="0"/>
+          </a:p>
+        </p:txBody>
+      </p:sp>
+      <p:pic>
+        <p:nvPicPr>
+          <p:cNvPr id="5" name="图片 4">
+            <a:extLst>
+              <a:ext uri="{FF2B5EF4-FFF2-40B4-BE49-F238E27FC236}">
+                <a16:creationId xmlns:a16="http://schemas.microsoft.com/office/drawing/2014/main" id="{F562D224-85B9-00B7-C2AB-B525C659BEF8}"/>
+              </a:ext>
+            </a:extLst>
+          </p:cNvPr>
+          <p:cNvPicPr>
+            <a:picLocks noChangeAspect="1"/>
+          </p:cNvPicPr>
+          <p:nvPr/>
+        </p:nvPicPr>
+        <p:blipFill>
+          <a:blip r:embed="rId2">
+            <a:extLst>
+              <a:ext uri="{28A0092B-C50C-407E-A947-70E740481C1C}">
+                <a14:useLocalDpi xmlns:a14="http://schemas.microsoft.com/office/drawing/2010/main" val="0"/>
+              </a:ext>
+            </a:extLst>
+          </a:blip>
+          <a:stretch>
+            <a:fillRect/>
+          </a:stretch>
+        </p:blipFill>
+        <p:spPr>
+          <a:xfrm>
+            <a:off x="952500" y="2366963"/>
+            <a:ext cx="10287000" cy="3810000"/>
+          </a:xfrm>
+          <a:prstGeom prst="rect">
+            <a:avLst/>
+          </a:prstGeom>
+        </p:spPr>
+      </p:pic>
     </p:spTree>
     <p:extLst>
       <p:ext uri="{BB962C8B-B14F-4D97-AF65-F5344CB8AC3E}">
-        <p14:creationId xmlns:p14="http://schemas.microsoft.com/office/powerpoint/2010/main" val="3110391825"/>
+        <p14:creationId xmlns:p14="http://schemas.microsoft.com/office/powerpoint/2010/main" val="3435809843"/>
       </p:ext>
     </p:extLst>
   </p:cSld>
@@ -9822,6 +9888,926 @@
           <p:cNvPr id="2" name="标题 1">
             <a:extLst>
               <a:ext uri="{FF2B5EF4-FFF2-40B4-BE49-F238E27FC236}">
+                <a16:creationId xmlns:a16="http://schemas.microsoft.com/office/drawing/2014/main" id="{CE8E9E4A-1FBA-77B5-FA0F-FB390252849F}"/>
+              </a:ext>
+            </a:extLst>
+          </p:cNvPr>
+          <p:cNvSpPr>
+            <a:spLocks noGrp="1"/>
+          </p:cNvSpPr>
+          <p:nvPr>
+            <p:ph type="title"/>
+          </p:nvPr>
+        </p:nvSpPr>
+        <p:spPr/>
+        <p:txBody>
+          <a:bodyPr/>
+          <a:lstStyle/>
+          <a:p>
+            <a:r>
+              <a:rPr lang="zh-CN" altLang="en-US" dirty="0"/>
+              <a:t>总线负载的计算</a:t>
+            </a:r>
+            <a:endParaRPr lang="zh-SG" altLang="en-US" dirty="0"/>
+          </a:p>
+        </p:txBody>
+      </p:sp>
+      <p:sp>
+        <p:nvSpPr>
+          <p:cNvPr id="3" name="内容占位符 2">
+            <a:extLst>
+              <a:ext uri="{FF2B5EF4-FFF2-40B4-BE49-F238E27FC236}">
+                <a16:creationId xmlns:a16="http://schemas.microsoft.com/office/drawing/2014/main" id="{9AE00339-EC94-0ED0-230E-8BFBA9978D26}"/>
+              </a:ext>
+            </a:extLst>
+          </p:cNvPr>
+          <p:cNvSpPr>
+            <a:spLocks noGrp="1"/>
+          </p:cNvSpPr>
+          <p:nvPr>
+            <p:ph idx="1"/>
+          </p:nvPr>
+        </p:nvSpPr>
+        <p:spPr/>
+        <p:txBody>
+          <a:bodyPr/>
+          <a:lstStyle/>
+          <a:p>
+            <a:r>
+              <a:rPr lang="zh-CN" altLang="en-US" dirty="0"/>
+              <a:t>总线带宽需满足全部设备的要求</a:t>
+            </a:r>
+            <a:endParaRPr lang="en-US" altLang="zh-CN" dirty="0"/>
+          </a:p>
+          <a:p>
+            <a:r>
+              <a:rPr lang="zh-CN" altLang="en-US" dirty="0"/>
+              <a:t>思考：总线上平均每毫秒负载多大？（按位计算）</a:t>
+            </a:r>
+            <a:endParaRPr lang="en-US" altLang="zh-CN" dirty="0"/>
+          </a:p>
+          <a:p>
+            <a:pPr marL="457200" lvl="1" indent="0">
+              <a:buNone/>
+            </a:pPr>
+            <a:r>
+              <a:rPr lang="zh-CN" altLang="en-US" dirty="0"/>
+              <a:t>总线上</a:t>
+            </a:r>
+            <a:r>
+              <a:rPr lang="en-US" altLang="zh-CN" dirty="0"/>
+              <a:t>4</a:t>
+            </a:r>
+            <a:r>
+              <a:rPr lang="zh-CN" altLang="en-US" dirty="0"/>
+              <a:t>个</a:t>
+            </a:r>
+            <a:r>
+              <a:rPr lang="en-US" altLang="zh-CN" dirty="0"/>
+              <a:t>6020</a:t>
+            </a:r>
+            <a:r>
+              <a:rPr lang="zh-CN" altLang="en-US" dirty="0"/>
+              <a:t>电机，以</a:t>
+            </a:r>
+            <a:r>
+              <a:rPr lang="en-US" altLang="zh-CN" dirty="0"/>
+              <a:t>1kHz</a:t>
+            </a:r>
+            <a:r>
+              <a:rPr lang="zh-CN" altLang="en-US" dirty="0"/>
+              <a:t>频率主动上报；</a:t>
+            </a:r>
+            <a:endParaRPr lang="en-US" altLang="zh-CN" dirty="0"/>
+          </a:p>
+          <a:p>
+            <a:pPr marL="457200" lvl="1" indent="0">
+              <a:buNone/>
+            </a:pPr>
+            <a:r>
+              <a:rPr lang="zh-CN" altLang="en-US" dirty="0"/>
+              <a:t>主控板以</a:t>
+            </a:r>
+            <a:r>
+              <a:rPr lang="en-US" altLang="zh-CN" dirty="0"/>
+              <a:t>500Hz</a:t>
+            </a:r>
+            <a:r>
+              <a:rPr lang="zh-CN" altLang="en-US" dirty="0"/>
+              <a:t>频率发送一拖四控制帧</a:t>
+            </a:r>
+            <a:endParaRPr lang="en-US" altLang="zh-CN" dirty="0"/>
+          </a:p>
+          <a:p>
+            <a:pPr marL="457200" lvl="1" indent="0">
+              <a:buNone/>
+            </a:pPr>
+            <a:r>
+              <a:rPr lang="en-US" altLang="zh-CN" dirty="0"/>
+              <a:t>4.5*64</a:t>
+            </a:r>
+            <a:r>
+              <a:rPr lang="zh-CN" altLang="en-US" dirty="0"/>
+              <a:t>？</a:t>
+            </a:r>
+            <a:endParaRPr lang="en-US" altLang="zh-CN" dirty="0"/>
+          </a:p>
+        </p:txBody>
+      </p:sp>
+    </p:spTree>
+    <p:extLst>
+      <p:ext uri="{BB962C8B-B14F-4D97-AF65-F5344CB8AC3E}">
+        <p14:creationId xmlns:p14="http://schemas.microsoft.com/office/powerpoint/2010/main" val="1017767223"/>
+      </p:ext>
+    </p:extLst>
+  </p:cSld>
+  <p:clrMapOvr>
+    <a:masterClrMapping/>
+  </p:clrMapOvr>
+</p:sld>
+</file>
+
+<file path=ppt/slides/slide42.xml><?xml version="1.0" encoding="utf-8"?>
+<p:sld xmlns:a="http://schemas.openxmlformats.org/drawingml/2006/main" xmlns:r="http://schemas.openxmlformats.org/officeDocument/2006/relationships" xmlns:p="http://schemas.openxmlformats.org/presentationml/2006/main">
+  <p:cSld>
+    <p:spTree>
+      <p:nvGrpSpPr>
+        <p:cNvPr id="1" name=""/>
+        <p:cNvGrpSpPr/>
+        <p:nvPr/>
+      </p:nvGrpSpPr>
+      <p:grpSpPr>
+        <a:xfrm>
+          <a:off x="0" y="0"/>
+          <a:ext cx="0" cy="0"/>
+          <a:chOff x="0" y="0"/>
+          <a:chExt cx="0" cy="0"/>
+        </a:xfrm>
+      </p:grpSpPr>
+      <p:sp>
+        <p:nvSpPr>
+          <p:cNvPr id="2" name="标题 1">
+            <a:extLst>
+              <a:ext uri="{FF2B5EF4-FFF2-40B4-BE49-F238E27FC236}">
+                <a16:creationId xmlns:a16="http://schemas.microsoft.com/office/drawing/2014/main" id="{309F9F92-F0DC-A537-7A50-A94B9CB24F7F}"/>
+              </a:ext>
+            </a:extLst>
+          </p:cNvPr>
+          <p:cNvSpPr>
+            <a:spLocks noGrp="1"/>
+          </p:cNvSpPr>
+          <p:nvPr>
+            <p:ph type="title"/>
+          </p:nvPr>
+        </p:nvSpPr>
+        <p:spPr/>
+        <p:txBody>
+          <a:bodyPr/>
+          <a:lstStyle/>
+          <a:p>
+            <a:r>
+              <a:rPr lang="en-US" altLang="zh-CN" dirty="0"/>
+              <a:t>ID</a:t>
+            </a:r>
+            <a:r>
+              <a:rPr lang="zh-CN" altLang="en-US" dirty="0"/>
+              <a:t>与仲裁</a:t>
+            </a:r>
+            <a:endParaRPr lang="zh-SG" altLang="en-US" dirty="0"/>
+          </a:p>
+        </p:txBody>
+      </p:sp>
+      <p:sp>
+        <p:nvSpPr>
+          <p:cNvPr id="3" name="内容占位符 2">
+            <a:extLst>
+              <a:ext uri="{FF2B5EF4-FFF2-40B4-BE49-F238E27FC236}">
+                <a16:creationId xmlns:a16="http://schemas.microsoft.com/office/drawing/2014/main" id="{7B18DCA7-9580-4E0B-D29F-4FC582D0A694}"/>
+              </a:ext>
+            </a:extLst>
+          </p:cNvPr>
+          <p:cNvSpPr>
+            <a:spLocks noGrp="1"/>
+          </p:cNvSpPr>
+          <p:nvPr>
+            <p:ph idx="1"/>
+          </p:nvPr>
+        </p:nvSpPr>
+        <p:spPr/>
+        <p:txBody>
+          <a:bodyPr/>
+          <a:lstStyle/>
+          <a:p>
+            <a:r>
+              <a:rPr lang="zh-CN" altLang="en-US" dirty="0"/>
+              <a:t>共享总线势必需要仲裁</a:t>
+            </a:r>
+            <a:endParaRPr lang="en-US" altLang="zh-CN" dirty="0"/>
+          </a:p>
+          <a:p>
+            <a:r>
+              <a:rPr lang="zh-CN" altLang="en-US" dirty="0"/>
+              <a:t>根据数据包</a:t>
+            </a:r>
+            <a:r>
+              <a:rPr lang="en-US" altLang="zh-CN" dirty="0"/>
+              <a:t>ID</a:t>
+            </a:r>
+            <a:r>
+              <a:rPr lang="zh-CN" altLang="en-US" dirty="0"/>
+              <a:t>仲裁，小</a:t>
+            </a:r>
+            <a:r>
+              <a:rPr lang="en-US" altLang="zh-CN" dirty="0"/>
+              <a:t>ID</a:t>
+            </a:r>
+            <a:r>
+              <a:rPr lang="zh-CN" altLang="en-US" dirty="0"/>
+              <a:t>优先</a:t>
+            </a:r>
+            <a:endParaRPr lang="en-US" altLang="zh-CN" dirty="0"/>
+          </a:p>
+          <a:p>
+            <a:r>
+              <a:rPr lang="zh-CN" altLang="en-US" dirty="0"/>
+              <a:t>思考：右图所述现象的原因？</a:t>
+            </a:r>
+            <a:endParaRPr lang="en-US" altLang="zh-CN" dirty="0"/>
+          </a:p>
+          <a:p>
+            <a:pPr marL="0" indent="0">
+              <a:buNone/>
+            </a:pPr>
+            <a:r>
+              <a:rPr lang="zh-CN" altLang="en-US" dirty="0"/>
+              <a:t>（主控发送的命令带</a:t>
+            </a:r>
+            <a:r>
+              <a:rPr lang="en-US" altLang="zh-CN" dirty="0"/>
+              <a:t>CAN ID</a:t>
+            </a:r>
+            <a:r>
+              <a:rPr lang="zh-CN" altLang="en-US" dirty="0"/>
+              <a:t>，</a:t>
+            </a:r>
+            <a:endParaRPr lang="en-US" altLang="zh-CN" dirty="0"/>
+          </a:p>
+          <a:p>
+            <a:pPr marL="0" indent="0">
+              <a:buNone/>
+            </a:pPr>
+            <a:r>
+              <a:rPr lang="zh-CN" altLang="en-US" dirty="0"/>
+              <a:t>电机反馈帧带</a:t>
+            </a:r>
+            <a:r>
+              <a:rPr lang="en-US" altLang="zh-CN" dirty="0"/>
+              <a:t>Master ID</a:t>
+            </a:r>
+            <a:r>
+              <a:rPr lang="zh-CN" altLang="en-US" dirty="0"/>
+              <a:t>）</a:t>
+            </a:r>
+            <a:endParaRPr lang="en-US" altLang="zh-CN" dirty="0"/>
+          </a:p>
+          <a:p>
+            <a:pPr marL="228600" marR="0" lvl="0" indent="-228600" algn="l" defTabSz="914400" rtl="0" eaLnBrk="1" fontAlgn="auto" latinLnBrk="0" hangingPunct="1">
+              <a:lnSpc>
+                <a:spcPct val="90000"/>
+              </a:lnSpc>
+              <a:spcBef>
+                <a:spcPts val="1000"/>
+              </a:spcBef>
+              <a:spcAft>
+                <a:spcPts val="0"/>
+              </a:spcAft>
+              <a:buClrTx/>
+              <a:buSzTx/>
+              <a:buFont typeface="Arial" panose="020B0604020202020204" pitchFamily="34" charset="0"/>
+              <a:buChar char="•"/>
+              <a:tabLst/>
+              <a:defRPr/>
+            </a:pPr>
+            <a:r>
+              <a:rPr kumimoji="0" lang="zh-CN" altLang="en-US" sz="2800" b="0" i="0" u="none" strike="noStrike" kern="1200" cap="none" spc="0" normalizeH="0" baseline="0" noProof="0" dirty="0">
+                <a:ln>
+                  <a:noFill/>
+                </a:ln>
+                <a:solidFill>
+                  <a:prstClr val="black"/>
+                </a:solidFill>
+                <a:effectLst/>
+                <a:uLnTx/>
+                <a:uFillTx/>
+                <a:latin typeface="等线" panose="02110004020202020204"/>
+                <a:ea typeface="等线" panose="02010600030101010101" pitchFamily="2" charset="-122"/>
+                <a:cs typeface="+mn-cs"/>
+              </a:rPr>
+              <a:t>合理设置</a:t>
+            </a:r>
+            <a:r>
+              <a:rPr lang="zh-CN" altLang="en-US" dirty="0">
+                <a:solidFill>
+                  <a:prstClr val="black"/>
+                </a:solidFill>
+                <a:latin typeface="等线" panose="02110004020202020204"/>
+                <a:ea typeface="等线" panose="02010600030101010101" pitchFamily="2" charset="-122"/>
+              </a:rPr>
+              <a:t>，</a:t>
+            </a:r>
+            <a:r>
+              <a:rPr kumimoji="0" lang="zh-CN" altLang="en-US" sz="2800" b="0" i="0" u="none" strike="noStrike" kern="1200" cap="none" spc="0" normalizeH="0" baseline="0" noProof="0" dirty="0">
+                <a:ln>
+                  <a:noFill/>
+                </a:ln>
+                <a:solidFill>
+                  <a:prstClr val="black"/>
+                </a:solidFill>
+                <a:effectLst/>
+                <a:uLnTx/>
+                <a:uFillTx/>
+                <a:latin typeface="等线" panose="02110004020202020204"/>
+                <a:ea typeface="等线" panose="02010600030101010101" pitchFamily="2" charset="-122"/>
+                <a:cs typeface="+mn-cs"/>
+              </a:rPr>
+              <a:t>提高实时性与稳定性</a:t>
+            </a:r>
+            <a:endParaRPr kumimoji="0" lang="en-US" altLang="zh-CN" sz="2800" b="0" i="0" u="none" strike="noStrike" kern="1200" cap="none" spc="0" normalizeH="0" baseline="0" noProof="0" dirty="0">
+              <a:ln>
+                <a:noFill/>
+              </a:ln>
+              <a:solidFill>
+                <a:prstClr val="black"/>
+              </a:solidFill>
+              <a:effectLst/>
+              <a:uLnTx/>
+              <a:uFillTx/>
+              <a:latin typeface="等线" panose="02110004020202020204"/>
+              <a:ea typeface="等线" panose="02010600030101010101" pitchFamily="2" charset="-122"/>
+              <a:cs typeface="+mn-cs"/>
+            </a:endParaRPr>
+          </a:p>
+        </p:txBody>
+      </p:sp>
+      <p:pic>
+        <p:nvPicPr>
+          <p:cNvPr id="7" name="图片 6">
+            <a:extLst>
+              <a:ext uri="{FF2B5EF4-FFF2-40B4-BE49-F238E27FC236}">
+                <a16:creationId xmlns:a16="http://schemas.microsoft.com/office/drawing/2014/main" id="{F7D5D0B0-3FB3-3E62-4772-21286CC3ABB1}"/>
+              </a:ext>
+            </a:extLst>
+          </p:cNvPr>
+          <p:cNvPicPr>
+            <a:picLocks noChangeAspect="1"/>
+          </p:cNvPicPr>
+          <p:nvPr/>
+        </p:nvPicPr>
+        <p:blipFill>
+          <a:blip r:embed="rId2"/>
+          <a:stretch>
+            <a:fillRect/>
+          </a:stretch>
+        </p:blipFill>
+        <p:spPr>
+          <a:xfrm>
+            <a:off x="6222600" y="2466363"/>
+            <a:ext cx="5969400" cy="3079997"/>
+          </a:xfrm>
+          <a:prstGeom prst="rect">
+            <a:avLst/>
+          </a:prstGeom>
+        </p:spPr>
+      </p:pic>
+    </p:spTree>
+    <p:extLst>
+      <p:ext uri="{BB962C8B-B14F-4D97-AF65-F5344CB8AC3E}">
+        <p14:creationId xmlns:p14="http://schemas.microsoft.com/office/powerpoint/2010/main" val="919574203"/>
+      </p:ext>
+    </p:extLst>
+  </p:cSld>
+  <p:clrMapOvr>
+    <a:masterClrMapping/>
+  </p:clrMapOvr>
+</p:sld>
+</file>
+
+<file path=ppt/slides/slide43.xml><?xml version="1.0" encoding="utf-8"?>
+<p:sld xmlns:a="http://schemas.openxmlformats.org/drawingml/2006/main" xmlns:r="http://schemas.openxmlformats.org/officeDocument/2006/relationships" xmlns:p="http://schemas.openxmlformats.org/presentationml/2006/main">
+  <p:cSld>
+    <p:spTree>
+      <p:nvGrpSpPr>
+        <p:cNvPr id="1" name=""/>
+        <p:cNvGrpSpPr/>
+        <p:nvPr/>
+      </p:nvGrpSpPr>
+      <p:grpSpPr>
+        <a:xfrm>
+          <a:off x="0" y="0"/>
+          <a:ext cx="0" cy="0"/>
+          <a:chOff x="0" y="0"/>
+          <a:chExt cx="0" cy="0"/>
+        </a:xfrm>
+      </p:grpSpPr>
+      <p:sp>
+        <p:nvSpPr>
+          <p:cNvPr id="2" name="标题 1">
+            <a:extLst>
+              <a:ext uri="{FF2B5EF4-FFF2-40B4-BE49-F238E27FC236}">
+                <a16:creationId xmlns:a16="http://schemas.microsoft.com/office/drawing/2014/main" id="{E055472D-184F-FE1F-08EF-D4F31AB08319}"/>
+              </a:ext>
+            </a:extLst>
+          </p:cNvPr>
+          <p:cNvSpPr>
+            <a:spLocks noGrp="1"/>
+          </p:cNvSpPr>
+          <p:nvPr>
+            <p:ph type="title"/>
+          </p:nvPr>
+        </p:nvSpPr>
+        <p:spPr>
+          <a:xfrm>
+            <a:off x="838200" y="0"/>
+            <a:ext cx="10515600" cy="1325563"/>
+          </a:xfrm>
+        </p:spPr>
+        <p:txBody>
+          <a:bodyPr/>
+          <a:lstStyle/>
+          <a:p>
+            <a:r>
+              <a:rPr lang="en-US" altLang="zh-CN" dirty="0"/>
+              <a:t>TDC</a:t>
+            </a:r>
+            <a:r>
+              <a:rPr lang="zh-CN" altLang="en-US" dirty="0"/>
+              <a:t>：传输延迟补偿</a:t>
+            </a:r>
+            <a:endParaRPr lang="zh-SG" altLang="en-US" dirty="0"/>
+          </a:p>
+        </p:txBody>
+      </p:sp>
+      <p:sp>
+        <p:nvSpPr>
+          <p:cNvPr id="3" name="内容占位符 2">
+            <a:extLst>
+              <a:ext uri="{FF2B5EF4-FFF2-40B4-BE49-F238E27FC236}">
+                <a16:creationId xmlns:a16="http://schemas.microsoft.com/office/drawing/2014/main" id="{871E948F-2BCC-28DE-6328-0A4DE6AEF2F2}"/>
+              </a:ext>
+            </a:extLst>
+          </p:cNvPr>
+          <p:cNvSpPr>
+            <a:spLocks noGrp="1"/>
+          </p:cNvSpPr>
+          <p:nvPr>
+            <p:ph idx="1"/>
+          </p:nvPr>
+        </p:nvSpPr>
+        <p:spPr>
+          <a:xfrm>
+            <a:off x="838200" y="1325563"/>
+            <a:ext cx="10515600" cy="4351338"/>
+          </a:xfrm>
+        </p:spPr>
+        <p:txBody>
+          <a:bodyPr/>
+          <a:lstStyle/>
+          <a:p>
+            <a:r>
+              <a:rPr lang="en-US" altLang="zh-CN" dirty="0"/>
+              <a:t>FDCAN</a:t>
+            </a:r>
+            <a:r>
+              <a:rPr lang="zh-CN" altLang="en-US" dirty="0"/>
+              <a:t>的波特率更高，更容易产生位错误</a:t>
+            </a:r>
+            <a:endParaRPr lang="zh-SG" altLang="en-US" dirty="0"/>
+          </a:p>
+        </p:txBody>
+      </p:sp>
+      <p:pic>
+        <p:nvPicPr>
+          <p:cNvPr id="5" name="图片 4">
+            <a:extLst>
+              <a:ext uri="{FF2B5EF4-FFF2-40B4-BE49-F238E27FC236}">
+                <a16:creationId xmlns:a16="http://schemas.microsoft.com/office/drawing/2014/main" id="{08CA0B85-56AA-81F7-CD7B-59AF31131D63}"/>
+              </a:ext>
+            </a:extLst>
+          </p:cNvPr>
+          <p:cNvPicPr>
+            <a:picLocks noChangeAspect="1"/>
+          </p:cNvPicPr>
+          <p:nvPr/>
+        </p:nvPicPr>
+        <p:blipFill>
+          <a:blip r:embed="rId2"/>
+          <a:stretch>
+            <a:fillRect/>
+          </a:stretch>
+        </p:blipFill>
+        <p:spPr>
+          <a:xfrm>
+            <a:off x="1771470" y="1741156"/>
+            <a:ext cx="8649060" cy="5116844"/>
+          </a:xfrm>
+          <a:prstGeom prst="rect">
+            <a:avLst/>
+          </a:prstGeom>
+        </p:spPr>
+      </p:pic>
+    </p:spTree>
+    <p:extLst>
+      <p:ext uri="{BB962C8B-B14F-4D97-AF65-F5344CB8AC3E}">
+        <p14:creationId xmlns:p14="http://schemas.microsoft.com/office/powerpoint/2010/main" val="3110391825"/>
+      </p:ext>
+    </p:extLst>
+  </p:cSld>
+  <p:clrMapOvr>
+    <a:masterClrMapping/>
+  </p:clrMapOvr>
+</p:sld>
+</file>
+
+<file path=ppt/slides/slide44.xml><?xml version="1.0" encoding="utf-8"?>
+<p:sld xmlns:a="http://schemas.openxmlformats.org/drawingml/2006/main" xmlns:r="http://schemas.openxmlformats.org/officeDocument/2006/relationships" xmlns:p="http://schemas.openxmlformats.org/presentationml/2006/main">
+  <p:cSld>
+    <p:spTree>
+      <p:nvGrpSpPr>
+        <p:cNvPr id="1" name=""/>
+        <p:cNvGrpSpPr/>
+        <p:nvPr/>
+      </p:nvGrpSpPr>
+      <p:grpSpPr>
+        <a:xfrm>
+          <a:off x="0" y="0"/>
+          <a:ext cx="0" cy="0"/>
+          <a:chOff x="0" y="0"/>
+          <a:chExt cx="0" cy="0"/>
+        </a:xfrm>
+      </p:grpSpPr>
+      <p:sp>
+        <p:nvSpPr>
+          <p:cNvPr id="2" name="标题 1">
+            <a:extLst>
+              <a:ext uri="{FF2B5EF4-FFF2-40B4-BE49-F238E27FC236}">
+                <a16:creationId xmlns:a16="http://schemas.microsoft.com/office/drawing/2014/main" id="{6AED354C-B611-2EEE-9056-F8FEF30AC917}"/>
+              </a:ext>
+            </a:extLst>
+          </p:cNvPr>
+          <p:cNvSpPr>
+            <a:spLocks noGrp="1"/>
+          </p:cNvSpPr>
+          <p:nvPr>
+            <p:ph type="title"/>
+          </p:nvPr>
+        </p:nvSpPr>
+        <p:spPr/>
+        <p:txBody>
+          <a:bodyPr/>
+          <a:lstStyle/>
+          <a:p>
+            <a:r>
+              <a:rPr lang="en-US" altLang="zh-SG" dirty="0"/>
+              <a:t>TDC</a:t>
+            </a:r>
+            <a:r>
+              <a:rPr lang="zh-CN" altLang="en-US" dirty="0"/>
+              <a:t>：传输延时补偿</a:t>
+            </a:r>
+            <a:endParaRPr lang="zh-SG" altLang="en-US" dirty="0"/>
+          </a:p>
+        </p:txBody>
+      </p:sp>
+      <p:sp>
+        <p:nvSpPr>
+          <p:cNvPr id="3" name="内容占位符 2">
+            <a:extLst>
+              <a:ext uri="{FF2B5EF4-FFF2-40B4-BE49-F238E27FC236}">
+                <a16:creationId xmlns:a16="http://schemas.microsoft.com/office/drawing/2014/main" id="{43126FC8-CFBB-D4C1-767F-C3710A6A9020}"/>
+              </a:ext>
+            </a:extLst>
+          </p:cNvPr>
+          <p:cNvSpPr>
+            <a:spLocks noGrp="1"/>
+          </p:cNvSpPr>
+          <p:nvPr>
+            <p:ph idx="1"/>
+          </p:nvPr>
+        </p:nvSpPr>
+        <p:spPr/>
+        <p:txBody>
+          <a:bodyPr/>
+          <a:lstStyle/>
+          <a:p>
+            <a:r>
+              <a:rPr lang="zh-CN" altLang="en-US" dirty="0"/>
+              <a:t>添加第二采样点（</a:t>
+            </a:r>
+            <a:r>
+              <a:rPr lang="en-US" altLang="zh-CN" dirty="0"/>
+              <a:t>SSP</a:t>
+            </a:r>
+            <a:r>
+              <a:rPr lang="zh-CN" altLang="en-US" dirty="0"/>
+              <a:t>），避免延迟带来的错误</a:t>
+            </a:r>
+            <a:endParaRPr lang="zh-SG" altLang="en-US" dirty="0"/>
+          </a:p>
+        </p:txBody>
+      </p:sp>
+      <p:pic>
+        <p:nvPicPr>
+          <p:cNvPr id="4" name="图片 3">
+            <a:extLst>
+              <a:ext uri="{FF2B5EF4-FFF2-40B4-BE49-F238E27FC236}">
+                <a16:creationId xmlns:a16="http://schemas.microsoft.com/office/drawing/2014/main" id="{E56D7068-EFC5-9907-7264-1329E2022846}"/>
+              </a:ext>
+            </a:extLst>
+          </p:cNvPr>
+          <p:cNvPicPr>
+            <a:picLocks noChangeAspect="1"/>
+          </p:cNvPicPr>
+          <p:nvPr/>
+        </p:nvPicPr>
+        <p:blipFill>
+          <a:blip r:embed="rId2"/>
+          <a:stretch>
+            <a:fillRect/>
+          </a:stretch>
+        </p:blipFill>
+        <p:spPr>
+          <a:xfrm>
+            <a:off x="3048000" y="2480733"/>
+            <a:ext cx="6096000" cy="1710267"/>
+          </a:xfrm>
+          <a:prstGeom prst="rect">
+            <a:avLst/>
+          </a:prstGeom>
+        </p:spPr>
+      </p:pic>
+      <p:pic>
+        <p:nvPicPr>
+          <p:cNvPr id="5" name="图片 4">
+            <a:extLst>
+              <a:ext uri="{FF2B5EF4-FFF2-40B4-BE49-F238E27FC236}">
+                <a16:creationId xmlns:a16="http://schemas.microsoft.com/office/drawing/2014/main" id="{72B71497-CA8B-ADB2-121D-2C6013EB60AE}"/>
+              </a:ext>
+            </a:extLst>
+          </p:cNvPr>
+          <p:cNvPicPr>
+            <a:picLocks noChangeAspect="1"/>
+          </p:cNvPicPr>
+          <p:nvPr/>
+        </p:nvPicPr>
+        <p:blipFill>
+          <a:blip r:embed="rId3"/>
+          <a:stretch>
+            <a:fillRect/>
+          </a:stretch>
+        </p:blipFill>
+        <p:spPr>
+          <a:xfrm>
+            <a:off x="3048000" y="4191000"/>
+            <a:ext cx="6096000" cy="2667000"/>
+          </a:xfrm>
+          <a:prstGeom prst="rect">
+            <a:avLst/>
+          </a:prstGeom>
+        </p:spPr>
+      </p:pic>
+    </p:spTree>
+    <p:extLst>
+      <p:ext uri="{BB962C8B-B14F-4D97-AF65-F5344CB8AC3E}">
+        <p14:creationId xmlns:p14="http://schemas.microsoft.com/office/powerpoint/2010/main" val="360437501"/>
+      </p:ext>
+    </p:extLst>
+  </p:cSld>
+  <p:clrMapOvr>
+    <a:masterClrMapping/>
+  </p:clrMapOvr>
+</p:sld>
+</file>
+
+<file path=ppt/slides/slide45.xml><?xml version="1.0" encoding="utf-8"?>
+<p:sld xmlns:a="http://schemas.openxmlformats.org/drawingml/2006/main" xmlns:r="http://schemas.openxmlformats.org/officeDocument/2006/relationships" xmlns:p="http://schemas.openxmlformats.org/presentationml/2006/main">
+  <p:cSld>
+    <p:spTree>
+      <p:nvGrpSpPr>
+        <p:cNvPr id="1" name=""/>
+        <p:cNvGrpSpPr/>
+        <p:nvPr/>
+      </p:nvGrpSpPr>
+      <p:grpSpPr>
+        <a:xfrm>
+          <a:off x="0" y="0"/>
+          <a:ext cx="0" cy="0"/>
+          <a:chOff x="0" y="0"/>
+          <a:chExt cx="0" cy="0"/>
+        </a:xfrm>
+      </p:grpSpPr>
+      <p:sp>
+        <p:nvSpPr>
+          <p:cNvPr id="2" name="标题 1">
+            <a:extLst>
+              <a:ext uri="{FF2B5EF4-FFF2-40B4-BE49-F238E27FC236}">
+                <a16:creationId xmlns:a16="http://schemas.microsoft.com/office/drawing/2014/main" id="{4A290D1A-D024-AEE5-BBA4-3B6D7324AE68}"/>
+              </a:ext>
+            </a:extLst>
+          </p:cNvPr>
+          <p:cNvSpPr>
+            <a:spLocks noGrp="1"/>
+          </p:cNvSpPr>
+          <p:nvPr>
+            <p:ph type="title"/>
+          </p:nvPr>
+        </p:nvSpPr>
+        <p:spPr/>
+        <p:txBody>
+          <a:bodyPr/>
+          <a:lstStyle/>
+          <a:p>
+            <a:r>
+              <a:rPr lang="en-US" altLang="zh-CN" dirty="0"/>
+              <a:t>TDC</a:t>
+            </a:r>
+            <a:r>
+              <a:rPr lang="zh-CN" altLang="en-US" dirty="0"/>
+              <a:t>：传输延时补偿</a:t>
+            </a:r>
+            <a:endParaRPr lang="zh-SG" altLang="en-US" dirty="0"/>
+          </a:p>
+        </p:txBody>
+      </p:sp>
+      <p:sp>
+        <p:nvSpPr>
+          <p:cNvPr id="3" name="内容占位符 2">
+            <a:extLst>
+              <a:ext uri="{FF2B5EF4-FFF2-40B4-BE49-F238E27FC236}">
+                <a16:creationId xmlns:a16="http://schemas.microsoft.com/office/drawing/2014/main" id="{16F71F8A-D48A-0857-8DA7-3A54A7560B95}"/>
+              </a:ext>
+            </a:extLst>
+          </p:cNvPr>
+          <p:cNvSpPr>
+            <a:spLocks noGrp="1"/>
+          </p:cNvSpPr>
+          <p:nvPr>
+            <p:ph idx="1"/>
+          </p:nvPr>
+        </p:nvSpPr>
+        <p:spPr/>
+        <p:txBody>
+          <a:bodyPr/>
+          <a:lstStyle/>
+          <a:p>
+            <a:r>
+              <a:rPr lang="zh-CN" altLang="en-US" dirty="0"/>
+              <a:t>配置</a:t>
+            </a:r>
+            <a:r>
+              <a:rPr lang="en-US" altLang="zh-CN" dirty="0"/>
+              <a:t>TDC</a:t>
+            </a:r>
+            <a:endParaRPr lang="en-GB" altLang="zh-SG" dirty="0"/>
+          </a:p>
+          <a:p>
+            <a:pPr marL="0" indent="0">
+              <a:buNone/>
+            </a:pPr>
+            <a:r>
+              <a:rPr lang="en-GB" altLang="zh-SG" dirty="0" err="1"/>
+              <a:t>HAL_StatusTypeDef</a:t>
+            </a:r>
+            <a:r>
+              <a:rPr lang="en-GB" altLang="zh-SG" dirty="0"/>
+              <a:t> </a:t>
+            </a:r>
+            <a:r>
+              <a:rPr lang="en-GB" altLang="zh-SG" dirty="0" err="1"/>
+              <a:t>HAL_FDCAN_ConfigTxDelayCompensation</a:t>
+            </a:r>
+            <a:r>
+              <a:rPr lang="en-GB" altLang="zh-SG" dirty="0"/>
+              <a:t> (</a:t>
+            </a:r>
+            <a:r>
+              <a:rPr lang="en-GB" altLang="zh-SG" dirty="0" err="1"/>
+              <a:t>FDCAN_HandleTypeDef</a:t>
+            </a:r>
+            <a:r>
+              <a:rPr lang="en-GB" altLang="zh-SG" dirty="0"/>
+              <a:t> *</a:t>
+            </a:r>
+            <a:r>
+              <a:rPr lang="en-GB" altLang="zh-SG" dirty="0" err="1"/>
+              <a:t>hfdcan</a:t>
+            </a:r>
+            <a:r>
+              <a:rPr lang="en-GB" altLang="zh-SG" dirty="0"/>
+              <a:t>, uint32_t </a:t>
+            </a:r>
+            <a:r>
+              <a:rPr lang="en-GB" altLang="zh-SG" dirty="0" err="1"/>
+              <a:t>TdcOffset</a:t>
+            </a:r>
+            <a:r>
+              <a:rPr lang="en-GB" altLang="zh-SG" dirty="0"/>
+              <a:t>, uint32_t </a:t>
+            </a:r>
+            <a:r>
+              <a:rPr lang="en-GB" altLang="zh-SG" dirty="0" err="1"/>
+              <a:t>TdcFilter</a:t>
+            </a:r>
+            <a:r>
+              <a:rPr lang="en-GB" altLang="zh-SG" dirty="0"/>
+              <a:t>)</a:t>
+            </a:r>
+          </a:p>
+          <a:p>
+            <a:r>
+              <a:rPr lang="zh-CN" altLang="en-US" dirty="0"/>
+              <a:t>开启</a:t>
+            </a:r>
+            <a:r>
+              <a:rPr lang="en-US" altLang="zh-CN" dirty="0"/>
+              <a:t>TDC</a:t>
+            </a:r>
+            <a:endParaRPr lang="en-GB" altLang="zh-SG" dirty="0"/>
+          </a:p>
+          <a:p>
+            <a:pPr marL="0" indent="0">
+              <a:buNone/>
+            </a:pPr>
+            <a:r>
+              <a:rPr lang="en-GB" altLang="zh-SG" dirty="0" err="1"/>
+              <a:t>HAL_StatusTypeDef</a:t>
+            </a:r>
+            <a:r>
+              <a:rPr lang="en-GB" altLang="zh-SG" dirty="0"/>
+              <a:t> </a:t>
+            </a:r>
+            <a:r>
+              <a:rPr lang="en-GB" altLang="zh-SG" dirty="0" err="1"/>
+              <a:t>HAL_FDCAN_EnableTxDelayCompensation</a:t>
+            </a:r>
+            <a:r>
+              <a:rPr lang="en-GB" altLang="zh-SG" dirty="0"/>
+              <a:t> (</a:t>
+            </a:r>
+            <a:r>
+              <a:rPr lang="en-GB" altLang="zh-SG" dirty="0" err="1"/>
+              <a:t>FDCAN_HandleTypeDef</a:t>
+            </a:r>
+            <a:r>
+              <a:rPr lang="en-GB" altLang="zh-SG" dirty="0"/>
+              <a:t> *</a:t>
+            </a:r>
+            <a:r>
+              <a:rPr lang="en-GB" altLang="zh-SG" dirty="0" err="1"/>
+              <a:t>hfdcan</a:t>
+            </a:r>
+            <a:r>
+              <a:rPr lang="en-GB" altLang="zh-SG" dirty="0"/>
+              <a:t>)</a:t>
+            </a:r>
+            <a:endParaRPr lang="zh-SG" altLang="en-US" dirty="0"/>
+          </a:p>
+        </p:txBody>
+      </p:sp>
+    </p:spTree>
+    <p:extLst>
+      <p:ext uri="{BB962C8B-B14F-4D97-AF65-F5344CB8AC3E}">
+        <p14:creationId xmlns:p14="http://schemas.microsoft.com/office/powerpoint/2010/main" val="2850860645"/>
+      </p:ext>
+    </p:extLst>
+  </p:cSld>
+  <p:clrMapOvr>
+    <a:masterClrMapping/>
+  </p:clrMapOvr>
+</p:sld>
+</file>
+
+<file path=ppt/slides/slide46.xml><?xml version="1.0" encoding="utf-8"?>
+<p:sld xmlns:a="http://schemas.openxmlformats.org/drawingml/2006/main" xmlns:r="http://schemas.openxmlformats.org/officeDocument/2006/relationships" xmlns:p="http://schemas.openxmlformats.org/presentationml/2006/main">
+  <p:cSld>
+    <p:spTree>
+      <p:nvGrpSpPr>
+        <p:cNvPr id="1" name=""/>
+        <p:cNvGrpSpPr/>
+        <p:nvPr/>
+      </p:nvGrpSpPr>
+      <p:grpSpPr>
+        <a:xfrm>
+          <a:off x="0" y="0"/>
+          <a:ext cx="0" cy="0"/>
+          <a:chOff x="0" y="0"/>
+          <a:chExt cx="0" cy="0"/>
+        </a:xfrm>
+      </p:grpSpPr>
+      <p:sp>
+        <p:nvSpPr>
+          <p:cNvPr id="2" name="标题 1">
+            <a:extLst>
+              <a:ext uri="{FF2B5EF4-FFF2-40B4-BE49-F238E27FC236}">
                 <a16:creationId xmlns:a16="http://schemas.microsoft.com/office/drawing/2014/main" id="{059D3551-A2ED-3AAE-1557-3A8B6E9CC456}"/>
               </a:ext>
             </a:extLst>
@@ -9987,6 +10973,468 @@
     <p:extLst>
       <p:ext uri="{BB962C8B-B14F-4D97-AF65-F5344CB8AC3E}">
         <p14:creationId xmlns:p14="http://schemas.microsoft.com/office/powerpoint/2010/main" val="1533031375"/>
+      </p:ext>
+    </p:extLst>
+  </p:cSld>
+  <p:clrMapOvr>
+    <a:masterClrMapping/>
+  </p:clrMapOvr>
+</p:sld>
+</file>
+
+<file path=ppt/slides/slide47.xml><?xml version="1.0" encoding="utf-8"?>
+<p:sld xmlns:a="http://schemas.openxmlformats.org/drawingml/2006/main" xmlns:r="http://schemas.openxmlformats.org/officeDocument/2006/relationships" xmlns:p="http://schemas.openxmlformats.org/presentationml/2006/main">
+  <p:cSld>
+    <p:spTree>
+      <p:nvGrpSpPr>
+        <p:cNvPr id="1" name=""/>
+        <p:cNvGrpSpPr/>
+        <p:nvPr/>
+      </p:nvGrpSpPr>
+      <p:grpSpPr>
+        <a:xfrm>
+          <a:off x="0" y="0"/>
+          <a:ext cx="0" cy="0"/>
+          <a:chOff x="0" y="0"/>
+          <a:chExt cx="0" cy="0"/>
+        </a:xfrm>
+      </p:grpSpPr>
+      <p:sp>
+        <p:nvSpPr>
+          <p:cNvPr id="2" name="标题 1">
+            <a:extLst>
+              <a:ext uri="{FF2B5EF4-FFF2-40B4-BE49-F238E27FC236}">
+                <a16:creationId xmlns:a16="http://schemas.microsoft.com/office/drawing/2014/main" id="{47FBD4AC-FA41-F019-607A-6C8A5D75374E}"/>
+              </a:ext>
+            </a:extLst>
+          </p:cNvPr>
+          <p:cNvSpPr>
+            <a:spLocks noGrp="1"/>
+          </p:cNvSpPr>
+          <p:nvPr>
+            <p:ph type="title"/>
+          </p:nvPr>
+        </p:nvSpPr>
+        <p:spPr>
+          <a:xfrm>
+            <a:off x="838200" y="0"/>
+            <a:ext cx="10515600" cy="1325563"/>
+          </a:xfrm>
+        </p:spPr>
+        <p:txBody>
+          <a:bodyPr/>
+          <a:lstStyle/>
+          <a:p>
+            <a:r>
+              <a:rPr lang="zh-CN" altLang="en-US" dirty="0"/>
+              <a:t>作业</a:t>
+            </a:r>
+            <a:r>
+              <a:rPr lang="en-US" altLang="zh-CN" dirty="0"/>
+              <a:t>2-4</a:t>
+            </a:r>
+            <a:endParaRPr lang="zh-SG" altLang="en-US" dirty="0"/>
+          </a:p>
+        </p:txBody>
+      </p:sp>
+      <p:sp>
+        <p:nvSpPr>
+          <p:cNvPr id="3" name="内容占位符 2">
+            <a:extLst>
+              <a:ext uri="{FF2B5EF4-FFF2-40B4-BE49-F238E27FC236}">
+                <a16:creationId xmlns:a16="http://schemas.microsoft.com/office/drawing/2014/main" id="{F9C92DE0-114C-3605-6927-88542852F832}"/>
+              </a:ext>
+            </a:extLst>
+          </p:cNvPr>
+          <p:cNvSpPr>
+            <a:spLocks noGrp="1"/>
+          </p:cNvSpPr>
+          <p:nvPr>
+            <p:ph idx="1"/>
+          </p:nvPr>
+        </p:nvSpPr>
+        <p:spPr>
+          <a:xfrm>
+            <a:off x="838200" y="1325563"/>
+            <a:ext cx="10515600" cy="5532437"/>
+          </a:xfrm>
+        </p:spPr>
+        <p:txBody>
+          <a:bodyPr>
+            <a:normAutofit/>
+          </a:bodyPr>
+          <a:lstStyle/>
+          <a:p>
+            <a:r>
+              <a:rPr lang="zh-CN" altLang="en-US" dirty="0"/>
+              <a:t>连接大疆电机，上电后读取电机主动上报帧，解析电机数据并记录总接收帧数</a:t>
+            </a:r>
+            <a:endParaRPr lang="en-US" altLang="zh-CN" dirty="0"/>
+          </a:p>
+          <a:p>
+            <a:r>
+              <a:rPr lang="en-US" altLang="zh-CN" dirty="0"/>
+              <a:t>C620+3508</a:t>
+            </a:r>
+            <a:r>
+              <a:rPr lang="zh-CN" altLang="en-US" dirty="0"/>
+              <a:t>手册：</a:t>
+            </a:r>
+            <a:endParaRPr lang="en-US" altLang="zh-CN" dirty="0"/>
+          </a:p>
+          <a:p>
+            <a:pPr marL="0" indent="0">
+              <a:buNone/>
+            </a:pPr>
+            <a:r>
+              <a:rPr lang="en-US" altLang="zh-CN" dirty="0"/>
+              <a:t>https://www.robomaster.com/zh-CN/products/components/general/M3508</a:t>
+            </a:r>
+          </a:p>
+          <a:p>
+            <a:r>
+              <a:rPr lang="en-US" altLang="zh-CN" dirty="0"/>
+              <a:t>C610+2006</a:t>
+            </a:r>
+            <a:r>
+              <a:rPr lang="zh-CN" altLang="en-US" dirty="0"/>
+              <a:t>手册：</a:t>
+            </a:r>
+            <a:endParaRPr lang="en-US" altLang="zh-CN" dirty="0"/>
+          </a:p>
+          <a:p>
+            <a:pPr marL="0" indent="0">
+              <a:buNone/>
+            </a:pPr>
+            <a:r>
+              <a:rPr lang="en-US" altLang="zh-CN" dirty="0"/>
+              <a:t>https://www.robomaster.com/zh-CN/products/components/general/M2006</a:t>
+            </a:r>
+          </a:p>
+          <a:p>
+            <a:r>
+              <a:rPr lang="en-US" altLang="zh-SG" dirty="0"/>
+              <a:t>6020</a:t>
+            </a:r>
+            <a:r>
+              <a:rPr lang="zh-CN" altLang="en-US" dirty="0"/>
+              <a:t>手册：</a:t>
+            </a:r>
+            <a:endParaRPr lang="en-US" altLang="zh-CN" dirty="0"/>
+          </a:p>
+          <a:p>
+            <a:pPr marL="0" indent="0">
+              <a:buNone/>
+            </a:pPr>
+            <a:r>
+              <a:rPr lang="en-GB" altLang="zh-SG" dirty="0"/>
+              <a:t>https://www.robomaster.com/zh-CN/products/components/general/gm6020</a:t>
+            </a:r>
+            <a:endParaRPr lang="zh-SG" altLang="en-US" dirty="0"/>
+          </a:p>
+        </p:txBody>
+      </p:sp>
+    </p:spTree>
+    <p:extLst>
+      <p:ext uri="{BB962C8B-B14F-4D97-AF65-F5344CB8AC3E}">
+        <p14:creationId xmlns:p14="http://schemas.microsoft.com/office/powerpoint/2010/main" val="2428141777"/>
+      </p:ext>
+    </p:extLst>
+  </p:cSld>
+  <p:clrMapOvr>
+    <a:masterClrMapping/>
+  </p:clrMapOvr>
+</p:sld>
+</file>
+
+<file path=ppt/slides/slide48.xml><?xml version="1.0" encoding="utf-8"?>
+<p:sld xmlns:a="http://schemas.openxmlformats.org/drawingml/2006/main" xmlns:r="http://schemas.openxmlformats.org/officeDocument/2006/relationships" xmlns:p="http://schemas.openxmlformats.org/presentationml/2006/main">
+  <p:cSld>
+    <p:spTree>
+      <p:nvGrpSpPr>
+        <p:cNvPr id="1" name=""/>
+        <p:cNvGrpSpPr/>
+        <p:nvPr/>
+      </p:nvGrpSpPr>
+      <p:grpSpPr>
+        <a:xfrm>
+          <a:off x="0" y="0"/>
+          <a:ext cx="0" cy="0"/>
+          <a:chOff x="0" y="0"/>
+          <a:chExt cx="0" cy="0"/>
+        </a:xfrm>
+      </p:grpSpPr>
+      <p:sp>
+        <p:nvSpPr>
+          <p:cNvPr id="2" name="标题 1">
+            <a:extLst>
+              <a:ext uri="{FF2B5EF4-FFF2-40B4-BE49-F238E27FC236}">
+                <a16:creationId xmlns:a16="http://schemas.microsoft.com/office/drawing/2014/main" id="{05090DB3-F24F-D0CD-19ED-032CBBA13846}"/>
+              </a:ext>
+            </a:extLst>
+          </p:cNvPr>
+          <p:cNvSpPr>
+            <a:spLocks noGrp="1"/>
+          </p:cNvSpPr>
+          <p:nvPr>
+            <p:ph type="title"/>
+          </p:nvPr>
+        </p:nvSpPr>
+        <p:spPr/>
+        <p:txBody>
+          <a:bodyPr/>
+          <a:lstStyle/>
+          <a:p>
+            <a:r>
+              <a:rPr lang="en-US" altLang="zh-CN" dirty="0"/>
+              <a:t>Debug</a:t>
+            </a:r>
+            <a:r>
+              <a:rPr lang="zh-CN" altLang="en-US" dirty="0"/>
+              <a:t>思路参考</a:t>
+            </a:r>
+            <a:endParaRPr lang="zh-SG" altLang="en-US" dirty="0"/>
+          </a:p>
+        </p:txBody>
+      </p:sp>
+      <p:sp>
+        <p:nvSpPr>
+          <p:cNvPr id="3" name="内容占位符 2">
+            <a:extLst>
+              <a:ext uri="{FF2B5EF4-FFF2-40B4-BE49-F238E27FC236}">
+                <a16:creationId xmlns:a16="http://schemas.microsoft.com/office/drawing/2014/main" id="{8F753081-838E-3342-E608-8DF9A9D5D0AD}"/>
+              </a:ext>
+            </a:extLst>
+          </p:cNvPr>
+          <p:cNvSpPr>
+            <a:spLocks noGrp="1"/>
+          </p:cNvSpPr>
+          <p:nvPr>
+            <p:ph idx="1"/>
+          </p:nvPr>
+        </p:nvSpPr>
+        <p:spPr/>
+        <p:txBody>
+          <a:bodyPr/>
+          <a:lstStyle/>
+          <a:p>
+            <a:r>
+              <a:rPr lang="en-US" altLang="zh-CN" dirty="0"/>
+              <a:t>H/L</a:t>
+            </a:r>
+            <a:r>
+              <a:rPr lang="zh-CN" altLang="en-US" dirty="0"/>
+              <a:t>是否连接正确？</a:t>
+            </a:r>
+            <a:endParaRPr lang="en-US" altLang="zh-CN" dirty="0"/>
+          </a:p>
+          <a:p>
+            <a:r>
+              <a:rPr lang="zh-CN" altLang="en-US" dirty="0"/>
+              <a:t>终端电阻是否按要求连接？</a:t>
+            </a:r>
+            <a:endParaRPr lang="en-US" altLang="zh-CN" dirty="0"/>
+          </a:p>
+          <a:p>
+            <a:r>
+              <a:rPr lang="zh-CN" altLang="en-US" dirty="0"/>
+              <a:t>帧格式、</a:t>
+            </a:r>
+            <a:r>
+              <a:rPr lang="en-US" altLang="zh-CN" dirty="0"/>
+              <a:t>ID</a:t>
+            </a:r>
+            <a:r>
+              <a:rPr lang="zh-CN" altLang="en-US" dirty="0"/>
+              <a:t>是否配置正确？</a:t>
+            </a:r>
+            <a:endParaRPr lang="en-US" altLang="zh-CN" dirty="0"/>
+          </a:p>
+          <a:p>
+            <a:r>
+              <a:rPr lang="zh-CN" altLang="en-US" dirty="0"/>
+              <a:t>过滤器是否开启？</a:t>
+            </a:r>
+            <a:endParaRPr lang="en-US" altLang="zh-CN" dirty="0"/>
+          </a:p>
+          <a:p>
+            <a:r>
+              <a:rPr lang="en-US" altLang="zh-CN" dirty="0"/>
+              <a:t>FDCAN</a:t>
+            </a:r>
+            <a:r>
+              <a:rPr lang="zh-CN" altLang="en-US" dirty="0"/>
+              <a:t>的</a:t>
+            </a:r>
+            <a:r>
+              <a:rPr lang="en-US" altLang="zh-CN" dirty="0"/>
+              <a:t>Message RAM</a:t>
+            </a:r>
+            <a:r>
+              <a:rPr lang="zh-CN" altLang="en-US" dirty="0"/>
+              <a:t>是否配置正确？</a:t>
+            </a:r>
+            <a:endParaRPr lang="en-US" altLang="zh-CN" dirty="0"/>
+          </a:p>
+          <a:p>
+            <a:r>
+              <a:rPr lang="zh-CN" altLang="en-US" dirty="0"/>
+              <a:t>高比特率下有无</a:t>
+            </a:r>
+            <a:r>
+              <a:rPr lang="en-US" altLang="zh-CN" dirty="0"/>
+              <a:t>TDC</a:t>
+            </a:r>
+            <a:r>
+              <a:rPr lang="zh-CN" altLang="en-US" dirty="0"/>
+              <a:t>？</a:t>
+            </a:r>
+            <a:endParaRPr lang="zh-SG" altLang="en-US" dirty="0"/>
+          </a:p>
+        </p:txBody>
+      </p:sp>
+    </p:spTree>
+    <p:extLst>
+      <p:ext uri="{BB962C8B-B14F-4D97-AF65-F5344CB8AC3E}">
+        <p14:creationId xmlns:p14="http://schemas.microsoft.com/office/powerpoint/2010/main" val="2730460276"/>
+      </p:ext>
+    </p:extLst>
+  </p:cSld>
+  <p:clrMapOvr>
+    <a:masterClrMapping/>
+  </p:clrMapOvr>
+</p:sld>
+</file>
+
+<file path=ppt/slides/slide49.xml><?xml version="1.0" encoding="utf-8"?>
+<p:sld xmlns:a="http://schemas.openxmlformats.org/drawingml/2006/main" xmlns:r="http://schemas.openxmlformats.org/officeDocument/2006/relationships" xmlns:p="http://schemas.openxmlformats.org/presentationml/2006/main">
+  <p:cSld>
+    <p:spTree>
+      <p:nvGrpSpPr>
+        <p:cNvPr id="1" name=""/>
+        <p:cNvGrpSpPr/>
+        <p:nvPr/>
+      </p:nvGrpSpPr>
+      <p:grpSpPr>
+        <a:xfrm>
+          <a:off x="0" y="0"/>
+          <a:ext cx="0" cy="0"/>
+          <a:chOff x="0" y="0"/>
+          <a:chExt cx="0" cy="0"/>
+        </a:xfrm>
+      </p:grpSpPr>
+      <p:sp>
+        <p:nvSpPr>
+          <p:cNvPr id="2" name="标题 1">
+            <a:extLst>
+              <a:ext uri="{FF2B5EF4-FFF2-40B4-BE49-F238E27FC236}">
+                <a16:creationId xmlns:a16="http://schemas.microsoft.com/office/drawing/2014/main" id="{D7A6A358-A691-325B-9F77-EDFA3030D7C9}"/>
+              </a:ext>
+            </a:extLst>
+          </p:cNvPr>
+          <p:cNvSpPr>
+            <a:spLocks noGrp="1"/>
+          </p:cNvSpPr>
+          <p:nvPr>
+            <p:ph type="ctrTitle"/>
+          </p:nvPr>
+        </p:nvSpPr>
+        <p:spPr/>
+        <p:txBody>
+          <a:bodyPr anchor="ctr"/>
+          <a:lstStyle/>
+          <a:p>
+            <a:r>
+              <a:rPr lang="en-US" altLang="zh-SG" dirty="0"/>
+              <a:t>2.6 </a:t>
+            </a:r>
+            <a:r>
+              <a:rPr lang="en-US" altLang="zh-CN" dirty="0"/>
+              <a:t>H7</a:t>
+            </a:r>
+            <a:r>
+              <a:rPr lang="zh-CN" altLang="en-US" dirty="0"/>
+              <a:t>内存与</a:t>
+            </a:r>
+            <a:r>
+              <a:rPr lang="en-US" altLang="zh-CN" dirty="0"/>
+              <a:t>Cache</a:t>
+            </a:r>
+            <a:endParaRPr lang="zh-SG" altLang="en-US" dirty="0"/>
+          </a:p>
+        </p:txBody>
+      </p:sp>
+      <p:sp>
+        <p:nvSpPr>
+          <p:cNvPr id="3" name="副标题 2">
+            <a:extLst>
+              <a:ext uri="{FF2B5EF4-FFF2-40B4-BE49-F238E27FC236}">
+                <a16:creationId xmlns:a16="http://schemas.microsoft.com/office/drawing/2014/main" id="{25407071-A286-A85A-D781-8E1EB4B6057B}"/>
+              </a:ext>
+            </a:extLst>
+          </p:cNvPr>
+          <p:cNvSpPr>
+            <a:spLocks noGrp="1"/>
+          </p:cNvSpPr>
+          <p:nvPr>
+            <p:ph type="subTitle" idx="1"/>
+          </p:nvPr>
+        </p:nvSpPr>
+        <p:spPr/>
+        <p:txBody>
+          <a:bodyPr/>
+          <a:lstStyle/>
+          <a:p>
+            <a:r>
+              <a:rPr lang="zh-CN" altLang="en-US" dirty="0"/>
+              <a:t>要求：</a:t>
+            </a:r>
+            <a:endParaRPr lang="en-US" altLang="zh-CN" dirty="0"/>
+          </a:p>
+          <a:p>
+            <a:pPr marL="342900" indent="-342900">
+              <a:buFont typeface="Arial" panose="020B0604020202020204" pitchFamily="34" charset="0"/>
+              <a:buChar char="•"/>
+            </a:pPr>
+            <a:r>
+              <a:rPr lang="zh-CN" altLang="en-US" dirty="0"/>
+              <a:t>区分不同区域的速度与总线可达性</a:t>
+            </a:r>
+            <a:endParaRPr lang="en-US" altLang="zh-CN" dirty="0"/>
+          </a:p>
+          <a:p>
+            <a:pPr marL="342900" indent="-342900">
+              <a:buFont typeface="Arial" panose="020B0604020202020204" pitchFamily="34" charset="0"/>
+              <a:buChar char="•"/>
+            </a:pPr>
+            <a:r>
+              <a:rPr lang="zh-CN" altLang="en-US" dirty="0"/>
+              <a:t>配置</a:t>
+            </a:r>
+            <a:r>
+              <a:rPr lang="en-US" altLang="zh-CN" dirty="0"/>
+              <a:t>MPU</a:t>
+            </a:r>
+            <a:r>
+              <a:rPr lang="zh-CN" altLang="en-US" dirty="0"/>
+              <a:t>和</a:t>
+            </a:r>
+            <a:r>
+              <a:rPr lang="en-US" altLang="zh-CN" dirty="0"/>
+              <a:t>Cache</a:t>
+            </a:r>
+            <a:r>
+              <a:rPr lang="zh-CN" altLang="en-US" dirty="0"/>
+              <a:t>，解决数据一致性问题</a:t>
+            </a:r>
+            <a:endParaRPr lang="zh-SG" altLang="en-US" dirty="0"/>
+          </a:p>
+        </p:txBody>
+      </p:sp>
+    </p:spTree>
+    <p:extLst>
+      <p:ext uri="{BB962C8B-B14F-4D97-AF65-F5344CB8AC3E}">
+        <p14:creationId xmlns:p14="http://schemas.microsoft.com/office/powerpoint/2010/main" val="117474899"/>
       </p:ext>
     </p:extLst>
   </p:cSld>

--- a/2_STM32基本功能.pptx
+++ b/2_STM32基本功能.pptx
@@ -13541,20 +13541,62 @@
           <a:p>
             <a:r>
               <a:rPr lang="zh-CN" altLang="en-US" dirty="0"/>
-              <a:t>可以在</a:t>
-            </a:r>
-            <a:r>
-              <a:rPr lang="en-GB" altLang="zh-CN" dirty="0" err="1"/>
-              <a:t>SystemInit</a:t>
-            </a:r>
-            <a:r>
-              <a:rPr lang="zh-CN" altLang="en-US" dirty="0"/>
-              <a:t>中加入使能</a:t>
+              <a:t>取消</a:t>
+            </a:r>
+            <a:r>
+              <a:rPr lang="en-US" altLang="zh-CN" dirty="0"/>
+              <a:t>system_stm32h7xx.c</a:t>
+            </a:r>
+            <a:r>
+              <a:rPr lang="zh-CN" altLang="en-US" dirty="0"/>
+              <a:t>第</a:t>
+            </a:r>
+            <a:r>
+              <a:rPr lang="en-US" altLang="zh-CN" dirty="0"/>
+              <a:t>86</a:t>
+            </a:r>
+            <a:r>
+              <a:rPr lang="zh-CN" altLang="en-US"/>
+              <a:t>行的注释</a:t>
+            </a:r>
+            <a:r>
+              <a:rPr lang="zh-CN" altLang="en-US" dirty="0"/>
+              <a:t>以使能时钟</a:t>
             </a:r>
             <a:endParaRPr lang="zh-SG" altLang="en-US" dirty="0"/>
           </a:p>
         </p:txBody>
       </p:sp>
+      <p:pic>
+        <p:nvPicPr>
+          <p:cNvPr id="5" name="图片 4">
+            <a:extLst>
+              <a:ext uri="{FF2B5EF4-FFF2-40B4-BE49-F238E27FC236}">
+                <a16:creationId xmlns:a16="http://schemas.microsoft.com/office/drawing/2014/main" id="{C8C141E5-BADD-EDC1-2D9C-3A2933C3291B}"/>
+              </a:ext>
+            </a:extLst>
+          </p:cNvPr>
+          <p:cNvPicPr>
+            <a:picLocks noChangeAspect="1"/>
+          </p:cNvPicPr>
+          <p:nvPr/>
+        </p:nvPicPr>
+        <p:blipFill>
+          <a:blip r:embed="rId2"/>
+          <a:stretch>
+            <a:fillRect/>
+          </a:stretch>
+        </p:blipFill>
+        <p:spPr>
+          <a:xfrm>
+            <a:off x="58723" y="3429000"/>
+            <a:ext cx="12192000" cy="1955126"/>
+          </a:xfrm>
+          <a:prstGeom prst="rect">
+            <a:avLst/>
+          </a:prstGeom>
+        </p:spPr>
+      </p:pic>
     </p:spTree>
     <p:extLst>
       <p:ext uri="{BB962C8B-B14F-4D97-AF65-F5344CB8AC3E}">
